--- a/Lectures/07-formulation-and-baselines.pptx
+++ b/Lectures/07-formulation-and-baselines.pptx
@@ -5,41 +5,45 @@
     <p:sldMasterId id="2147483648" r:id="rId1"/>
   </p:sldMasterIdLst>
   <p:notesMasterIdLst>
-    <p:notesMasterId r:id="rId29"/>
+    <p:notesMasterId r:id="rId33"/>
   </p:notesMasterIdLst>
   <p:sldIdLst>
     <p:sldId id="256" r:id="rId2"/>
     <p:sldId id="436" r:id="rId3"/>
-    <p:sldId id="424" r:id="rId4"/>
-    <p:sldId id="446" r:id="rId5"/>
-    <p:sldId id="440" r:id="rId6"/>
-    <p:sldId id="450" r:id="rId7"/>
-    <p:sldId id="447" r:id="rId8"/>
-    <p:sldId id="430" r:id="rId9"/>
-    <p:sldId id="425" r:id="rId10"/>
-    <p:sldId id="434" r:id="rId11"/>
-    <p:sldId id="429" r:id="rId12"/>
-    <p:sldId id="435" r:id="rId13"/>
-    <p:sldId id="443" r:id="rId14"/>
-    <p:sldId id="444" r:id="rId15"/>
-    <p:sldId id="442" r:id="rId16"/>
-    <p:sldId id="445" r:id="rId17"/>
-    <p:sldId id="261" r:id="rId18"/>
-    <p:sldId id="269" r:id="rId19"/>
-    <p:sldId id="273" r:id="rId20"/>
-    <p:sldId id="277" r:id="rId21"/>
-    <p:sldId id="285" r:id="rId22"/>
-    <p:sldId id="427" r:id="rId23"/>
-    <p:sldId id="432" r:id="rId24"/>
-    <p:sldId id="448" r:id="rId25"/>
-    <p:sldId id="451" r:id="rId26"/>
-    <p:sldId id="431" r:id="rId27"/>
-    <p:sldId id="449" r:id="rId28"/>
+    <p:sldId id="259" r:id="rId4"/>
+    <p:sldId id="451" r:id="rId5"/>
+    <p:sldId id="452" r:id="rId6"/>
+    <p:sldId id="262" r:id="rId7"/>
+    <p:sldId id="424" r:id="rId8"/>
+    <p:sldId id="446" r:id="rId9"/>
+    <p:sldId id="450" r:id="rId10"/>
+    <p:sldId id="447" r:id="rId11"/>
+    <p:sldId id="430" r:id="rId12"/>
+    <p:sldId id="425" r:id="rId13"/>
+    <p:sldId id="434" r:id="rId14"/>
+    <p:sldId id="429" r:id="rId15"/>
+    <p:sldId id="435" r:id="rId16"/>
+    <p:sldId id="443" r:id="rId17"/>
+    <p:sldId id="444" r:id="rId18"/>
+    <p:sldId id="442" r:id="rId19"/>
+    <p:sldId id="445" r:id="rId20"/>
+    <p:sldId id="269" r:id="rId21"/>
+    <p:sldId id="273" r:id="rId22"/>
+    <p:sldId id="277" r:id="rId23"/>
+    <p:sldId id="285" r:id="rId24"/>
+    <p:sldId id="427" r:id="rId25"/>
+    <p:sldId id="432" r:id="rId26"/>
+    <p:sldId id="453" r:id="rId27"/>
+    <p:sldId id="454" r:id="rId28"/>
+    <p:sldId id="455" r:id="rId29"/>
+    <p:sldId id="456" r:id="rId30"/>
+    <p:sldId id="431" r:id="rId31"/>
+    <p:sldId id="449" r:id="rId32"/>
   </p:sldIdLst>
   <p:sldSz cx="12192000" cy="6858000"/>
   <p:notesSz cx="6858000" cy="9144000"/>
   <p:custDataLst>
-    <p:tags r:id="rId30"/>
+    <p:tags r:id="rId34"/>
   </p:custDataLst>
   <p:defaultTextStyle>
     <a:defPPr marR="0" lvl="0" algn="l" rtl="0">
@@ -275,7 +279,7 @@
       <p15:sldGuideLst xmlns:p15="http://schemas.microsoft.com/office/powerpoint/2012/main"/>
     </p:ext>
     <p:ext uri="http://customooxmlschemas.google.com/">
-      <go:slidesCustomData xmlns="" xmlns:mc="http://schemas.openxmlformats.org/markup-compatibility/2006" xmlns:mv="urn:schemas-microsoft-com:mac:vml" xmlns:c="http://schemas.openxmlformats.org/drawingml/2006/chart" xmlns:dgm="http://schemas.openxmlformats.org/drawingml/2006/diagram" xmlns:o="urn:schemas-microsoft-com:office:office" xmlns:v="urn:schemas-microsoft-com:vml" xmlns:pvml="urn:schemas-microsoft-com:office:powerpoint" xmlns:com="http://schemas.openxmlformats.org/drawingml/2006/compatibility" xmlns:p14="http://schemas.microsoft.com/office/powerpoint/2010/main" xmlns:p15="http://schemas.microsoft.com/office/powerpoint/2012/main" xmlns:go="http://customooxmlschemas.google.com/" r:id="rId31" roundtripDataSignature="AMtx7mjFyVUGRZWio+dc9dxzYsimUxNJbg=="/>
+      <go:slidesCustomData xmlns="" xmlns:mc="http://schemas.openxmlformats.org/markup-compatibility/2006" xmlns:mv="urn:schemas-microsoft-com:mac:vml" xmlns:c="http://schemas.openxmlformats.org/drawingml/2006/chart" xmlns:dgm="http://schemas.openxmlformats.org/drawingml/2006/diagram" xmlns:o="urn:schemas-microsoft-com:office:office" xmlns:v="urn:schemas-microsoft-com:vml" xmlns:pvml="urn:schemas-microsoft-com:office:powerpoint" xmlns:com="http://schemas.openxmlformats.org/drawingml/2006/compatibility" xmlns:p14="http://schemas.microsoft.com/office/powerpoint/2010/main" xmlns:p15="http://schemas.microsoft.com/office/powerpoint/2012/main" xmlns:go="http://customooxmlschemas.google.com/" r:id="rId35" roundtripDataSignature="AMtx7mjFyVUGRZWio+dc9dxzYsimUxNJbg=="/>
     </p:ext>
   </p:extLst>
 </p:presentation>
@@ -1583,7 +1587,7 @@
   <p:cSld>
     <p:spTree>
       <p:nvGrpSpPr>
-        <p:cNvPr id="1" name="Shape 141"/>
+        <p:cNvPr id="1" name="Shape 132"/>
         <p:cNvGrpSpPr/>
         <p:nvPr/>
       </p:nvGrpSpPr>
@@ -1597,7 +1601,111 @@
       </p:grpSpPr>
       <p:sp>
         <p:nvSpPr>
-          <p:cNvPr id="142" name="Google Shape;142;g134dcc1e60c_1_5:notes"/>
+          <p:cNvPr id="133" name="Google Shape;133;g3fa50a05de3_3_79:notes"/>
+          <p:cNvSpPr txBox="1">
+            <a:spLocks noGrp="1"/>
+          </p:cNvSpPr>
+          <p:nvPr>
+            <p:ph type="body" idx="1"/>
+          </p:nvPr>
+        </p:nvSpPr>
+        <p:spPr>
+          <a:xfrm>
+            <a:off x="685800" y="4400550"/>
+            <a:ext cx="5486400" cy="3600450"/>
+          </a:xfrm>
+          <a:prstGeom prst="rect">
+            <a:avLst/>
+          </a:prstGeom>
+        </p:spPr>
+        <p:txBody>
+          <a:bodyPr spcFirstLastPara="1" wrap="square" lIns="91425" tIns="91425" rIns="91425" bIns="91425" anchor="t" anchorCtr="0">
+            <a:noAutofit/>
+          </a:bodyPr>
+          <a:lstStyle/>
+          <a:p>
+            <a:pPr marL="0" lvl="0" indent="0" algn="l" rtl="0">
+              <a:spcBef>
+                <a:spcPts val="0"/>
+              </a:spcBef>
+              <a:spcAft>
+                <a:spcPts val="0"/>
+              </a:spcAft>
+              <a:buNone/>
+            </a:pPr>
+            <a:endParaRPr/>
+          </a:p>
+        </p:txBody>
+      </p:sp>
+      <p:sp>
+        <p:nvSpPr>
+          <p:cNvPr id="134" name="Google Shape;134;g3fa50a05de3_3_79:notes"/>
+          <p:cNvSpPr>
+            <a:spLocks noGrp="1" noRot="1" noChangeAspect="1"/>
+          </p:cNvSpPr>
+          <p:nvPr>
+            <p:ph type="sldImg" idx="2"/>
+          </p:nvPr>
+        </p:nvSpPr>
+        <p:spPr>
+          <a:xfrm>
+            <a:off x="685800" y="1143000"/>
+            <a:ext cx="5486400" cy="3086100"/>
+          </a:xfrm>
+          <a:custGeom>
+            <a:avLst/>
+            <a:gdLst/>
+            <a:ahLst/>
+            <a:cxnLst/>
+            <a:rect l="l" t="t" r="r" b="b"/>
+            <a:pathLst>
+              <a:path w="120000" h="120000" extrusionOk="0">
+                <a:moveTo>
+                  <a:pt x="0" y="0"/>
+                </a:moveTo>
+                <a:lnTo>
+                  <a:pt x="120000" y="0"/>
+                </a:lnTo>
+                <a:lnTo>
+                  <a:pt x="120000" y="120000"/>
+                </a:lnTo>
+                <a:lnTo>
+                  <a:pt x="0" y="120000"/>
+                </a:lnTo>
+                <a:close/>
+              </a:path>
+            </a:pathLst>
+          </a:custGeom>
+        </p:spPr>
+      </p:sp>
+    </p:spTree>
+  </p:cSld>
+  <p:clrMapOvr>
+    <a:masterClrMapping/>
+  </p:clrMapOvr>
+</p:notes>
+</file>
+
+<file path=ppt/notesSlides/notesSlide3.xml><?xml version="1.0" encoding="utf-8"?>
+<p:notes xmlns:a="http://schemas.openxmlformats.org/drawingml/2006/main" xmlns:r="http://schemas.openxmlformats.org/officeDocument/2006/relationships" xmlns:p="http://schemas.openxmlformats.org/presentationml/2006/main" showMasterSp="0" showMasterPhAnim="0">
+  <p:cSld>
+    <p:spTree>
+      <p:nvGrpSpPr>
+        <p:cNvPr id="1" name="Shape 149"/>
+        <p:cNvGrpSpPr/>
+        <p:nvPr/>
+      </p:nvGrpSpPr>
+      <p:grpSpPr>
+        <a:xfrm>
+          <a:off x="0" y="0"/>
+          <a:ext cx="0" cy="0"/>
+          <a:chOff x="0" y="0"/>
+          <a:chExt cx="0" cy="0"/>
+        </a:xfrm>
+      </p:grpSpPr>
+      <p:sp>
+        <p:nvSpPr>
+          <p:cNvPr id="150" name="Google Shape;150;g3fa51e456a9_2_6:notes"/>
           <p:cNvSpPr>
             <a:spLocks noGrp="1" noRot="1" noChangeAspect="1"/>
           </p:cNvSpPr>
@@ -1638,7 +1746,7 @@
       </p:sp>
       <p:sp>
         <p:nvSpPr>
-          <p:cNvPr id="143" name="Google Shape;143;g134dcc1e60c_1_5:notes"/>
+          <p:cNvPr id="151" name="Google Shape;151;g3fa51e456a9_2_6:notes"/>
           <p:cNvSpPr txBox="1">
             <a:spLocks noGrp="1"/>
           </p:cNvSpPr>
@@ -1682,7 +1790,7 @@
 </p:notes>
 </file>
 
-<file path=ppt/notesSlides/notesSlide3.xml><?xml version="1.0" encoding="utf-8"?>
+<file path=ppt/notesSlides/notesSlide4.xml><?xml version="1.0" encoding="utf-8"?>
 <p:notes xmlns:a="http://schemas.openxmlformats.org/drawingml/2006/main" xmlns:r="http://schemas.openxmlformats.org/officeDocument/2006/relationships" xmlns:p="http://schemas.openxmlformats.org/presentationml/2006/main" showMasterSp="0" showMasterPhAnim="0">
   <p:cSld>
     <p:spTree>
@@ -1786,7 +1894,7 @@
 </p:notes>
 </file>
 
-<file path=ppt/notesSlides/notesSlide4.xml><?xml version="1.0" encoding="utf-8"?>
+<file path=ppt/notesSlides/notesSlide5.xml><?xml version="1.0" encoding="utf-8"?>
 <p:notes xmlns:a="http://schemas.openxmlformats.org/drawingml/2006/main" xmlns:r="http://schemas.openxmlformats.org/officeDocument/2006/relationships" xmlns:p="http://schemas.openxmlformats.org/presentationml/2006/main" showMasterSp="0" showMasterPhAnim="0">
   <p:cSld>
     <p:spTree>
@@ -1890,7 +1998,7 @@
 </p:notes>
 </file>
 
-<file path=ppt/notesSlides/notesSlide5.xml><?xml version="1.0" encoding="utf-8"?>
+<file path=ppt/notesSlides/notesSlide6.xml><?xml version="1.0" encoding="utf-8"?>
 <p:notes xmlns:a="http://schemas.openxmlformats.org/drawingml/2006/main" xmlns:r="http://schemas.openxmlformats.org/officeDocument/2006/relationships" xmlns:p="http://schemas.openxmlformats.org/presentationml/2006/main" showMasterSp="0" showMasterPhAnim="0">
   <p:cSld>
     <p:spTree>
@@ -1994,7 +2102,7 @@
 </p:notes>
 </file>
 
-<file path=ppt/notesSlides/notesSlide6.xml><?xml version="1.0" encoding="utf-8"?>
+<file path=ppt/notesSlides/notesSlide7.xml><?xml version="1.0" encoding="utf-8"?>
 <p:notes xmlns:a="http://schemas.openxmlformats.org/drawingml/2006/main" xmlns:r="http://schemas.openxmlformats.org/officeDocument/2006/relationships" xmlns:p="http://schemas.openxmlformats.org/presentationml/2006/main" showMasterSp="0" showMasterPhAnim="0">
   <p:cSld>
     <p:spTree>
@@ -2922,6 +3030,755 @@
 </p:sldLayout>
 </file>
 
+<file path=ppt/slideLayouts/slideLayout4.xml><?xml version="1.0" encoding="utf-8"?>
+<p:sldLayout xmlns:a="http://schemas.openxmlformats.org/drawingml/2006/main" xmlns:r="http://schemas.openxmlformats.org/officeDocument/2006/relationships" xmlns:p="http://schemas.openxmlformats.org/presentationml/2006/main" matchingName="Title and body" type="tx">
+  <p:cSld name="Title and body">
+    <p:spTree>
+      <p:nvGrpSpPr>
+        <p:cNvPr id="1" name="Shape 61"/>
+        <p:cNvGrpSpPr/>
+        <p:nvPr/>
+      </p:nvGrpSpPr>
+      <p:grpSpPr>
+        <a:xfrm>
+          <a:off x="0" y="0"/>
+          <a:ext cx="0" cy="0"/>
+          <a:chOff x="0" y="0"/>
+          <a:chExt cx="0" cy="0"/>
+        </a:xfrm>
+      </p:grpSpPr>
+      <p:sp>
+        <p:nvSpPr>
+          <p:cNvPr id="62" name="Google Shape;62;p16"/>
+          <p:cNvSpPr txBox="1">
+            <a:spLocks noGrp="1"/>
+          </p:cNvSpPr>
+          <p:nvPr>
+            <p:ph type="title"/>
+          </p:nvPr>
+        </p:nvSpPr>
+        <p:spPr>
+          <a:xfrm>
+            <a:off x="415601" y="593367"/>
+            <a:ext cx="11360700" cy="763500"/>
+          </a:xfrm>
+          <a:prstGeom prst="rect">
+            <a:avLst/>
+          </a:prstGeom>
+          <a:noFill/>
+          <a:ln>
+            <a:noFill/>
+          </a:ln>
+        </p:spPr>
+        <p:txBody>
+          <a:bodyPr spcFirstLastPara="1" wrap="square" lIns="91425" tIns="91425" rIns="91425" bIns="91425" anchor="t" anchorCtr="0">
+            <a:noAutofit/>
+          </a:bodyPr>
+          <a:lstStyle>
+            <a:lvl1pPr lvl="0" algn="l">
+              <a:lnSpc>
+                <a:spcPct val="100000"/>
+              </a:lnSpc>
+              <a:spcBef>
+                <a:spcPts val="0"/>
+              </a:spcBef>
+              <a:spcAft>
+                <a:spcPts val="0"/>
+              </a:spcAft>
+              <a:buClr>
+                <a:srgbClr val="FFFFFF"/>
+              </a:buClr>
+              <a:buSzPts val="2800"/>
+              <a:buNone/>
+              <a:defRPr>
+                <a:solidFill>
+                  <a:srgbClr val="FFFFFF"/>
+                </a:solidFill>
+              </a:defRPr>
+            </a:lvl1pPr>
+            <a:lvl2pPr lvl="1" algn="l">
+              <a:lnSpc>
+                <a:spcPct val="100000"/>
+              </a:lnSpc>
+              <a:spcBef>
+                <a:spcPts val="0"/>
+              </a:spcBef>
+              <a:spcAft>
+                <a:spcPts val="0"/>
+              </a:spcAft>
+              <a:buSzPts val="2800"/>
+              <a:buNone/>
+              <a:defRPr/>
+            </a:lvl2pPr>
+            <a:lvl3pPr lvl="2" algn="l">
+              <a:lnSpc>
+                <a:spcPct val="100000"/>
+              </a:lnSpc>
+              <a:spcBef>
+                <a:spcPts val="0"/>
+              </a:spcBef>
+              <a:spcAft>
+                <a:spcPts val="0"/>
+              </a:spcAft>
+              <a:buSzPts val="2800"/>
+              <a:buNone/>
+              <a:defRPr/>
+            </a:lvl3pPr>
+            <a:lvl4pPr lvl="3" algn="l">
+              <a:lnSpc>
+                <a:spcPct val="100000"/>
+              </a:lnSpc>
+              <a:spcBef>
+                <a:spcPts val="0"/>
+              </a:spcBef>
+              <a:spcAft>
+                <a:spcPts val="0"/>
+              </a:spcAft>
+              <a:buSzPts val="2800"/>
+              <a:buNone/>
+              <a:defRPr/>
+            </a:lvl4pPr>
+            <a:lvl5pPr lvl="4" algn="l">
+              <a:lnSpc>
+                <a:spcPct val="100000"/>
+              </a:lnSpc>
+              <a:spcBef>
+                <a:spcPts val="0"/>
+              </a:spcBef>
+              <a:spcAft>
+                <a:spcPts val="0"/>
+              </a:spcAft>
+              <a:buSzPts val="2800"/>
+              <a:buNone/>
+              <a:defRPr/>
+            </a:lvl5pPr>
+            <a:lvl6pPr lvl="5" algn="l">
+              <a:lnSpc>
+                <a:spcPct val="100000"/>
+              </a:lnSpc>
+              <a:spcBef>
+                <a:spcPts val="0"/>
+              </a:spcBef>
+              <a:spcAft>
+                <a:spcPts val="0"/>
+              </a:spcAft>
+              <a:buSzPts val="2800"/>
+              <a:buNone/>
+              <a:defRPr/>
+            </a:lvl6pPr>
+            <a:lvl7pPr lvl="6" algn="l">
+              <a:lnSpc>
+                <a:spcPct val="100000"/>
+              </a:lnSpc>
+              <a:spcBef>
+                <a:spcPts val="0"/>
+              </a:spcBef>
+              <a:spcAft>
+                <a:spcPts val="0"/>
+              </a:spcAft>
+              <a:buSzPts val="2800"/>
+              <a:buNone/>
+              <a:defRPr/>
+            </a:lvl7pPr>
+            <a:lvl8pPr lvl="7" algn="l">
+              <a:lnSpc>
+                <a:spcPct val="100000"/>
+              </a:lnSpc>
+              <a:spcBef>
+                <a:spcPts val="0"/>
+              </a:spcBef>
+              <a:spcAft>
+                <a:spcPts val="0"/>
+              </a:spcAft>
+              <a:buSzPts val="2800"/>
+              <a:buNone/>
+              <a:defRPr/>
+            </a:lvl8pPr>
+            <a:lvl9pPr lvl="8" algn="l">
+              <a:lnSpc>
+                <a:spcPct val="100000"/>
+              </a:lnSpc>
+              <a:spcBef>
+                <a:spcPts val="0"/>
+              </a:spcBef>
+              <a:spcAft>
+                <a:spcPts val="0"/>
+              </a:spcAft>
+              <a:buSzPts val="2800"/>
+              <a:buNone/>
+              <a:defRPr/>
+            </a:lvl9pPr>
+          </a:lstStyle>
+          <a:p>
+            <a:endParaRPr/>
+          </a:p>
+        </p:txBody>
+      </p:sp>
+      <p:sp>
+        <p:nvSpPr>
+          <p:cNvPr id="63" name="Google Shape;63;p16"/>
+          <p:cNvSpPr txBox="1">
+            <a:spLocks noGrp="1"/>
+          </p:cNvSpPr>
+          <p:nvPr>
+            <p:ph type="body" idx="1"/>
+          </p:nvPr>
+        </p:nvSpPr>
+        <p:spPr>
+          <a:xfrm>
+            <a:off x="415601" y="1536633"/>
+            <a:ext cx="11360700" cy="4555200"/>
+          </a:xfrm>
+          <a:prstGeom prst="rect">
+            <a:avLst/>
+          </a:prstGeom>
+          <a:noFill/>
+          <a:ln>
+            <a:noFill/>
+          </a:ln>
+        </p:spPr>
+        <p:txBody>
+          <a:bodyPr spcFirstLastPara="1" wrap="square" lIns="91425" tIns="91425" rIns="91425" bIns="91425" anchor="t" anchorCtr="0">
+            <a:noAutofit/>
+          </a:bodyPr>
+          <a:lstStyle>
+            <a:lvl1pPr marL="609585" lvl="0" indent="-457189" algn="l">
+              <a:lnSpc>
+                <a:spcPct val="115000"/>
+              </a:lnSpc>
+              <a:spcBef>
+                <a:spcPts val="0"/>
+              </a:spcBef>
+              <a:spcAft>
+                <a:spcPts val="0"/>
+              </a:spcAft>
+              <a:buClr>
+                <a:srgbClr val="434343"/>
+              </a:buClr>
+              <a:buSzPts val="1800"/>
+              <a:buChar char="●"/>
+              <a:defRPr>
+                <a:solidFill>
+                  <a:srgbClr val="434343"/>
+                </a:solidFill>
+              </a:defRPr>
+            </a:lvl1pPr>
+            <a:lvl2pPr marL="1219170" lvl="1" indent="-423323" algn="l">
+              <a:lnSpc>
+                <a:spcPct val="115000"/>
+              </a:lnSpc>
+              <a:spcBef>
+                <a:spcPts val="2133"/>
+              </a:spcBef>
+              <a:spcAft>
+                <a:spcPts val="0"/>
+              </a:spcAft>
+              <a:buClr>
+                <a:srgbClr val="434343"/>
+              </a:buClr>
+              <a:buSzPts val="1400"/>
+              <a:buChar char="○"/>
+              <a:defRPr>
+                <a:solidFill>
+                  <a:srgbClr val="434343"/>
+                </a:solidFill>
+              </a:defRPr>
+            </a:lvl2pPr>
+            <a:lvl3pPr marL="1828754" lvl="2" indent="-423323" algn="l">
+              <a:lnSpc>
+                <a:spcPct val="115000"/>
+              </a:lnSpc>
+              <a:spcBef>
+                <a:spcPts val="2133"/>
+              </a:spcBef>
+              <a:spcAft>
+                <a:spcPts val="0"/>
+              </a:spcAft>
+              <a:buClr>
+                <a:srgbClr val="434343"/>
+              </a:buClr>
+              <a:buSzPts val="1400"/>
+              <a:buChar char="■"/>
+              <a:defRPr>
+                <a:solidFill>
+                  <a:srgbClr val="434343"/>
+                </a:solidFill>
+              </a:defRPr>
+            </a:lvl3pPr>
+            <a:lvl4pPr marL="2438339" lvl="3" indent="-423323" algn="l">
+              <a:lnSpc>
+                <a:spcPct val="115000"/>
+              </a:lnSpc>
+              <a:spcBef>
+                <a:spcPts val="2133"/>
+              </a:spcBef>
+              <a:spcAft>
+                <a:spcPts val="0"/>
+              </a:spcAft>
+              <a:buClr>
+                <a:srgbClr val="434343"/>
+              </a:buClr>
+              <a:buSzPts val="1400"/>
+              <a:buChar char="●"/>
+              <a:defRPr>
+                <a:solidFill>
+                  <a:srgbClr val="434343"/>
+                </a:solidFill>
+              </a:defRPr>
+            </a:lvl4pPr>
+            <a:lvl5pPr marL="3047924" lvl="4" indent="-423323" algn="l">
+              <a:lnSpc>
+                <a:spcPct val="115000"/>
+              </a:lnSpc>
+              <a:spcBef>
+                <a:spcPts val="2133"/>
+              </a:spcBef>
+              <a:spcAft>
+                <a:spcPts val="0"/>
+              </a:spcAft>
+              <a:buClr>
+                <a:srgbClr val="434343"/>
+              </a:buClr>
+              <a:buSzPts val="1400"/>
+              <a:buChar char="○"/>
+              <a:defRPr>
+                <a:solidFill>
+                  <a:srgbClr val="434343"/>
+                </a:solidFill>
+              </a:defRPr>
+            </a:lvl5pPr>
+            <a:lvl6pPr marL="3657509" lvl="5" indent="-423323" algn="l">
+              <a:lnSpc>
+                <a:spcPct val="115000"/>
+              </a:lnSpc>
+              <a:spcBef>
+                <a:spcPts val="2133"/>
+              </a:spcBef>
+              <a:spcAft>
+                <a:spcPts val="0"/>
+              </a:spcAft>
+              <a:buClr>
+                <a:srgbClr val="434343"/>
+              </a:buClr>
+              <a:buSzPts val="1400"/>
+              <a:buChar char="■"/>
+              <a:defRPr>
+                <a:solidFill>
+                  <a:srgbClr val="434343"/>
+                </a:solidFill>
+              </a:defRPr>
+            </a:lvl6pPr>
+            <a:lvl7pPr marL="4267093" lvl="6" indent="-423323" algn="l">
+              <a:lnSpc>
+                <a:spcPct val="115000"/>
+              </a:lnSpc>
+              <a:spcBef>
+                <a:spcPts val="2133"/>
+              </a:spcBef>
+              <a:spcAft>
+                <a:spcPts val="0"/>
+              </a:spcAft>
+              <a:buClr>
+                <a:srgbClr val="434343"/>
+              </a:buClr>
+              <a:buSzPts val="1400"/>
+              <a:buChar char="●"/>
+              <a:defRPr>
+                <a:solidFill>
+                  <a:srgbClr val="434343"/>
+                </a:solidFill>
+              </a:defRPr>
+            </a:lvl7pPr>
+            <a:lvl8pPr marL="4876678" lvl="7" indent="-423323" algn="l">
+              <a:lnSpc>
+                <a:spcPct val="115000"/>
+              </a:lnSpc>
+              <a:spcBef>
+                <a:spcPts val="2133"/>
+              </a:spcBef>
+              <a:spcAft>
+                <a:spcPts val="0"/>
+              </a:spcAft>
+              <a:buClr>
+                <a:srgbClr val="434343"/>
+              </a:buClr>
+              <a:buSzPts val="1400"/>
+              <a:buChar char="○"/>
+              <a:defRPr>
+                <a:solidFill>
+                  <a:srgbClr val="434343"/>
+                </a:solidFill>
+              </a:defRPr>
+            </a:lvl8pPr>
+            <a:lvl9pPr marL="5486263" lvl="8" indent="-423323" algn="l">
+              <a:lnSpc>
+                <a:spcPct val="115000"/>
+              </a:lnSpc>
+              <a:spcBef>
+                <a:spcPts val="2133"/>
+              </a:spcBef>
+              <a:spcAft>
+                <a:spcPts val="2133"/>
+              </a:spcAft>
+              <a:buClr>
+                <a:srgbClr val="434343"/>
+              </a:buClr>
+              <a:buSzPts val="1400"/>
+              <a:buChar char="■"/>
+              <a:defRPr>
+                <a:solidFill>
+                  <a:srgbClr val="434343"/>
+                </a:solidFill>
+              </a:defRPr>
+            </a:lvl9pPr>
+          </a:lstStyle>
+          <a:p>
+            <a:endParaRPr/>
+          </a:p>
+        </p:txBody>
+      </p:sp>
+      <p:sp>
+        <p:nvSpPr>
+          <p:cNvPr id="64" name="Google Shape;64;p16"/>
+          <p:cNvSpPr txBox="1">
+            <a:spLocks noGrp="1"/>
+          </p:cNvSpPr>
+          <p:nvPr>
+            <p:ph type="sldNum" idx="12"/>
+          </p:nvPr>
+        </p:nvSpPr>
+        <p:spPr>
+          <a:xfrm>
+            <a:off x="11296611" y="6217623"/>
+            <a:ext cx="731700" cy="524700"/>
+          </a:xfrm>
+          <a:prstGeom prst="rect">
+            <a:avLst/>
+          </a:prstGeom>
+          <a:noFill/>
+          <a:ln>
+            <a:noFill/>
+          </a:ln>
+        </p:spPr>
+        <p:txBody>
+          <a:bodyPr spcFirstLastPara="1" wrap="square" lIns="91425" tIns="91425" rIns="91425" bIns="91425" anchor="ctr" anchorCtr="0">
+            <a:noAutofit/>
+          </a:bodyPr>
+          <a:lstStyle>
+            <a:lvl1pPr marL="0" marR="0" lvl="0" indent="0" algn="r">
+              <a:lnSpc>
+                <a:spcPct val="100000"/>
+              </a:lnSpc>
+              <a:spcBef>
+                <a:spcPts val="0"/>
+              </a:spcBef>
+              <a:spcAft>
+                <a:spcPts val="0"/>
+              </a:spcAft>
+              <a:buClr>
+                <a:srgbClr val="000000"/>
+              </a:buClr>
+              <a:buSzPts val="1000"/>
+              <a:buFont typeface="Arial"/>
+              <a:buNone/>
+              <a:defRPr sz="1333" b="0" i="0" u="none" strike="noStrike" cap="none">
+                <a:solidFill>
+                  <a:schemeClr val="dk2"/>
+                </a:solidFill>
+                <a:latin typeface="Arial"/>
+                <a:ea typeface="Arial"/>
+                <a:cs typeface="Arial"/>
+                <a:sym typeface="Arial"/>
+              </a:defRPr>
+            </a:lvl1pPr>
+            <a:lvl2pPr marL="0" marR="0" lvl="1" indent="0" algn="r">
+              <a:lnSpc>
+                <a:spcPct val="100000"/>
+              </a:lnSpc>
+              <a:spcBef>
+                <a:spcPts val="0"/>
+              </a:spcBef>
+              <a:spcAft>
+                <a:spcPts val="0"/>
+              </a:spcAft>
+              <a:buClr>
+                <a:srgbClr val="000000"/>
+              </a:buClr>
+              <a:buSzPts val="1000"/>
+              <a:buFont typeface="Arial"/>
+              <a:buNone/>
+              <a:defRPr sz="1333" b="0" i="0" u="none" strike="noStrike" cap="none">
+                <a:solidFill>
+                  <a:schemeClr val="dk2"/>
+                </a:solidFill>
+                <a:latin typeface="Arial"/>
+                <a:ea typeface="Arial"/>
+                <a:cs typeface="Arial"/>
+                <a:sym typeface="Arial"/>
+              </a:defRPr>
+            </a:lvl2pPr>
+            <a:lvl3pPr marL="0" marR="0" lvl="2" indent="0" algn="r">
+              <a:lnSpc>
+                <a:spcPct val="100000"/>
+              </a:lnSpc>
+              <a:spcBef>
+                <a:spcPts val="0"/>
+              </a:spcBef>
+              <a:spcAft>
+                <a:spcPts val="0"/>
+              </a:spcAft>
+              <a:buClr>
+                <a:srgbClr val="000000"/>
+              </a:buClr>
+              <a:buSzPts val="1000"/>
+              <a:buFont typeface="Arial"/>
+              <a:buNone/>
+              <a:defRPr sz="1333" b="0" i="0" u="none" strike="noStrike" cap="none">
+                <a:solidFill>
+                  <a:schemeClr val="dk2"/>
+                </a:solidFill>
+                <a:latin typeface="Arial"/>
+                <a:ea typeface="Arial"/>
+                <a:cs typeface="Arial"/>
+                <a:sym typeface="Arial"/>
+              </a:defRPr>
+            </a:lvl3pPr>
+            <a:lvl4pPr marL="0" marR="0" lvl="3" indent="0" algn="r">
+              <a:lnSpc>
+                <a:spcPct val="100000"/>
+              </a:lnSpc>
+              <a:spcBef>
+                <a:spcPts val="0"/>
+              </a:spcBef>
+              <a:spcAft>
+                <a:spcPts val="0"/>
+              </a:spcAft>
+              <a:buClr>
+                <a:srgbClr val="000000"/>
+              </a:buClr>
+              <a:buSzPts val="1000"/>
+              <a:buFont typeface="Arial"/>
+              <a:buNone/>
+              <a:defRPr sz="1333" b="0" i="0" u="none" strike="noStrike" cap="none">
+                <a:solidFill>
+                  <a:schemeClr val="dk2"/>
+                </a:solidFill>
+                <a:latin typeface="Arial"/>
+                <a:ea typeface="Arial"/>
+                <a:cs typeface="Arial"/>
+                <a:sym typeface="Arial"/>
+              </a:defRPr>
+            </a:lvl4pPr>
+            <a:lvl5pPr marL="0" marR="0" lvl="4" indent="0" algn="r">
+              <a:lnSpc>
+                <a:spcPct val="100000"/>
+              </a:lnSpc>
+              <a:spcBef>
+                <a:spcPts val="0"/>
+              </a:spcBef>
+              <a:spcAft>
+                <a:spcPts val="0"/>
+              </a:spcAft>
+              <a:buClr>
+                <a:srgbClr val="000000"/>
+              </a:buClr>
+              <a:buSzPts val="1000"/>
+              <a:buFont typeface="Arial"/>
+              <a:buNone/>
+              <a:defRPr sz="1333" b="0" i="0" u="none" strike="noStrike" cap="none">
+                <a:solidFill>
+                  <a:schemeClr val="dk2"/>
+                </a:solidFill>
+                <a:latin typeface="Arial"/>
+                <a:ea typeface="Arial"/>
+                <a:cs typeface="Arial"/>
+                <a:sym typeface="Arial"/>
+              </a:defRPr>
+            </a:lvl5pPr>
+            <a:lvl6pPr marL="0" marR="0" lvl="5" indent="0" algn="r">
+              <a:lnSpc>
+                <a:spcPct val="100000"/>
+              </a:lnSpc>
+              <a:spcBef>
+                <a:spcPts val="0"/>
+              </a:spcBef>
+              <a:spcAft>
+                <a:spcPts val="0"/>
+              </a:spcAft>
+              <a:buClr>
+                <a:srgbClr val="000000"/>
+              </a:buClr>
+              <a:buSzPts val="1000"/>
+              <a:buFont typeface="Arial"/>
+              <a:buNone/>
+              <a:defRPr sz="1333" b="0" i="0" u="none" strike="noStrike" cap="none">
+                <a:solidFill>
+                  <a:schemeClr val="dk2"/>
+                </a:solidFill>
+                <a:latin typeface="Arial"/>
+                <a:ea typeface="Arial"/>
+                <a:cs typeface="Arial"/>
+                <a:sym typeface="Arial"/>
+              </a:defRPr>
+            </a:lvl6pPr>
+            <a:lvl7pPr marL="0" marR="0" lvl="6" indent="0" algn="r">
+              <a:lnSpc>
+                <a:spcPct val="100000"/>
+              </a:lnSpc>
+              <a:spcBef>
+                <a:spcPts val="0"/>
+              </a:spcBef>
+              <a:spcAft>
+                <a:spcPts val="0"/>
+              </a:spcAft>
+              <a:buClr>
+                <a:srgbClr val="000000"/>
+              </a:buClr>
+              <a:buSzPts val="1000"/>
+              <a:buFont typeface="Arial"/>
+              <a:buNone/>
+              <a:defRPr sz="1333" b="0" i="0" u="none" strike="noStrike" cap="none">
+                <a:solidFill>
+                  <a:schemeClr val="dk2"/>
+                </a:solidFill>
+                <a:latin typeface="Arial"/>
+                <a:ea typeface="Arial"/>
+                <a:cs typeface="Arial"/>
+                <a:sym typeface="Arial"/>
+              </a:defRPr>
+            </a:lvl7pPr>
+            <a:lvl8pPr marL="0" marR="0" lvl="7" indent="0" algn="r">
+              <a:lnSpc>
+                <a:spcPct val="100000"/>
+              </a:lnSpc>
+              <a:spcBef>
+                <a:spcPts val="0"/>
+              </a:spcBef>
+              <a:spcAft>
+                <a:spcPts val="0"/>
+              </a:spcAft>
+              <a:buClr>
+                <a:srgbClr val="000000"/>
+              </a:buClr>
+              <a:buSzPts val="1000"/>
+              <a:buFont typeface="Arial"/>
+              <a:buNone/>
+              <a:defRPr sz="1333" b="0" i="0" u="none" strike="noStrike" cap="none">
+                <a:solidFill>
+                  <a:schemeClr val="dk2"/>
+                </a:solidFill>
+                <a:latin typeface="Arial"/>
+                <a:ea typeface="Arial"/>
+                <a:cs typeface="Arial"/>
+                <a:sym typeface="Arial"/>
+              </a:defRPr>
+            </a:lvl8pPr>
+            <a:lvl9pPr marL="0" marR="0" lvl="8" indent="0" algn="r">
+              <a:lnSpc>
+                <a:spcPct val="100000"/>
+              </a:lnSpc>
+              <a:spcBef>
+                <a:spcPts val="0"/>
+              </a:spcBef>
+              <a:spcAft>
+                <a:spcPts val="0"/>
+              </a:spcAft>
+              <a:buClr>
+                <a:srgbClr val="000000"/>
+              </a:buClr>
+              <a:buSzPts val="1000"/>
+              <a:buFont typeface="Arial"/>
+              <a:buNone/>
+              <a:defRPr sz="1333" b="0" i="0" u="none" strike="noStrike" cap="none">
+                <a:solidFill>
+                  <a:schemeClr val="dk2"/>
+                </a:solidFill>
+                <a:latin typeface="Arial"/>
+                <a:ea typeface="Arial"/>
+                <a:cs typeface="Arial"/>
+                <a:sym typeface="Arial"/>
+              </a:defRPr>
+            </a:lvl9pPr>
+          </a:lstStyle>
+          <a:p>
+            <a:fld id="{00000000-1234-1234-1234-123412341234}" type="slidenum">
+              <a:rPr lang="en" smtClean="0"/>
+              <a:pPr/>
+              <a:t>‹#›</a:t>
+            </a:fld>
+            <a:endParaRPr lang="en"/>
+          </a:p>
+        </p:txBody>
+      </p:sp>
+      <p:sp>
+        <p:nvSpPr>
+          <p:cNvPr id="65" name="Google Shape;65;p16"/>
+          <p:cNvSpPr/>
+          <p:nvPr/>
+        </p:nvSpPr>
+        <p:spPr>
+          <a:xfrm>
+            <a:off x="-14199" y="-36766"/>
+            <a:ext cx="12220500" cy="1447500"/>
+          </a:xfrm>
+          <a:prstGeom prst="rect">
+            <a:avLst/>
+          </a:prstGeom>
+          <a:solidFill>
+            <a:srgbClr val="A61C00"/>
+          </a:solidFill>
+          <a:ln>
+            <a:noFill/>
+          </a:ln>
+        </p:spPr>
+        <p:txBody>
+          <a:bodyPr spcFirstLastPara="1" wrap="square" lIns="121900" tIns="121900" rIns="121900" bIns="121900" anchor="ctr" anchorCtr="0">
+            <a:noAutofit/>
+          </a:bodyPr>
+          <a:lstStyle/>
+          <a:p>
+            <a:pPr marL="0" marR="0" lvl="0" indent="0" algn="l" rtl="0">
+              <a:lnSpc>
+                <a:spcPct val="100000"/>
+              </a:lnSpc>
+              <a:spcBef>
+                <a:spcPts val="0"/>
+              </a:spcBef>
+              <a:spcAft>
+                <a:spcPts val="0"/>
+              </a:spcAft>
+              <a:buClr>
+                <a:srgbClr val="000000"/>
+              </a:buClr>
+              <a:buSzPts val="1100"/>
+              <a:buFont typeface="Arial"/>
+              <a:buNone/>
+            </a:pPr>
+            <a:endParaRPr sz="1467" b="0" i="0" u="none" strike="noStrike" cap="none">
+              <a:solidFill>
+                <a:srgbClr val="000000"/>
+              </a:solidFill>
+              <a:latin typeface="Arial"/>
+              <a:ea typeface="Arial"/>
+              <a:cs typeface="Arial"/>
+              <a:sym typeface="Arial"/>
+            </a:endParaRPr>
+          </a:p>
+        </p:txBody>
+      </p:sp>
+    </p:spTree>
+    <p:extLst>
+      <p:ext uri="{BB962C8B-B14F-4D97-AF65-F5344CB8AC3E}">
+        <p14:creationId xmlns:p14="http://schemas.microsoft.com/office/powerpoint/2010/main" val="510356979"/>
+      </p:ext>
+    </p:extLst>
+  </p:cSld>
+  <p:clrMapOvr>
+    <a:masterClrMapping/>
+  </p:clrMapOvr>
+</p:sldLayout>
+</file>
+
 <file path=ppt/slideMasters/slideMaster1.xml><?xml version="1.0" encoding="utf-8"?>
 <p:sldMaster xmlns:a="http://schemas.openxmlformats.org/drawingml/2006/main" xmlns:r="http://schemas.openxmlformats.org/officeDocument/2006/relationships" xmlns:p="http://schemas.openxmlformats.org/presentationml/2006/main">
   <p:cSld name="simple-light-2">
@@ -3492,6 +4349,7 @@
     <p:sldLayoutId id="2147483649" r:id="rId1"/>
     <p:sldLayoutId id="2147483661" r:id="rId2"/>
     <p:sldLayoutId id="2147483662" r:id="rId3"/>
+    <p:sldLayoutId id="2147483663" r:id="rId4"/>
   </p:sldLayoutIdLst>
   <p:hf sldNum="0" hdr="0" ftr="0" dt="0"/>
   <p:txStyles>
@@ -4291,6 +5149,419 @@
       </p:grpSpPr>
       <p:sp>
         <p:nvSpPr>
+          <p:cNvPr id="3" name="Title 2">
+            <a:extLst>
+              <a:ext uri="{FF2B5EF4-FFF2-40B4-BE49-F238E27FC236}">
+                <a16:creationId xmlns:a16="http://schemas.microsoft.com/office/drawing/2014/main" id="{FA5EDE9B-A257-2333-4DB4-CBD380E13236}"/>
+              </a:ext>
+            </a:extLst>
+          </p:cNvPr>
+          <p:cNvSpPr>
+            <a:spLocks noGrp="1"/>
+          </p:cNvSpPr>
+          <p:nvPr>
+            <p:ph type="title"/>
+          </p:nvPr>
+        </p:nvSpPr>
+        <p:spPr/>
+        <p:txBody>
+          <a:bodyPr/>
+          <a:lstStyle/>
+          <a:p>
+            <a:r>
+              <a:rPr lang="en-US" dirty="0"/>
+              <a:t>Analytical Formulation</a:t>
+            </a:r>
+          </a:p>
+        </p:txBody>
+      </p:sp>
+      <p:sp>
+        <p:nvSpPr>
+          <p:cNvPr id="12" name="TextBox 11">
+            <a:extLst>
+              <a:ext uri="{FF2B5EF4-FFF2-40B4-BE49-F238E27FC236}">
+                <a16:creationId xmlns:a16="http://schemas.microsoft.com/office/drawing/2014/main" id="{92628BEE-B8E7-C511-5764-E82AF6189A5B}"/>
+              </a:ext>
+            </a:extLst>
+          </p:cNvPr>
+          <p:cNvSpPr txBox="1"/>
+          <p:nvPr/>
+        </p:nvSpPr>
+        <p:spPr>
+          <a:xfrm>
+            <a:off x="161381" y="1607442"/>
+            <a:ext cx="3354513" cy="4832092"/>
+          </a:xfrm>
+          <a:prstGeom prst="rect">
+            <a:avLst/>
+          </a:prstGeom>
+          <a:solidFill>
+            <a:schemeClr val="bg2">
+              <a:lumMod val="20000"/>
+              <a:lumOff val="80000"/>
+            </a:schemeClr>
+          </a:solidFill>
+        </p:spPr>
+        <p:style>
+          <a:lnRef idx="2">
+            <a:schemeClr val="accent3">
+              <a:shade val="50000"/>
+            </a:schemeClr>
+          </a:lnRef>
+          <a:fillRef idx="1">
+            <a:schemeClr val="accent3"/>
+          </a:fillRef>
+          <a:effectRef idx="0">
+            <a:schemeClr val="accent3"/>
+          </a:effectRef>
+          <a:fontRef idx="minor">
+            <a:schemeClr val="lt1"/>
+          </a:fontRef>
+        </p:style>
+        <p:txBody>
+          <a:bodyPr wrap="square">
+            <a:spAutoFit/>
+          </a:bodyPr>
+          <a:lstStyle/>
+          <a:p>
+            <a:pPr rtl="0">
+              <a:spcBef>
+                <a:spcPts val="0"/>
+              </a:spcBef>
+              <a:spcAft>
+                <a:spcPts val="0"/>
+              </a:spcAft>
+            </a:pPr>
+            <a:br>
+              <a:rPr lang="en-US" sz="2000" b="0" dirty="0">
+                <a:effectLst/>
+              </a:rPr>
+            </a:br>
+            <a:r>
+              <a:rPr lang="en-US" sz="2000" b="0" i="0" u="none" strike="noStrike" dirty="0">
+                <a:solidFill>
+                  <a:srgbClr val="FF0000"/>
+                </a:solidFill>
+                <a:effectLst/>
+                <a:latin typeface="Arial" panose="020B0604020202020204" pitchFamily="34" charset="0"/>
+              </a:rPr>
+              <a:t>How often is the recommendation/decision being made?</a:t>
+            </a:r>
+            <a:endParaRPr lang="en-US" sz="2000" b="0" dirty="0">
+              <a:effectLst/>
+            </a:endParaRPr>
+          </a:p>
+          <a:p>
+            <a:pPr rtl="0">
+              <a:spcBef>
+                <a:spcPts val="0"/>
+              </a:spcBef>
+              <a:spcAft>
+                <a:spcPts val="0"/>
+              </a:spcAft>
+            </a:pPr>
+            <a:br>
+              <a:rPr lang="en-US" sz="2000" b="0" dirty="0">
+                <a:effectLst/>
+              </a:rPr>
+            </a:br>
+            <a:r>
+              <a:rPr lang="en-US" sz="2000" b="0" i="0" u="none" strike="noStrike" dirty="0">
+                <a:solidFill>
+                  <a:srgbClr val="0000FF"/>
+                </a:solidFill>
+                <a:effectLst/>
+                <a:latin typeface="Arial" panose="020B0604020202020204" pitchFamily="34" charset="0"/>
+              </a:rPr>
+              <a:t>Who/what is included in the cohort?</a:t>
+            </a:r>
+            <a:endParaRPr lang="en-US" sz="2000" b="0" dirty="0">
+              <a:effectLst/>
+            </a:endParaRPr>
+          </a:p>
+          <a:p>
+            <a:pPr rtl="0">
+              <a:spcBef>
+                <a:spcPts val="0"/>
+              </a:spcBef>
+              <a:spcAft>
+                <a:spcPts val="0"/>
+              </a:spcAft>
+            </a:pPr>
+            <a:br>
+              <a:rPr lang="en-US" sz="2000" b="0" dirty="0">
+                <a:effectLst/>
+              </a:rPr>
+            </a:br>
+            <a:r>
+              <a:rPr lang="en-US" sz="2000" b="0" i="0" u="none" strike="noStrike" dirty="0">
+                <a:solidFill>
+                  <a:srgbClr val="FF00FF"/>
+                </a:solidFill>
+                <a:effectLst/>
+                <a:latin typeface="Arial" panose="020B0604020202020204" pitchFamily="34" charset="0"/>
+              </a:rPr>
+              <a:t>What is the output?</a:t>
+            </a:r>
+            <a:endParaRPr lang="en-US" sz="2000" b="0" dirty="0">
+              <a:effectLst/>
+            </a:endParaRPr>
+          </a:p>
+          <a:p>
+            <a:pPr rtl="0">
+              <a:spcBef>
+                <a:spcPts val="0"/>
+              </a:spcBef>
+              <a:spcAft>
+                <a:spcPts val="0"/>
+              </a:spcAft>
+            </a:pPr>
+            <a:br>
+              <a:rPr lang="en-US" sz="2000" b="0" dirty="0">
+                <a:effectLst/>
+              </a:rPr>
+            </a:br>
+            <a:r>
+              <a:rPr lang="en-US" sz="2000" b="0" i="0" u="none" strike="noStrike" dirty="0">
+                <a:solidFill>
+                  <a:srgbClr val="274E13"/>
+                </a:solidFill>
+                <a:effectLst/>
+                <a:latin typeface="Arial" panose="020B0604020202020204" pitchFamily="34" charset="0"/>
+              </a:rPr>
+              <a:t>What outcome are you predicting/estimating?</a:t>
+            </a:r>
+            <a:endParaRPr lang="en-US" sz="2000" b="0" dirty="0">
+              <a:effectLst/>
+            </a:endParaRPr>
+          </a:p>
+          <a:p>
+            <a:pPr rtl="0">
+              <a:spcBef>
+                <a:spcPts val="0"/>
+              </a:spcBef>
+              <a:spcAft>
+                <a:spcPts val="0"/>
+              </a:spcAft>
+            </a:pPr>
+            <a:br>
+              <a:rPr lang="en-US" sz="2000" b="0" dirty="0">
+                <a:effectLst/>
+              </a:rPr>
+            </a:br>
+            <a:r>
+              <a:rPr lang="en-US" sz="2000" b="0" i="0" u="none" strike="noStrike" dirty="0">
+                <a:solidFill>
+                  <a:srgbClr val="B45F06"/>
+                </a:solidFill>
+                <a:effectLst/>
+                <a:latin typeface="Arial" panose="020B0604020202020204" pitchFamily="34" charset="0"/>
+              </a:rPr>
+              <a:t>For what purpose?</a:t>
+            </a:r>
+            <a:endParaRPr lang="en-US" sz="2000" b="0" dirty="0">
+              <a:effectLst/>
+            </a:endParaRPr>
+          </a:p>
+          <a:p>
+            <a:br>
+              <a:rPr lang="en-US" dirty="0"/>
+            </a:br>
+            <a:endParaRPr lang="en-US" dirty="0"/>
+          </a:p>
+        </p:txBody>
+      </p:sp>
+      <p:sp>
+        <p:nvSpPr>
+          <p:cNvPr id="14" name="TextBox 13">
+            <a:extLst>
+              <a:ext uri="{FF2B5EF4-FFF2-40B4-BE49-F238E27FC236}">
+                <a16:creationId xmlns:a16="http://schemas.microsoft.com/office/drawing/2014/main" id="{4E220471-6DE3-15C3-47EA-D5F277E4C9DD}"/>
+              </a:ext>
+            </a:extLst>
+          </p:cNvPr>
+          <p:cNvSpPr txBox="1"/>
+          <p:nvPr/>
+        </p:nvSpPr>
+        <p:spPr>
+          <a:xfrm>
+            <a:off x="3673012" y="1607442"/>
+            <a:ext cx="8101172" cy="4052391"/>
+          </a:xfrm>
+          <a:prstGeom prst="rect">
+            <a:avLst/>
+          </a:prstGeom>
+          <a:noFill/>
+        </p:spPr>
+        <p:txBody>
+          <a:bodyPr wrap="square">
+            <a:spAutoFit/>
+          </a:bodyPr>
+          <a:lstStyle/>
+          <a:p>
+            <a:pPr rtl="0">
+              <a:lnSpc>
+                <a:spcPct val="150000"/>
+              </a:lnSpc>
+              <a:spcBef>
+                <a:spcPts val="0"/>
+              </a:spcBef>
+              <a:spcAft>
+                <a:spcPts val="1600"/>
+              </a:spcAft>
+            </a:pPr>
+            <a:r>
+              <a:rPr lang="en-US" sz="2400" b="0" i="0" u="none" strike="noStrike" dirty="0">
+                <a:solidFill>
+                  <a:srgbClr val="FF0000"/>
+                </a:solidFill>
+                <a:effectLst/>
+                <a:latin typeface="Arial" panose="020B0604020202020204" pitchFamily="34" charset="0"/>
+              </a:rPr>
+              <a:t>On the first day of every semester</a:t>
+            </a:r>
+            <a:r>
+              <a:rPr lang="en-US" sz="2400" b="0" i="0" u="none" strike="noStrike" dirty="0">
+                <a:solidFill>
+                  <a:srgbClr val="595959"/>
+                </a:solidFill>
+                <a:effectLst/>
+                <a:latin typeface="Arial" panose="020B0604020202020204" pitchFamily="34" charset="0"/>
+              </a:rPr>
+              <a:t>, for </a:t>
+            </a:r>
+            <a:r>
+              <a:rPr lang="en-US" sz="2400" b="0" i="0" u="none" strike="noStrike" dirty="0">
+                <a:solidFill>
+                  <a:srgbClr val="0000FF"/>
+                </a:solidFill>
+                <a:effectLst/>
+                <a:latin typeface="Arial" panose="020B0604020202020204" pitchFamily="34" charset="0"/>
+              </a:rPr>
+              <a:t>all the students who are currently enrolled in an undergraduate degree program</a:t>
+            </a:r>
+            <a:r>
+              <a:rPr lang="en-US" sz="2400" b="0" i="0" u="none" strike="noStrike" dirty="0">
+                <a:solidFill>
+                  <a:srgbClr val="595959"/>
+                </a:solidFill>
+                <a:effectLst/>
+                <a:latin typeface="Arial" panose="020B0604020202020204" pitchFamily="34" charset="0"/>
+              </a:rPr>
+              <a:t>, can we identify the </a:t>
+            </a:r>
+            <a:r>
+              <a:rPr lang="en-US" sz="2400" dirty="0">
+                <a:solidFill>
+                  <a:srgbClr val="FF00FF"/>
+                </a:solidFill>
+                <a:latin typeface="Arial" panose="020B0604020202020204" pitchFamily="34" charset="0"/>
+              </a:rPr>
+              <a:t>1</a:t>
+            </a:r>
+            <a:r>
+              <a:rPr lang="en-US" sz="2400" b="0" i="0" u="none" strike="noStrike" dirty="0">
+                <a:solidFill>
+                  <a:srgbClr val="FF00FF"/>
+                </a:solidFill>
+                <a:effectLst/>
+                <a:latin typeface="Arial" panose="020B0604020202020204" pitchFamily="34" charset="0"/>
+              </a:rPr>
+              <a:t>00 highest risk students</a:t>
+            </a:r>
+            <a:r>
+              <a:rPr lang="en-US" sz="2400" b="0" i="0" u="none" strike="noStrike" dirty="0">
+                <a:solidFill>
+                  <a:srgbClr val="595959"/>
+                </a:solidFill>
+                <a:effectLst/>
+                <a:latin typeface="Arial" panose="020B0604020202020204" pitchFamily="34" charset="0"/>
+              </a:rPr>
+              <a:t> who are </a:t>
+            </a:r>
+            <a:r>
+              <a:rPr lang="en-US" sz="2400" b="0" i="0" u="none" strike="noStrike" dirty="0">
+                <a:solidFill>
+                  <a:srgbClr val="38761D"/>
+                </a:solidFill>
+                <a:effectLst/>
+                <a:latin typeface="Arial" panose="020B0604020202020204" pitchFamily="34" charset="0"/>
+              </a:rPr>
+              <a:t>likely to </a:t>
+            </a:r>
+            <a:r>
+              <a:rPr lang="en-US" sz="2400" dirty="0">
+                <a:solidFill>
+                  <a:srgbClr val="38761D"/>
+                </a:solidFill>
+                <a:latin typeface="Arial" panose="020B0604020202020204" pitchFamily="34" charset="0"/>
+              </a:rPr>
+              <a:t>not graduate college within 5 years of their college start </a:t>
+            </a:r>
+            <a:r>
+              <a:rPr lang="en-US" sz="2400" b="0" i="0" u="none" strike="noStrike" dirty="0">
+                <a:solidFill>
+                  <a:srgbClr val="B45F06"/>
+                </a:solidFill>
+                <a:effectLst/>
+                <a:latin typeface="Arial" panose="020B0604020202020204" pitchFamily="34" charset="0"/>
+              </a:rPr>
+              <a:t>to prioritize for proactive academic or other interventions</a:t>
+            </a:r>
+            <a:r>
+              <a:rPr lang="en-US" sz="2400" b="0" i="0" u="none" strike="noStrike" dirty="0">
+                <a:solidFill>
+                  <a:srgbClr val="595959"/>
+                </a:solidFill>
+                <a:effectLst/>
+                <a:latin typeface="Arial" panose="020B0604020202020204" pitchFamily="34" charset="0"/>
+              </a:rPr>
+              <a:t>?</a:t>
+            </a:r>
+            <a:endParaRPr lang="en-US" sz="2400" b="0" dirty="0">
+              <a:effectLst/>
+            </a:endParaRPr>
+          </a:p>
+          <a:p>
+            <a:br>
+              <a:rPr lang="en-US" dirty="0"/>
+            </a:br>
+            <a:endParaRPr lang="en-US" dirty="0"/>
+          </a:p>
+        </p:txBody>
+      </p:sp>
+    </p:spTree>
+    <p:extLst>
+      <p:ext uri="{BB962C8B-B14F-4D97-AF65-F5344CB8AC3E}">
+        <p14:creationId xmlns:p14="http://schemas.microsoft.com/office/powerpoint/2010/main" val="2025399898"/>
+      </p:ext>
+    </p:extLst>
+  </p:cSld>
+  <p:clrMapOvr>
+    <a:masterClrMapping/>
+  </p:clrMapOvr>
+</p:sld>
+</file>
+
+<file path=ppt/slides/slide11.xml><?xml version="1.0" encoding="utf-8"?>
+<p:sld xmlns:a="http://schemas.openxmlformats.org/drawingml/2006/main" xmlns:r="http://schemas.openxmlformats.org/officeDocument/2006/relationships" xmlns:p="http://schemas.openxmlformats.org/presentationml/2006/main">
+  <p:cSld>
+    <p:spTree>
+      <p:nvGrpSpPr>
+        <p:cNvPr id="1" name=""/>
+        <p:cNvGrpSpPr/>
+        <p:nvPr/>
+      </p:nvGrpSpPr>
+      <p:grpSpPr>
+        <a:xfrm>
+          <a:off x="0" y="0"/>
+          <a:ext cx="0" cy="0"/>
+          <a:chOff x="0" y="0"/>
+          <a:chExt cx="0" cy="0"/>
+        </a:xfrm>
+      </p:grpSpPr>
+      <p:sp>
+        <p:nvSpPr>
           <p:cNvPr id="2" name="Text Placeholder 1">
             <a:extLst>
               <a:ext uri="{FF2B5EF4-FFF2-40B4-BE49-F238E27FC236}">
@@ -4314,18 +5585,6 @@
               <a:rPr lang="en-US" dirty="0"/>
               <a:t>What type of analysis are you doing?</a:t>
             </a:r>
-          </a:p>
-          <a:p>
-            <a:endParaRPr lang="en-US" dirty="0"/>
-          </a:p>
-          <a:p>
-            <a:r>
-              <a:rPr lang="en-US" dirty="0"/>
-              <a:t>What are the relevant entities? How do you identify the cohort?</a:t>
-            </a:r>
-            <a:br>
-              <a:rPr lang="en-US" dirty="0"/>
-            </a:br>
             <a:br>
               <a:rPr lang="en-US" dirty="0"/>
             </a:br>
@@ -4364,7 +5623,7 @@
     </p:spTree>
     <p:extLst>
       <p:ext uri="{BB962C8B-B14F-4D97-AF65-F5344CB8AC3E}">
-        <p14:creationId xmlns:p14="http://schemas.microsoft.com/office/powerpoint/2010/main" val="2244128218"/>
+        <p14:creationId xmlns:p14="http://schemas.microsoft.com/office/powerpoint/2010/main" val="3163189124"/>
       </p:ext>
     </p:extLst>
   </p:cSld>
@@ -4374,7 +5633,7 @@
 </p:sld>
 </file>
 
-<file path=ppt/slides/slide11.xml><?xml version="1.0" encoding="utf-8"?>
+<file path=ppt/slides/slide12.xml><?xml version="1.0" encoding="utf-8"?>
 <p:sld xmlns:a="http://schemas.openxmlformats.org/drawingml/2006/main" xmlns:r="http://schemas.openxmlformats.org/officeDocument/2006/relationships" xmlns:p="http://schemas.openxmlformats.org/presentationml/2006/main">
   <p:cSld>
     <p:spTree>
@@ -4414,41 +5673,43 @@
           <a:p>
             <a:r>
               <a:rPr lang="en-US" dirty="0"/>
-              <a:t>Every entity that exists?</a:t>
-            </a:r>
-            <a:br>
+              <a:t>Description</a:t>
+            </a:r>
+          </a:p>
+          <a:p>
+            <a:r>
               <a:rPr lang="en-US" dirty="0"/>
-            </a:br>
-            <a:endParaRPr lang="en-US" dirty="0"/>
+              <a:t>Classification</a:t>
+            </a:r>
           </a:p>
           <a:p>
             <a:r>
               <a:rPr lang="en-US" dirty="0"/>
-              <a:t>“Active” entities?</a:t>
-            </a:r>
-            <a:br>
+              <a:t>Detection</a:t>
+            </a:r>
+          </a:p>
+          <a:p>
+            <a:r>
               <a:rPr lang="en-US" dirty="0"/>
-            </a:br>
-            <a:endParaRPr lang="en-US" dirty="0"/>
+              <a:t>Prediction</a:t>
+            </a:r>
           </a:p>
           <a:p>
             <a:r>
               <a:rPr lang="en-US" dirty="0"/>
-              <a:t>Event-based?</a:t>
-            </a:r>
-          </a:p>
-          <a:p>
-            <a:pPr lvl="1"/>
+              <a:t>Generation</a:t>
+            </a:r>
+          </a:p>
+          <a:p>
             <a:r>
               <a:rPr lang="en-US" dirty="0"/>
-              <a:t>Making predictions when the events occur?</a:t>
-            </a:r>
-          </a:p>
-          <a:p>
-            <a:pPr lvl="1"/>
+              <a:t>Optimization</a:t>
+            </a:r>
+          </a:p>
+          <a:p>
             <a:r>
               <a:rPr lang="en-US" dirty="0"/>
-              <a:t>All entities that have had an event in a certain time window?</a:t>
+              <a:t>Causal Inference</a:t>
             </a:r>
           </a:p>
         </p:txBody>
@@ -4476,7 +5737,7 @@
           <a:p>
             <a:r>
               <a:rPr lang="en-US" dirty="0"/>
-              <a:t>Decisions we need to make: cohort definition</a:t>
+              <a:t>Decisions we need to make: analytical approach</a:t>
             </a:r>
           </a:p>
         </p:txBody>
@@ -4484,7 +5745,7 @@
     </p:spTree>
     <p:extLst>
       <p:ext uri="{BB962C8B-B14F-4D97-AF65-F5344CB8AC3E}">
-        <p14:creationId xmlns:p14="http://schemas.microsoft.com/office/powerpoint/2010/main" val="3823067349"/>
+        <p14:creationId xmlns:p14="http://schemas.microsoft.com/office/powerpoint/2010/main" val="625908078"/>
       </p:ext>
     </p:extLst>
   </p:cSld>
@@ -4494,7 +5755,7 @@
 </p:sld>
 </file>
 
-<file path=ppt/slides/slide12.xml><?xml version="1.0" encoding="utf-8"?>
+<file path=ppt/slides/slide13.xml><?xml version="1.0" encoding="utf-8"?>
 <p:sld xmlns:a="http://schemas.openxmlformats.org/drawingml/2006/main" xmlns:r="http://schemas.openxmlformats.org/officeDocument/2006/relationships" xmlns:p="http://schemas.openxmlformats.org/presentationml/2006/main">
   <p:cSld>
     <p:spTree>
@@ -4545,33 +5806,6 @@
               <a:rPr lang="en-US" dirty="0"/>
               <a:t>What are the relevant entities? How do you identify the cohort?</a:t>
             </a:r>
-          </a:p>
-          <a:p>
-            <a:pPr marL="114300" indent="0">
-              <a:buNone/>
-            </a:pPr>
-            <a:endParaRPr lang="en-US" dirty="0"/>
-          </a:p>
-          <a:p>
-            <a:r>
-              <a:rPr lang="en-US" dirty="0"/>
-              <a:t>How do you define the outcome/label that you care about?</a:t>
-            </a:r>
-            <a:br>
-              <a:rPr lang="en-US" dirty="0"/>
-            </a:br>
-            <a:endParaRPr lang="en-US" dirty="0"/>
-          </a:p>
-          <a:p>
-            <a:r>
-              <a:rPr lang="en-US" dirty="0"/>
-              <a:t>How far into the future are you trying to predict?</a:t>
-            </a:r>
-          </a:p>
-          <a:p>
-            <a:pPr marL="114300" indent="0">
-              <a:buNone/>
-            </a:pPr>
             <a:br>
               <a:rPr lang="en-US" dirty="0"/>
             </a:br>
@@ -4613,6 +5847,255 @@
     </p:spTree>
     <p:extLst>
       <p:ext uri="{BB962C8B-B14F-4D97-AF65-F5344CB8AC3E}">
+        <p14:creationId xmlns:p14="http://schemas.microsoft.com/office/powerpoint/2010/main" val="2244128218"/>
+      </p:ext>
+    </p:extLst>
+  </p:cSld>
+  <p:clrMapOvr>
+    <a:masterClrMapping/>
+  </p:clrMapOvr>
+</p:sld>
+</file>
+
+<file path=ppt/slides/slide14.xml><?xml version="1.0" encoding="utf-8"?>
+<p:sld xmlns:a="http://schemas.openxmlformats.org/drawingml/2006/main" xmlns:r="http://schemas.openxmlformats.org/officeDocument/2006/relationships" xmlns:p="http://schemas.openxmlformats.org/presentationml/2006/main">
+  <p:cSld>
+    <p:spTree>
+      <p:nvGrpSpPr>
+        <p:cNvPr id="1" name=""/>
+        <p:cNvGrpSpPr/>
+        <p:nvPr/>
+      </p:nvGrpSpPr>
+      <p:grpSpPr>
+        <a:xfrm>
+          <a:off x="0" y="0"/>
+          <a:ext cx="0" cy="0"/>
+          <a:chOff x="0" y="0"/>
+          <a:chExt cx="0" cy="0"/>
+        </a:xfrm>
+      </p:grpSpPr>
+      <p:sp>
+        <p:nvSpPr>
+          <p:cNvPr id="2" name="Text Placeholder 1">
+            <a:extLst>
+              <a:ext uri="{FF2B5EF4-FFF2-40B4-BE49-F238E27FC236}">
+                <a16:creationId xmlns:a16="http://schemas.microsoft.com/office/drawing/2014/main" id="{1BF58D61-D951-4047-914F-96A26849E50A}"/>
+              </a:ext>
+            </a:extLst>
+          </p:cNvPr>
+          <p:cNvSpPr>
+            <a:spLocks noGrp="1"/>
+          </p:cNvSpPr>
+          <p:nvPr>
+            <p:ph type="body" idx="1"/>
+          </p:nvPr>
+        </p:nvSpPr>
+        <p:spPr/>
+        <p:txBody>
+          <a:bodyPr/>
+          <a:lstStyle/>
+          <a:p>
+            <a:r>
+              <a:rPr lang="en-US" dirty="0"/>
+              <a:t>Every entity that exists?</a:t>
+            </a:r>
+            <a:br>
+              <a:rPr lang="en-US" dirty="0"/>
+            </a:br>
+            <a:endParaRPr lang="en-US" dirty="0"/>
+          </a:p>
+          <a:p>
+            <a:r>
+              <a:rPr lang="en-US" dirty="0"/>
+              <a:t>“Active” entities?</a:t>
+            </a:r>
+            <a:br>
+              <a:rPr lang="en-US" dirty="0"/>
+            </a:br>
+            <a:endParaRPr lang="en-US" dirty="0"/>
+          </a:p>
+          <a:p>
+            <a:r>
+              <a:rPr lang="en-US" dirty="0"/>
+              <a:t>Event-based?</a:t>
+            </a:r>
+          </a:p>
+          <a:p>
+            <a:pPr lvl="1"/>
+            <a:r>
+              <a:rPr lang="en-US" dirty="0"/>
+              <a:t>Making predictions when the events occur?</a:t>
+            </a:r>
+          </a:p>
+          <a:p>
+            <a:pPr lvl="1"/>
+            <a:r>
+              <a:rPr lang="en-US" dirty="0"/>
+              <a:t>All entities that have had an event in a certain time window?</a:t>
+            </a:r>
+          </a:p>
+        </p:txBody>
+      </p:sp>
+      <p:sp>
+        <p:nvSpPr>
+          <p:cNvPr id="3" name="Title 2">
+            <a:extLst>
+              <a:ext uri="{FF2B5EF4-FFF2-40B4-BE49-F238E27FC236}">
+                <a16:creationId xmlns:a16="http://schemas.microsoft.com/office/drawing/2014/main" id="{18E00A3A-9C26-1B42-A62C-4DB46B741290}"/>
+              </a:ext>
+            </a:extLst>
+          </p:cNvPr>
+          <p:cNvSpPr>
+            <a:spLocks noGrp="1"/>
+          </p:cNvSpPr>
+          <p:nvPr>
+            <p:ph type="title"/>
+          </p:nvPr>
+        </p:nvSpPr>
+        <p:spPr/>
+        <p:txBody>
+          <a:bodyPr/>
+          <a:lstStyle/>
+          <a:p>
+            <a:r>
+              <a:rPr lang="en-US" dirty="0"/>
+              <a:t>Decisions we need to make: cohort definition</a:t>
+            </a:r>
+          </a:p>
+        </p:txBody>
+      </p:sp>
+    </p:spTree>
+    <p:extLst>
+      <p:ext uri="{BB962C8B-B14F-4D97-AF65-F5344CB8AC3E}">
+        <p14:creationId xmlns:p14="http://schemas.microsoft.com/office/powerpoint/2010/main" val="3823067349"/>
+      </p:ext>
+    </p:extLst>
+  </p:cSld>
+  <p:clrMapOvr>
+    <a:masterClrMapping/>
+  </p:clrMapOvr>
+</p:sld>
+</file>
+
+<file path=ppt/slides/slide15.xml><?xml version="1.0" encoding="utf-8"?>
+<p:sld xmlns:a="http://schemas.openxmlformats.org/drawingml/2006/main" xmlns:r="http://schemas.openxmlformats.org/officeDocument/2006/relationships" xmlns:p="http://schemas.openxmlformats.org/presentationml/2006/main">
+  <p:cSld>
+    <p:spTree>
+      <p:nvGrpSpPr>
+        <p:cNvPr id="1" name=""/>
+        <p:cNvGrpSpPr/>
+        <p:nvPr/>
+      </p:nvGrpSpPr>
+      <p:grpSpPr>
+        <a:xfrm>
+          <a:off x="0" y="0"/>
+          <a:ext cx="0" cy="0"/>
+          <a:chOff x="0" y="0"/>
+          <a:chExt cx="0" cy="0"/>
+        </a:xfrm>
+      </p:grpSpPr>
+      <p:sp>
+        <p:nvSpPr>
+          <p:cNvPr id="2" name="Text Placeholder 1">
+            <a:extLst>
+              <a:ext uri="{FF2B5EF4-FFF2-40B4-BE49-F238E27FC236}">
+                <a16:creationId xmlns:a16="http://schemas.microsoft.com/office/drawing/2014/main" id="{4F90177E-EDBA-BC41-B606-574933A1A307}"/>
+              </a:ext>
+            </a:extLst>
+          </p:cNvPr>
+          <p:cNvSpPr>
+            <a:spLocks noGrp="1"/>
+          </p:cNvSpPr>
+          <p:nvPr>
+            <p:ph type="body" idx="1"/>
+          </p:nvPr>
+        </p:nvSpPr>
+        <p:spPr/>
+        <p:txBody>
+          <a:bodyPr/>
+          <a:lstStyle/>
+          <a:p>
+            <a:r>
+              <a:rPr lang="en-US" dirty="0"/>
+              <a:t>What type of analysis are you doing?</a:t>
+            </a:r>
+          </a:p>
+          <a:p>
+            <a:endParaRPr lang="en-US" dirty="0"/>
+          </a:p>
+          <a:p>
+            <a:r>
+              <a:rPr lang="en-US" dirty="0"/>
+              <a:t>What are the relevant entities? How do you identify the cohort?</a:t>
+            </a:r>
+          </a:p>
+          <a:p>
+            <a:pPr marL="114300" indent="0">
+              <a:buNone/>
+            </a:pPr>
+            <a:endParaRPr lang="en-US" dirty="0"/>
+          </a:p>
+          <a:p>
+            <a:r>
+              <a:rPr lang="en-US" dirty="0"/>
+              <a:t>How do you define the outcome/label that you care about?</a:t>
+            </a:r>
+            <a:br>
+              <a:rPr lang="en-US" dirty="0"/>
+            </a:br>
+            <a:endParaRPr lang="en-US" dirty="0"/>
+          </a:p>
+          <a:p>
+            <a:r>
+              <a:rPr lang="en-US" dirty="0"/>
+              <a:t>How far into the future are you trying to predict?</a:t>
+            </a:r>
+          </a:p>
+          <a:p>
+            <a:pPr marL="114300" indent="0">
+              <a:buNone/>
+            </a:pPr>
+            <a:br>
+              <a:rPr lang="en-US" dirty="0"/>
+            </a:br>
+            <a:br>
+              <a:rPr lang="en-US" dirty="0"/>
+            </a:br>
+            <a:endParaRPr lang="en-US" dirty="0"/>
+          </a:p>
+        </p:txBody>
+      </p:sp>
+      <p:sp>
+        <p:nvSpPr>
+          <p:cNvPr id="3" name="Title 2">
+            <a:extLst>
+              <a:ext uri="{FF2B5EF4-FFF2-40B4-BE49-F238E27FC236}">
+                <a16:creationId xmlns:a16="http://schemas.microsoft.com/office/drawing/2014/main" id="{FC4F2F47-A164-2C41-A1CD-CFD1AFCBE708}"/>
+              </a:ext>
+            </a:extLst>
+          </p:cNvPr>
+          <p:cNvSpPr>
+            <a:spLocks noGrp="1"/>
+          </p:cNvSpPr>
+          <p:nvPr>
+            <p:ph type="title"/>
+          </p:nvPr>
+        </p:nvSpPr>
+        <p:spPr/>
+        <p:txBody>
+          <a:bodyPr/>
+          <a:lstStyle/>
+          <a:p>
+            <a:r>
+              <a:rPr lang="en-US" dirty="0"/>
+              <a:t>Decisions we need to make</a:t>
+            </a:r>
+          </a:p>
+        </p:txBody>
+      </p:sp>
+    </p:spTree>
+    <p:extLst>
+      <p:ext uri="{BB962C8B-B14F-4D97-AF65-F5344CB8AC3E}">
         <p14:creationId xmlns:p14="http://schemas.microsoft.com/office/powerpoint/2010/main" val="140988996"/>
       </p:ext>
     </p:extLst>
@@ -4623,7 +6106,7 @@
 </p:sld>
 </file>
 
-<file path=ppt/slides/slide13.xml><?xml version="1.0" encoding="utf-8"?>
+<file path=ppt/slides/slide16.xml><?xml version="1.0" encoding="utf-8"?>
 <p:sld xmlns:a="http://schemas.openxmlformats.org/drawingml/2006/main" xmlns:r="http://schemas.openxmlformats.org/officeDocument/2006/relationships" xmlns:p="http://schemas.openxmlformats.org/presentationml/2006/main">
   <p:cSld>
     <p:spTree>
@@ -5121,7 +6604,7 @@
 </p:sld>
 </file>
 
-<file path=ppt/slides/slide14.xml><?xml version="1.0" encoding="utf-8"?>
+<file path=ppt/slides/slide17.xml><?xml version="1.0" encoding="utf-8"?>
 <p:sld xmlns:a="http://schemas.openxmlformats.org/drawingml/2006/main" xmlns:r="http://schemas.openxmlformats.org/officeDocument/2006/relationships" xmlns:p="http://schemas.openxmlformats.org/presentationml/2006/main">
   <p:cSld>
     <p:spTree>
@@ -5813,7 +7296,7 @@
 </p:sld>
 </file>
 
-<file path=ppt/slides/slide15.xml><?xml version="1.0" encoding="utf-8"?>
+<file path=ppt/slides/slide18.xml><?xml version="1.0" encoding="utf-8"?>
 <p:sld xmlns:a="http://schemas.openxmlformats.org/drawingml/2006/main" xmlns:r="http://schemas.openxmlformats.org/officeDocument/2006/relationships" xmlns:p="http://schemas.openxmlformats.org/presentationml/2006/main">
   <p:cSld>
     <p:spTree>
@@ -6287,7 +7770,7 @@
 </p:sld>
 </file>
 
-<file path=ppt/slides/slide16.xml><?xml version="1.0" encoding="utf-8"?>
+<file path=ppt/slides/slide19.xml><?xml version="1.0" encoding="utf-8"?>
 <p:sld xmlns:a="http://schemas.openxmlformats.org/drawingml/2006/main" xmlns:r="http://schemas.openxmlformats.org/officeDocument/2006/relationships" xmlns:p="http://schemas.openxmlformats.org/presentationml/2006/main">
   <p:cSld>
     <p:spTree>
@@ -6761,12 +8244,12 @@
 </p:sld>
 </file>
 
-<file path=ppt/slides/slide17.xml><?xml version="1.0" encoding="utf-8"?>
+<file path=ppt/slides/slide2.xml><?xml version="1.0" encoding="utf-8"?>
 <p:sld xmlns:a="http://schemas.openxmlformats.org/drawingml/2006/main" xmlns:r="http://schemas.openxmlformats.org/officeDocument/2006/relationships" xmlns:p="http://schemas.openxmlformats.org/presentationml/2006/main">
   <p:cSld>
     <p:spTree>
       <p:nvGrpSpPr>
-        <p:cNvPr id="1" name="Shape 144"/>
+        <p:cNvPr id="1" name=""/>
         <p:cNvGrpSpPr/>
         <p:nvPr/>
       </p:nvGrpSpPr>
@@ -6780,13 +8263,7 @@
       </p:grpSpPr>
       <p:sp>
         <p:nvSpPr>
-          <p:cNvPr id="2" name="Text Placeholder 1">
-            <a:extLst>
-              <a:ext uri="{FF2B5EF4-FFF2-40B4-BE49-F238E27FC236}">
-                <a16:creationId xmlns:a16="http://schemas.microsoft.com/office/drawing/2014/main" id="{F99FE356-1ECD-E2A9-D4E2-8BCE7296DD38}"/>
-              </a:ext>
-            </a:extLst>
-          </p:cNvPr>
+          <p:cNvPr id="2" name="Content Placeholder 1"/>
           <p:cNvSpPr>
             <a:spLocks noGrp="1"/>
           </p:cNvSpPr>
@@ -6799,14 +8276,74 @@
           <a:bodyPr/>
           <a:lstStyle/>
           <a:p>
-            <a:endParaRPr lang="en-US"/>
+            <a:r>
+              <a:rPr lang="en-US" dirty="0"/>
+              <a:t>Coming up this week:</a:t>
+            </a:r>
+          </a:p>
+          <a:p>
+            <a:pPr lvl="1"/>
+            <a:r>
+              <a:rPr lang="en-US" dirty="0"/>
+              <a:t>Friday session on python + </a:t>
+            </a:r>
+            <a:r>
+              <a:rPr lang="en-US" dirty="0" err="1"/>
+              <a:t>sql</a:t>
+            </a:r>
+            <a:r>
+              <a:rPr lang="en-US" dirty="0"/>
+              <a:t> (and advanced </a:t>
+            </a:r>
+            <a:r>
+              <a:rPr lang="en-US" dirty="0" err="1"/>
+              <a:t>sql</a:t>
+            </a:r>
+            <a:r>
+              <a:rPr lang="en-US" dirty="0"/>
+              <a:t>)</a:t>
+            </a:r>
+            <a:br>
+              <a:rPr lang="en-US" dirty="0"/>
+            </a:br>
+            <a:endParaRPr lang="en-US" dirty="0"/>
+          </a:p>
+          <a:p>
+            <a:pPr lvl="1"/>
+            <a:r>
+              <a:rPr lang="en-US" dirty="0"/>
+              <a:t>Thursday session on ML pipelines</a:t>
+            </a:r>
+          </a:p>
+          <a:p>
+            <a:pPr lvl="1"/>
+            <a:endParaRPr lang="en-US" dirty="0"/>
+          </a:p>
+          <a:p>
+            <a:r>
+              <a:rPr lang="en-US" dirty="0"/>
+              <a:t>Next week:</a:t>
+            </a:r>
+          </a:p>
+          <a:p>
+            <a:pPr lvl="1"/>
+            <a:r>
+              <a:rPr lang="en-US" dirty="0"/>
+              <a:t>Proposal peer reviews</a:t>
+            </a:r>
+          </a:p>
+          <a:p>
+            <a:pPr marL="114300" indent="0">
+              <a:buNone/>
+            </a:pPr>
+            <a:endParaRPr lang="en-US" dirty="0"/>
           </a:p>
         </p:txBody>
       </p:sp>
       <p:sp>
         <p:nvSpPr>
-          <p:cNvPr id="145" name="Google Shape;145;p30"/>
-          <p:cNvSpPr txBox="1">
+          <p:cNvPr id="3" name="Title 2"/>
+          <p:cNvSpPr>
             <a:spLocks noGrp="1"/>
           </p:cNvSpPr>
           <p:nvPr>
@@ -6814,398 +8351,32 @@
           </p:nvPr>
         </p:nvSpPr>
         <p:spPr>
-          <a:prstGeom prst="rect">
-            <a:avLst/>
-          </a:prstGeom>
+          <a:xfrm>
+            <a:off x="0" y="325028"/>
+            <a:ext cx="12192000" cy="1143000"/>
+          </a:xfrm>
         </p:spPr>
         <p:txBody>
-          <a:bodyPr spcFirstLastPara="1" wrap="square" lIns="121900" tIns="121900" rIns="121900" bIns="121900" anchor="t" anchorCtr="0">
-            <a:normAutofit fontScale="90000"/>
-          </a:bodyPr>
+          <a:bodyPr/>
           <a:lstStyle/>
           <a:p>
             <a:r>
-              <a:rPr lang="en"/>
-              <a:t>Analytical Formulation</a:t>
-            </a:r>
-            <a:endParaRPr/>
-          </a:p>
-        </p:txBody>
-      </p:sp>
-      <p:sp>
-        <p:nvSpPr>
-          <p:cNvPr id="146" name="Google Shape;146;p30"/>
-          <p:cNvSpPr/>
-          <p:nvPr/>
-        </p:nvSpPr>
-        <p:spPr>
-          <a:xfrm>
-            <a:off x="190320" y="1463207"/>
-            <a:ext cx="3124000" cy="4204400"/>
-          </a:xfrm>
-          <a:prstGeom prst="rect">
-            <a:avLst/>
-          </a:prstGeom>
-          <a:solidFill>
-            <a:srgbClr val="EEEEEE"/>
-          </a:solidFill>
-          <a:ln w="9525" cap="flat" cmpd="sng">
-            <a:solidFill>
-              <a:srgbClr val="595959"/>
-            </a:solidFill>
-            <a:prstDash val="solid"/>
-            <a:round/>
-            <a:headEnd type="none" w="sm" len="sm"/>
-            <a:tailEnd type="none" w="sm" len="sm"/>
-          </a:ln>
-        </p:spPr>
-        <p:txBody>
-          <a:bodyPr spcFirstLastPara="1" wrap="square" lIns="121900" tIns="121900" rIns="121900" bIns="121900" anchor="ctr" anchorCtr="0">
-            <a:noAutofit/>
-          </a:bodyPr>
-          <a:lstStyle/>
-          <a:p>
-            <a:pPr>
-              <a:buSzPts val="1400"/>
-            </a:pPr>
-            <a:endParaRPr sz="1867"/>
-          </a:p>
-        </p:txBody>
-      </p:sp>
-      <p:sp>
-        <p:nvSpPr>
-          <p:cNvPr id="147" name="Google Shape;147;p30"/>
-          <p:cNvSpPr txBox="1"/>
-          <p:nvPr/>
-        </p:nvSpPr>
-        <p:spPr>
-          <a:xfrm>
-            <a:off x="3566453" y="1341573"/>
-            <a:ext cx="8531200" cy="4555200"/>
-          </a:xfrm>
-          <a:prstGeom prst="rect">
-            <a:avLst/>
-          </a:prstGeom>
-          <a:noFill/>
-          <a:ln>
-            <a:noFill/>
-          </a:ln>
-        </p:spPr>
-        <p:txBody>
-          <a:bodyPr spcFirstLastPara="1" wrap="square" lIns="121900" tIns="121900" rIns="121900" bIns="121900" anchor="t" anchorCtr="0">
-            <a:noAutofit/>
-          </a:bodyPr>
-          <a:lstStyle/>
-          <a:p>
-            <a:pPr>
-              <a:lnSpc>
-                <a:spcPct val="115000"/>
-              </a:lnSpc>
-              <a:spcAft>
-                <a:spcPts val="2133"/>
-              </a:spcAft>
-            </a:pPr>
-            <a:r>
-              <a:rPr lang="en" sz="3467">
-                <a:solidFill>
-                  <a:srgbClr val="FF0000"/>
-                </a:solidFill>
-              </a:rPr>
-              <a:t>On the 1</a:t>
-            </a:r>
-            <a:r>
-              <a:rPr lang="en" sz="3467" baseline="30000">
-                <a:solidFill>
-                  <a:srgbClr val="FF0000"/>
-                </a:solidFill>
-              </a:rPr>
-              <a:t>st</a:t>
-            </a:r>
-            <a:r>
-              <a:rPr lang="en" sz="3467">
-                <a:solidFill>
-                  <a:srgbClr val="FF0000"/>
-                </a:solidFill>
-              </a:rPr>
-              <a:t> of every month</a:t>
-            </a:r>
-            <a:r>
-              <a:rPr lang="en" sz="3467">
-                <a:solidFill>
-                  <a:srgbClr val="595959"/>
-                </a:solidFill>
-              </a:rPr>
-              <a:t>, for </a:t>
-            </a:r>
-            <a:r>
-              <a:rPr lang="en" sz="3467">
-                <a:solidFill>
-                  <a:srgbClr val="0000FF"/>
-                </a:solidFill>
-              </a:rPr>
-              <a:t>all individuals who have interacted with MyRC sources in the last 3 years</a:t>
-            </a:r>
-            <a:r>
-              <a:rPr lang="en" sz="3467">
-                <a:solidFill>
-                  <a:srgbClr val="595959"/>
-                </a:solidFill>
-              </a:rPr>
-              <a:t>, can we identify the </a:t>
-            </a:r>
-            <a:r>
-              <a:rPr lang="en" sz="3467">
-                <a:solidFill>
-                  <a:srgbClr val="FF00FF"/>
-                </a:solidFill>
-              </a:rPr>
-              <a:t>100 (JoCo) and 30 (DoCo) individuals </a:t>
-            </a:r>
-            <a:r>
-              <a:rPr lang="en" sz="3467">
-                <a:solidFill>
-                  <a:srgbClr val="595959"/>
-                </a:solidFill>
-              </a:rPr>
-              <a:t>who are </a:t>
-            </a:r>
-            <a:r>
-              <a:rPr lang="en" sz="3467">
-                <a:solidFill>
-                  <a:srgbClr val="38761D"/>
-                </a:solidFill>
-              </a:rPr>
-              <a:t>at highest risk to die by suicide or overdose in the next 6 months </a:t>
-            </a:r>
-            <a:r>
-              <a:rPr lang="en" sz="3467">
-                <a:solidFill>
-                  <a:srgbClr val="B45F06"/>
-                </a:solidFill>
-              </a:rPr>
-              <a:t>to recommend for proactive behavioral health outreach</a:t>
-            </a:r>
-            <a:r>
-              <a:rPr lang="en" sz="3467">
-                <a:solidFill>
-                  <a:srgbClr val="595959"/>
-                </a:solidFill>
-              </a:rPr>
-              <a:t>?</a:t>
-            </a:r>
-            <a:endParaRPr sz="3467">
-              <a:solidFill>
-                <a:srgbClr val="595959"/>
-              </a:solidFill>
-            </a:endParaRPr>
-          </a:p>
-        </p:txBody>
-      </p:sp>
-      <p:sp>
-        <p:nvSpPr>
-          <p:cNvPr id="148" name="Google Shape;148;p30"/>
-          <p:cNvSpPr txBox="1"/>
-          <p:nvPr/>
-        </p:nvSpPr>
-        <p:spPr>
-          <a:xfrm>
-            <a:off x="248120" y="1463207"/>
-            <a:ext cx="3008400" cy="796000"/>
-          </a:xfrm>
-          <a:prstGeom prst="rect">
-            <a:avLst/>
-          </a:prstGeom>
-          <a:noFill/>
-          <a:ln>
-            <a:noFill/>
-          </a:ln>
-        </p:spPr>
-        <p:txBody>
-          <a:bodyPr spcFirstLastPara="1" wrap="square" lIns="121900" tIns="121900" rIns="121900" bIns="121900" anchor="t" anchorCtr="0">
-            <a:noAutofit/>
-          </a:bodyPr>
-          <a:lstStyle/>
-          <a:p>
-            <a:pPr>
-              <a:buSzPts val="1400"/>
-            </a:pPr>
-            <a:r>
-              <a:rPr lang="en" sz="1867">
-                <a:solidFill>
-                  <a:srgbClr val="FF0000"/>
-                </a:solidFill>
-              </a:rPr>
-              <a:t>When and How often is the recommendation / decision being made?</a:t>
-            </a:r>
-            <a:endParaRPr sz="1867">
-              <a:solidFill>
-                <a:srgbClr val="FF0000"/>
-              </a:solidFill>
-            </a:endParaRPr>
-          </a:p>
-        </p:txBody>
-      </p:sp>
-      <p:sp>
-        <p:nvSpPr>
-          <p:cNvPr id="149" name="Google Shape;149;p30"/>
-          <p:cNvSpPr txBox="1"/>
-          <p:nvPr/>
-        </p:nvSpPr>
-        <p:spPr>
-          <a:xfrm>
-            <a:off x="253253" y="2632740"/>
-            <a:ext cx="3008400" cy="796000"/>
-          </a:xfrm>
-          <a:prstGeom prst="rect">
-            <a:avLst/>
-          </a:prstGeom>
-          <a:noFill/>
-          <a:ln>
-            <a:noFill/>
-          </a:ln>
-        </p:spPr>
-        <p:txBody>
-          <a:bodyPr spcFirstLastPara="1" wrap="square" lIns="121900" tIns="121900" rIns="121900" bIns="121900" anchor="t" anchorCtr="0">
-            <a:noAutofit/>
-          </a:bodyPr>
-          <a:lstStyle/>
-          <a:p>
-            <a:pPr>
-              <a:buSzPts val="1400"/>
-            </a:pPr>
-            <a:r>
-              <a:rPr lang="en" sz="1867">
-                <a:solidFill>
-                  <a:srgbClr val="0000FF"/>
-                </a:solidFill>
-              </a:rPr>
-              <a:t>Who/what is included in the cohort?</a:t>
-            </a:r>
-            <a:endParaRPr sz="1867">
-              <a:solidFill>
-                <a:srgbClr val="0000FF"/>
-              </a:solidFill>
-            </a:endParaRPr>
-          </a:p>
-        </p:txBody>
-      </p:sp>
-      <p:sp>
-        <p:nvSpPr>
-          <p:cNvPr id="150" name="Google Shape;150;p30"/>
-          <p:cNvSpPr txBox="1"/>
-          <p:nvPr/>
-        </p:nvSpPr>
-        <p:spPr>
-          <a:xfrm>
-            <a:off x="253253" y="3497473"/>
-            <a:ext cx="3008400" cy="796000"/>
-          </a:xfrm>
-          <a:prstGeom prst="rect">
-            <a:avLst/>
-          </a:prstGeom>
-          <a:noFill/>
-          <a:ln>
-            <a:noFill/>
-          </a:ln>
-        </p:spPr>
-        <p:txBody>
-          <a:bodyPr spcFirstLastPara="1" wrap="square" lIns="121900" tIns="121900" rIns="121900" bIns="121900" anchor="t" anchorCtr="0">
-            <a:noAutofit/>
-          </a:bodyPr>
-          <a:lstStyle/>
-          <a:p>
-            <a:pPr>
-              <a:buSzPts val="1400"/>
-            </a:pPr>
-            <a:r>
-              <a:rPr lang="en" sz="1867">
-                <a:solidFill>
-                  <a:srgbClr val="FF00FF"/>
-                </a:solidFill>
-              </a:rPr>
-              <a:t>What is the output?</a:t>
-            </a:r>
-            <a:endParaRPr sz="1867">
-              <a:solidFill>
-                <a:srgbClr val="FF00FF"/>
-              </a:solidFill>
-            </a:endParaRPr>
-          </a:p>
-        </p:txBody>
-      </p:sp>
-      <p:sp>
-        <p:nvSpPr>
-          <p:cNvPr id="151" name="Google Shape;151;p30"/>
-          <p:cNvSpPr txBox="1"/>
-          <p:nvPr/>
-        </p:nvSpPr>
-        <p:spPr>
-          <a:xfrm>
-            <a:off x="248120" y="4191873"/>
-            <a:ext cx="3008400" cy="1475600"/>
-          </a:xfrm>
-          <a:prstGeom prst="rect">
-            <a:avLst/>
-          </a:prstGeom>
-          <a:noFill/>
-          <a:ln>
-            <a:noFill/>
-          </a:ln>
-        </p:spPr>
-        <p:txBody>
-          <a:bodyPr spcFirstLastPara="1" wrap="square" lIns="121900" tIns="121900" rIns="121900" bIns="121900" anchor="t" anchorCtr="0">
-            <a:noAutofit/>
-          </a:bodyPr>
-          <a:lstStyle/>
-          <a:p>
-            <a:pPr>
-              <a:buSzPts val="1400"/>
-            </a:pPr>
-            <a:r>
-              <a:rPr lang="en" sz="1867">
-                <a:solidFill>
-                  <a:srgbClr val="274E13"/>
-                </a:solidFill>
-              </a:rPr>
-              <a:t>What outcome are you predicting/estimating?</a:t>
-            </a:r>
-            <a:endParaRPr sz="1867">
-              <a:solidFill>
-                <a:srgbClr val="274E13"/>
-              </a:solidFill>
-            </a:endParaRPr>
-          </a:p>
-          <a:p>
-            <a:pPr>
-              <a:buSzPts val="1400"/>
-            </a:pPr>
-            <a:endParaRPr sz="1867">
-              <a:solidFill>
-                <a:srgbClr val="274E13"/>
-              </a:solidFill>
-            </a:endParaRPr>
-          </a:p>
-          <a:p>
-            <a:pPr>
-              <a:buSzPts val="1400"/>
-            </a:pPr>
-            <a:r>
-              <a:rPr lang="en" sz="1867">
-                <a:solidFill>
-                  <a:srgbClr val="B45F06"/>
-                </a:solidFill>
-              </a:rPr>
-              <a:t>For what purpose?</a:t>
-            </a:r>
-            <a:endParaRPr sz="1867">
-              <a:solidFill>
-                <a:srgbClr val="274E13"/>
-              </a:solidFill>
-            </a:endParaRPr>
+              <a:rPr lang="en-US" dirty="0">
+                <a:solidFill>
+                  <a:schemeClr val="bg1"/>
+                </a:solidFill>
+              </a:rPr>
+              <a:t>Things to remember</a:t>
+            </a:r>
           </a:p>
         </p:txBody>
       </p:sp>
     </p:spTree>
+    <p:extLst>
+      <p:ext uri="{BB962C8B-B14F-4D97-AF65-F5344CB8AC3E}">
+        <p14:creationId xmlns:p14="http://schemas.microsoft.com/office/powerpoint/2010/main" val="3930579869"/>
+      </p:ext>
+    </p:extLst>
   </p:cSld>
   <p:clrMapOvr>
     <a:masterClrMapping/>
@@ -7213,7 +8384,7 @@
 </p:sld>
 </file>
 
-<file path=ppt/slides/slide18.xml><?xml version="1.0" encoding="utf-8"?>
+<file path=ppt/slides/slide20.xml><?xml version="1.0" encoding="utf-8"?>
 <p:sld xmlns:a="http://schemas.openxmlformats.org/drawingml/2006/main" xmlns:r="http://schemas.openxmlformats.org/officeDocument/2006/relationships" xmlns:p="http://schemas.openxmlformats.org/presentationml/2006/main">
   <p:cSld>
     <p:spTree>
@@ -7695,7 +8866,7 @@
 </p:sld>
 </file>
 
-<file path=ppt/slides/slide19.xml><?xml version="1.0" encoding="utf-8"?>
+<file path=ppt/slides/slide21.xml><?xml version="1.0" encoding="utf-8"?>
 <p:sld xmlns:a="http://schemas.openxmlformats.org/drawingml/2006/main" xmlns:r="http://schemas.openxmlformats.org/officeDocument/2006/relationships" xmlns:p="http://schemas.openxmlformats.org/presentationml/2006/main">
   <p:cSld>
     <p:spTree>
@@ -8169,147 +9340,7 @@
 </p:sld>
 </file>
 
-<file path=ppt/slides/slide2.xml><?xml version="1.0" encoding="utf-8"?>
-<p:sld xmlns:a="http://schemas.openxmlformats.org/drawingml/2006/main" xmlns:r="http://schemas.openxmlformats.org/officeDocument/2006/relationships" xmlns:p="http://schemas.openxmlformats.org/presentationml/2006/main">
-  <p:cSld>
-    <p:spTree>
-      <p:nvGrpSpPr>
-        <p:cNvPr id="1" name=""/>
-        <p:cNvGrpSpPr/>
-        <p:nvPr/>
-      </p:nvGrpSpPr>
-      <p:grpSpPr>
-        <a:xfrm>
-          <a:off x="0" y="0"/>
-          <a:ext cx="0" cy="0"/>
-          <a:chOff x="0" y="0"/>
-          <a:chExt cx="0" cy="0"/>
-        </a:xfrm>
-      </p:grpSpPr>
-      <p:sp>
-        <p:nvSpPr>
-          <p:cNvPr id="2" name="Content Placeholder 1"/>
-          <p:cNvSpPr>
-            <a:spLocks noGrp="1"/>
-          </p:cNvSpPr>
-          <p:nvPr>
-            <p:ph type="body" idx="1"/>
-          </p:nvPr>
-        </p:nvSpPr>
-        <p:spPr/>
-        <p:txBody>
-          <a:bodyPr/>
-          <a:lstStyle/>
-          <a:p>
-            <a:r>
-              <a:rPr lang="en-US" dirty="0"/>
-              <a:t>Coming up this week:</a:t>
-            </a:r>
-          </a:p>
-          <a:p>
-            <a:pPr lvl="1"/>
-            <a:r>
-              <a:rPr lang="en-US" dirty="0"/>
-              <a:t>Wednesday session on python + </a:t>
-            </a:r>
-            <a:r>
-              <a:rPr lang="en-US" dirty="0" err="1"/>
-              <a:t>sql</a:t>
-            </a:r>
-            <a:r>
-              <a:rPr lang="en-US" dirty="0"/>
-              <a:t> (and advanced </a:t>
-            </a:r>
-            <a:r>
-              <a:rPr lang="en-US" dirty="0" err="1"/>
-              <a:t>sql</a:t>
-            </a:r>
-            <a:r>
-              <a:rPr lang="en-US" dirty="0"/>
-              <a:t>)</a:t>
-            </a:r>
-            <a:br>
-              <a:rPr lang="en-US" dirty="0"/>
-            </a:br>
-            <a:endParaRPr lang="en-US" dirty="0"/>
-          </a:p>
-          <a:p>
-            <a:pPr lvl="1"/>
-            <a:r>
-              <a:rPr lang="en-US" dirty="0"/>
-              <a:t>Thursday session on ML pipelines</a:t>
-            </a:r>
-          </a:p>
-          <a:p>
-            <a:pPr lvl="1"/>
-            <a:endParaRPr lang="en-US" dirty="0"/>
-          </a:p>
-          <a:p>
-            <a:r>
-              <a:rPr lang="en-US" dirty="0"/>
-              <a:t>Next week:</a:t>
-            </a:r>
-          </a:p>
-          <a:p>
-            <a:pPr lvl="1"/>
-            <a:r>
-              <a:rPr lang="en-US" dirty="0"/>
-              <a:t>Proposal peer reviews</a:t>
-            </a:r>
-          </a:p>
-          <a:p>
-            <a:pPr marL="114300" indent="0">
-              <a:buNone/>
-            </a:pPr>
-            <a:endParaRPr lang="en-US" dirty="0"/>
-          </a:p>
-        </p:txBody>
-      </p:sp>
-      <p:sp>
-        <p:nvSpPr>
-          <p:cNvPr id="3" name="Title 2"/>
-          <p:cNvSpPr>
-            <a:spLocks noGrp="1"/>
-          </p:cNvSpPr>
-          <p:nvPr>
-            <p:ph type="title"/>
-          </p:nvPr>
-        </p:nvSpPr>
-        <p:spPr>
-          <a:xfrm>
-            <a:off x="0" y="325028"/>
-            <a:ext cx="12192000" cy="1143000"/>
-          </a:xfrm>
-        </p:spPr>
-        <p:txBody>
-          <a:bodyPr/>
-          <a:lstStyle/>
-          <a:p>
-            <a:r>
-              <a:rPr lang="en-US" dirty="0">
-                <a:solidFill>
-                  <a:schemeClr val="bg1"/>
-                </a:solidFill>
-              </a:rPr>
-              <a:t>Things to remember</a:t>
-            </a:r>
-          </a:p>
-        </p:txBody>
-      </p:sp>
-    </p:spTree>
-    <p:extLst>
-      <p:ext uri="{BB962C8B-B14F-4D97-AF65-F5344CB8AC3E}">
-        <p14:creationId xmlns:p14="http://schemas.microsoft.com/office/powerpoint/2010/main" val="3930579869"/>
-      </p:ext>
-    </p:extLst>
-  </p:cSld>
-  <p:clrMapOvr>
-    <a:masterClrMapping/>
-  </p:clrMapOvr>
-</p:sld>
-</file>
-
-<file path=ppt/slides/slide20.xml><?xml version="1.0" encoding="utf-8"?>
+<file path=ppt/slides/slide22.xml><?xml version="1.0" encoding="utf-8"?>
 <p:sld xmlns:a="http://schemas.openxmlformats.org/drawingml/2006/main" xmlns:r="http://schemas.openxmlformats.org/officeDocument/2006/relationships" xmlns:p="http://schemas.openxmlformats.org/presentationml/2006/main">
   <p:cSld>
     <p:spTree>
@@ -8766,7 +9797,7 @@
 </p:sld>
 </file>
 
-<file path=ppt/slides/slide21.xml><?xml version="1.0" encoding="utf-8"?>
+<file path=ppt/slides/slide23.xml><?xml version="1.0" encoding="utf-8"?>
 <p:sld xmlns:a="http://schemas.openxmlformats.org/drawingml/2006/main" xmlns:r="http://schemas.openxmlformats.org/officeDocument/2006/relationships" xmlns:p="http://schemas.openxmlformats.org/presentationml/2006/main">
   <p:cSld>
     <p:spTree>
@@ -9222,7 +10253,7 @@
 </p:sld>
 </file>
 
-<file path=ppt/slides/slide22.xml><?xml version="1.0" encoding="utf-8"?>
+<file path=ppt/slides/slide24.xml><?xml version="1.0" encoding="utf-8"?>
 <p:sld xmlns:a="http://schemas.openxmlformats.org/drawingml/2006/main" xmlns:r="http://schemas.openxmlformats.org/officeDocument/2006/relationships" xmlns:p="http://schemas.openxmlformats.org/presentationml/2006/main">
   <p:cSld>
     <p:spTree>
@@ -9325,7 +10356,7 @@
 </p:sld>
 </file>
 
-<file path=ppt/slides/slide23.xml><?xml version="1.0" encoding="utf-8"?>
+<file path=ppt/slides/slide25.xml><?xml version="1.0" encoding="utf-8"?>
 <p:sld xmlns:a="http://schemas.openxmlformats.org/drawingml/2006/main" xmlns:r="http://schemas.openxmlformats.org/officeDocument/2006/relationships" xmlns:p="http://schemas.openxmlformats.org/presentationml/2006/main">
   <p:cSld>
     <p:spTree>
@@ -9470,139 +10501,13 @@
 </p:sld>
 </file>
 
-<file path=ppt/slides/slide24.xml><?xml version="1.0" encoding="utf-8"?>
-<p:sld xmlns:a="http://schemas.openxmlformats.org/drawingml/2006/main" xmlns:r="http://schemas.openxmlformats.org/officeDocument/2006/relationships" xmlns:p="http://schemas.openxmlformats.org/presentationml/2006/main" show="0">
-  <p:cSld>
-    <p:spTree>
-      <p:nvGrpSpPr>
-        <p:cNvPr id="1" name=""/>
-        <p:cNvGrpSpPr/>
-        <p:nvPr/>
-      </p:nvGrpSpPr>
-      <p:grpSpPr>
-        <a:xfrm>
-          <a:off x="0" y="0"/>
-          <a:ext cx="0" cy="0"/>
-          <a:chOff x="0" y="0"/>
-          <a:chExt cx="0" cy="0"/>
-        </a:xfrm>
-      </p:grpSpPr>
-      <p:sp>
-        <p:nvSpPr>
-          <p:cNvPr id="3" name="Title 2">
-            <a:extLst>
-              <a:ext uri="{FF2B5EF4-FFF2-40B4-BE49-F238E27FC236}">
-                <a16:creationId xmlns:a16="http://schemas.microsoft.com/office/drawing/2014/main" id="{F7B27DC9-378A-B50B-7138-EED9A5CC7668}"/>
-              </a:ext>
-            </a:extLst>
-          </p:cNvPr>
-          <p:cNvSpPr>
-            <a:spLocks noGrp="1"/>
-          </p:cNvSpPr>
-          <p:nvPr>
-            <p:ph type="title"/>
-          </p:nvPr>
-        </p:nvSpPr>
-        <p:spPr>
-          <a:xfrm>
-            <a:off x="151106" y="20548"/>
-            <a:ext cx="11360700" cy="763500"/>
-          </a:xfrm>
-        </p:spPr>
-        <p:txBody>
-          <a:bodyPr/>
-          <a:lstStyle/>
-          <a:p>
-            <a:r>
-              <a:rPr lang="en-US" dirty="0"/>
-              <a:t>For the Netflix example, what would be a reasonable baseline method that doesn't require using any ML?</a:t>
-            </a:r>
-          </a:p>
-        </p:txBody>
-      </p:sp>
-      <p:sp>
-        <p:nvSpPr>
-          <p:cNvPr id="4" name="Text Placeholder 3">
-            <a:extLst>
-              <a:ext uri="{FF2B5EF4-FFF2-40B4-BE49-F238E27FC236}">
-                <a16:creationId xmlns:a16="http://schemas.microsoft.com/office/drawing/2014/main" id="{94D6D19F-3E25-E279-F9A2-3CE77C5E7B1B}"/>
-              </a:ext>
-            </a:extLst>
-          </p:cNvPr>
-          <p:cNvSpPr txBox="1">
-            <a:spLocks noGrp="1"/>
-          </p:cNvSpPr>
-          <p:nvPr>
-            <p:ph type="body" idx="1"/>
-          </p:nvPr>
-        </p:nvSpPr>
-        <p:spPr>
-          <a:xfrm>
-            <a:off x="3683335" y="2031714"/>
-            <a:ext cx="4825330" cy="2794571"/>
-          </a:xfrm>
-          <a:prstGeom prst="rect">
-            <a:avLst/>
-          </a:prstGeom>
-          <a:noFill/>
-        </p:spPr>
-        <p:txBody>
-          <a:bodyPr wrap="none" rtlCol="0">
-            <a:spAutoFit/>
-          </a:bodyPr>
-          <a:lstStyle/>
-          <a:p>
-            <a:pPr marL="114300" indent="0" algn="ctr">
-              <a:buNone/>
-            </a:pPr>
-            <a:r>
-              <a:rPr lang="en-US" sz="4800" dirty="0" err="1"/>
-              <a:t>sli.do</a:t>
-            </a:r>
-            <a:r>
-              <a:rPr lang="en-US" sz="4800" dirty="0"/>
-              <a:t>      #94889</a:t>
-            </a:r>
-          </a:p>
-          <a:p>
-            <a:pPr algn="ctr"/>
-            <a:endParaRPr lang="en-US" sz="4800" dirty="0"/>
-          </a:p>
-          <a:p>
-            <a:pPr marL="114300" indent="0" algn="ctr">
-              <a:buNone/>
-            </a:pPr>
-            <a:r>
-              <a:rPr lang="en-US" sz="4800" dirty="0" err="1"/>
-              <a:t>sli.do</a:t>
-            </a:r>
-            <a:r>
-              <a:rPr lang="en-US" sz="4800" dirty="0"/>
-              <a:t>/94889</a:t>
-            </a:r>
-          </a:p>
-        </p:txBody>
-      </p:sp>
-    </p:spTree>
-    <p:extLst>
-      <p:ext uri="{BB962C8B-B14F-4D97-AF65-F5344CB8AC3E}">
-        <p14:creationId xmlns:p14="http://schemas.microsoft.com/office/powerpoint/2010/main" val="4141853174"/>
-      </p:ext>
-    </p:extLst>
-  </p:cSld>
-  <p:clrMapOvr>
-    <a:masterClrMapping/>
-  </p:clrMapOvr>
-</p:sld>
-</file>
-
-<file path=ppt/slides/slide25.xml><?xml version="1.0" encoding="utf-8"?>
+<file path=ppt/slides/slide26.xml><?xml version="1.0" encoding="utf-8"?>
 <p:sld xmlns:a="http://schemas.openxmlformats.org/drawingml/2006/main" xmlns:r="http://schemas.openxmlformats.org/officeDocument/2006/relationships" xmlns:p="http://schemas.openxmlformats.org/presentationml/2006/main" showMasterSp="0">
   <p:cSld>
     <p:bg>
       <p:bgPr>
         <a:solidFill>
-          <a:srgbClr val="FFFFFF"/>
+          <a:srgbClr val="1A1A1A"/>
         </a:solidFill>
         <a:effectLst/>
       </p:bgPr>
@@ -9626,7 +10531,7 @@
           <p:cNvPr id="2" name="Rectangle 1">
             <a:extLst>
               <a:ext uri="{FF2B5EF4-FFF2-40B4-BE49-F238E27FC236}">
-                <a16:creationId xmlns:a16="http://schemas.microsoft.com/office/drawing/2014/main" id="{F02749D5-EF91-FAEF-B5FE-5BC4C0A1E777}"/>
+                <a16:creationId xmlns:a16="http://schemas.microsoft.com/office/drawing/2014/main" id="{6888EBFC-5620-EBE4-F610-F8E20890DE3D}"/>
               </a:ext>
             </a:extLst>
           </p:cNvPr>
@@ -9646,10 +10551,10 @@
             <a:avLst/>
           </a:prstGeom>
           <a:blipFill>
-            <a:blip r:embed="rId5">
+            <a:blip>
               <a:extLst>
                 <a:ext uri="{96DAC541-7B7A-43D3-8B79-37D633B846F1}">
-                  <asvg:svgBlip xmlns:asvg="http://schemas.microsoft.com/office/drawing/2016/SVG/main" r:embed="rId6"/>
+                  <asvg:svgBlip xmlns:asvg="http://schemas.microsoft.com/office/drawing/2016/SVG/main" r:embed="rId7"/>
                 </a:ext>
               </a:extLst>
             </a:blip>
@@ -9657,76 +10562,19 @@
               <a:fillRect/>
             </a:stretch>
           </a:blipFill>
-          <a:ln>
-            <a:solidFill>
-              <a:srgbClr val="FFFFFF"/>
-            </a:solidFill>
-          </a:ln>
-        </p:spPr>
-        <p:style>
-          <a:lnRef idx="2">
-            <a:schemeClr val="accent1">
-              <a:shade val="15000"/>
-            </a:schemeClr>
-          </a:lnRef>
-          <a:fillRef idx="1">
-            <a:schemeClr val="accent1"/>
-          </a:fillRef>
-          <a:effectRef idx="0">
-            <a:schemeClr val="accent1"/>
-          </a:effectRef>
-          <a:fontRef idx="minor">
-            <a:schemeClr val="lt1"/>
-          </a:fontRef>
-        </p:style>
-        <p:txBody>
-          <a:bodyPr rtlCol="0" anchor="ctr"/>
-          <a:lstStyle/>
-          <a:p>
-            <a:pPr algn="ctr"/>
-            <a:endParaRPr lang="en-US"/>
-          </a:p>
-        </p:txBody>
-      </p:sp>
-      <p:sp>
-        <p:nvSpPr>
-          <p:cNvPr id="3" name="Rectangle 2">
-            <a:extLst>
-              <a:ext uri="{FF2B5EF4-FFF2-40B4-BE49-F238E27FC236}">
-                <a16:creationId xmlns:a16="http://schemas.microsoft.com/office/drawing/2014/main" id="{EE57E54B-91E9-219C-1348-8A8C449C4B31}"/>
-              </a:ext>
-            </a:extLst>
-          </p:cNvPr>
-          <p:cNvSpPr/>
-          <p:nvPr>
-            <p:custDataLst>
-              <p:tags r:id="rId3"/>
-            </p:custDataLst>
-          </p:nvPr>
-        </p:nvSpPr>
-        <p:spPr>
-          <a:xfrm>
-            <a:off x="3112851" y="1000897"/>
-            <a:ext cx="8486226" cy="3855308"/>
-          </a:xfrm>
-          <a:prstGeom prst="rect">
-            <a:avLst/>
-          </a:prstGeom>
-          <a:noFill/>
           <a:ln w="25400" cap="flat" cmpd="sng" algn="ctr">
-            <a:solidFill>
-              <a:srgbClr val="FFFFFF"/>
-            </a:solidFill>
+            <a:noFill/>
             <a:prstDash val="solid"/>
           </a:ln>
           <a:effectLst/>
           <a:extLst>
-            <a:ext uri="{909E8E84-426E-40DD-AFC4-6F175D3DCCD1}">
-              <a14:hiddenFill xmlns:a14="http://schemas.microsoft.com/office/drawing/2010/main">
-                <a:solidFill>
-                  <a:schemeClr val="accent1"/>
-                </a:solidFill>
-              </a14:hiddenFill>
+            <a:ext uri="{91240B29-F687-4F45-9708-019B960494DF}">
+              <a14:hiddenLine xmlns:a14="http://schemas.microsoft.com/office/drawing/2010/main" w="25400" cap="flat" cmpd="sng" algn="ctr">
+                <a:solidFill>
+                  <a:srgbClr val="FFFFFF"/>
+                </a:solidFill>
+                <a:prstDash val="solid"/>
+              </a14:hiddenLine>
             </a:ext>
           </a:extLst>
         </p:spPr>
@@ -9750,10 +10598,83 @@
           <a:bodyPr rtlCol="0" anchor="ctr"/>
           <a:lstStyle/>
           <a:p>
+            <a:pPr algn="ctr"/>
+            <a:endParaRPr lang="en-US"/>
+          </a:p>
+        </p:txBody>
+      </p:sp>
+      <p:sp>
+        <p:nvSpPr>
+          <p:cNvPr id="3" name="Rectangle 2">
+            <a:extLst>
+              <a:ext uri="{FF2B5EF4-FFF2-40B4-BE49-F238E27FC236}">
+                <a16:creationId xmlns:a16="http://schemas.microsoft.com/office/drawing/2014/main" id="{81333C4C-8198-70D8-C01F-A3285F5C1141}"/>
+              </a:ext>
+            </a:extLst>
+          </p:cNvPr>
+          <p:cNvSpPr/>
+          <p:nvPr>
+            <p:custDataLst>
+              <p:tags r:id="rId3"/>
+            </p:custDataLst>
+          </p:nvPr>
+        </p:nvSpPr>
+        <p:spPr>
+          <a:xfrm>
+            <a:off x="3112851" y="1000897"/>
+            <a:ext cx="8486226" cy="3855308"/>
+          </a:xfrm>
+          <a:prstGeom prst="rect">
+            <a:avLst/>
+          </a:prstGeom>
+          <a:noFill/>
+          <a:ln w="25400" cap="flat" cmpd="sng" algn="ctr">
+            <a:noFill/>
+            <a:prstDash val="solid"/>
+          </a:ln>
+          <a:effectLst/>
+          <a:extLst>
+            <a:ext uri="{909E8E84-426E-40DD-AFC4-6F175D3DCCD1}">
+              <a14:hiddenFill xmlns:a14="http://schemas.microsoft.com/office/drawing/2010/main">
+                <a:solidFill>
+                  <a:schemeClr val="accent1"/>
+                </a:solidFill>
+              </a14:hiddenFill>
+            </a:ext>
+            <a:ext uri="{91240B29-F687-4F45-9708-019B960494DF}">
+              <a14:hiddenLine xmlns:a14="http://schemas.microsoft.com/office/drawing/2010/main" w="25400" cap="flat" cmpd="sng" algn="ctr">
+                <a:solidFill>
+                  <a:srgbClr val="FFFFFF"/>
+                </a:solidFill>
+                <a:prstDash val="solid"/>
+              </a14:hiddenLine>
+            </a:ext>
+          </a:extLst>
+        </p:spPr>
+        <p:style>
+          <a:lnRef idx="2">
+            <a:schemeClr val="accent1">
+              <a:shade val="15000"/>
+            </a:schemeClr>
+          </a:lnRef>
+          <a:fillRef idx="1">
+            <a:schemeClr val="accent1"/>
+          </a:fillRef>
+          <a:effectRef idx="0">
+            <a:schemeClr val="accent1"/>
+          </a:effectRef>
+          <a:fontRef idx="minor">
+            <a:schemeClr val="lt1"/>
+          </a:fontRef>
+        </p:style>
+        <p:txBody>
+          <a:bodyPr rtlCol="0" anchor="ctr"/>
+          <a:lstStyle/>
+          <a:p>
             <a:r>
               <a:rPr lang="en-US" sz="2900" b="1">
                 <a:solidFill>
-                  <a:srgbClr val="000000"/>
+                  <a:srgbClr val="FFFFFF"/>
                 </a:solidFill>
               </a:rPr>
               <a:t>For the Netflix example, what would be a reasonable baseline method that doesn't require using any ML?</a:t>
@@ -9766,12 +10687,16 @@
           <p:cNvPr id="4" name="Rectangle 3">
             <a:extLst>
               <a:ext uri="{FF2B5EF4-FFF2-40B4-BE49-F238E27FC236}">
-                <a16:creationId xmlns:a16="http://schemas.microsoft.com/office/drawing/2014/main" id="{E8118BA4-AD6E-95BF-40B4-2A0B2F23655E}"/>
+                <a16:creationId xmlns:a16="http://schemas.microsoft.com/office/drawing/2014/main" id="{4A6E65A3-9EC7-EB35-45CD-64ECBF213C20}"/>
               </a:ext>
             </a:extLst>
           </p:cNvPr>
           <p:cNvSpPr/>
-          <p:nvPr/>
+          <p:nvPr>
+            <p:custDataLst>
+              <p:tags r:id="rId4"/>
+            </p:custDataLst>
+          </p:nvPr>
         </p:nvSpPr>
         <p:spPr>
           <a:xfrm>
@@ -9837,7 +10762,7 @@
                 <a:solidFill>
                   <a:srgbClr val="FFFFFF"/>
                 </a:solidFill>
-                <a:hlinkClick r:id="rId7">
+                <a:hlinkClick r:id="rId8">
                   <a:extLst>
                     <a:ext uri="{A12FA001-AC4F-418D-AE19-62706E023703}">
                       <ahyp:hlinkClr xmlns:ahyp="http://schemas.microsoft.com/office/drawing/2018/hyperlinkcolor" val="tx"/>
@@ -9863,7 +10788,7 @@
           <p:cNvPr id="6" name="Graphic 5">
             <a:extLst>
               <a:ext uri="{FF2B5EF4-FFF2-40B4-BE49-F238E27FC236}">
-                <a16:creationId xmlns:a16="http://schemas.microsoft.com/office/drawing/2014/main" id="{3466649F-18A4-1042-E6DA-8DB8965A4872}"/>
+                <a16:creationId xmlns:a16="http://schemas.microsoft.com/office/drawing/2014/main" id="{DF37CF36-1BA0-BA60-EA1F-633D80309CA9}"/>
               </a:ext>
             </a:extLst>
           </p:cNvPr>
@@ -9873,7 +10798,7 @@
           <p:nvPr/>
         </p:nvPicPr>
         <p:blipFill>
-          <a:blip r:embed="rId8">
+          <a:blip>
             <a:extLst>
               <a:ext uri="{96DAC541-7B7A-43D3-8B79-37D633B846F1}">
                 <asvg:svgBlip xmlns:asvg="http://schemas.microsoft.com/office/drawing/2016/SVG/main" r:embed="rId9"/>
@@ -9899,12 +10824,16 @@
           <p:cNvPr id="7" name="Trapezoid 6">
             <a:extLst>
               <a:ext uri="{FF2B5EF4-FFF2-40B4-BE49-F238E27FC236}">
-                <a16:creationId xmlns:a16="http://schemas.microsoft.com/office/drawing/2014/main" id="{016079CA-987D-18DF-87EF-6442FD2D1E69}"/>
+                <a16:creationId xmlns:a16="http://schemas.microsoft.com/office/drawing/2014/main" id="{83E1F662-911B-8052-71CC-DD9FA7FBDED8}"/>
               </a:ext>
             </a:extLst>
           </p:cNvPr>
           <p:cNvSpPr/>
-          <p:nvPr/>
+          <p:nvPr>
+            <p:custDataLst>
+              <p:tags r:id="rId5"/>
+            </p:custDataLst>
+          </p:nvPr>
         </p:nvSpPr>
         <p:spPr>
           <a:xfrm rot="2700000">
@@ -9917,7 +10846,7 @@
             </a:avLst>
           </a:prstGeom>
           <a:solidFill>
-            <a:srgbClr val="EDFAF2"/>
+            <a:srgbClr val="0A3316"/>
           </a:solidFill>
           <a:ln w="25400" cap="flat" cmpd="sng" algn="ctr">
             <a:noFill/>
@@ -9963,7 +10892,7 @@
             <a:r>
               <a:rPr lang="en-US" sz="2600" b="1">
                 <a:solidFill>
-                  <a:srgbClr val="198038"/>
+                  <a:srgbClr val="42A65F"/>
                 </a:solidFill>
               </a:rPr>
               <a:t>Do not edit
@@ -9972,7 +10901,7 @@
             <a:r>
               <a:rPr lang="en-US" sz="2200">
                 <a:solidFill>
-                  <a:srgbClr val="198038"/>
+                  <a:srgbClr val="42A65F"/>
                 </a:solidFill>
                 <a:hlinkClick r:id="rId10">
                   <a:extLst>
@@ -9986,7 +10915,7 @@
             </a:r>
             <a:endParaRPr lang="en-US" sz="2200">
               <a:solidFill>
-                <a:srgbClr val="198038"/>
+                <a:srgbClr val="42A65F"/>
               </a:solidFill>
             </a:endParaRPr>
           </a:p>
@@ -9997,7 +10926,7 @@
           <p:cNvPr id="9" name="Graphic 8">
             <a:extLst>
               <a:ext uri="{FF2B5EF4-FFF2-40B4-BE49-F238E27FC236}">
-                <a16:creationId xmlns:a16="http://schemas.microsoft.com/office/drawing/2014/main" id="{CC2D0B5D-1748-4739-2A61-C73FF33D44DB}"/>
+                <a16:creationId xmlns:a16="http://schemas.microsoft.com/office/drawing/2014/main" id="{C49CF9D4-55AD-293F-0377-5CF5B8CAF977}"/>
               </a:ext>
             </a:extLst>
           </p:cNvPr>
@@ -10007,10 +10936,10 @@
           <p:nvPr/>
         </p:nvPicPr>
         <p:blipFill>
-          <a:blip r:embed="rId11">
+          <a:blip>
             <a:extLst>
               <a:ext uri="{96DAC541-7B7A-43D3-8B79-37D633B846F1}">
-                <asvg:svgBlip xmlns:asvg="http://schemas.microsoft.com/office/drawing/2016/SVG/main" r:embed="rId12"/>
+                <asvg:svgBlip xmlns:asvg="http://schemas.microsoft.com/office/drawing/2016/SVG/main" r:embed="rId11"/>
               </a:ext>
             </a:extLst>
           </a:blip>
@@ -10034,7 +10963,479 @@
     </p:custDataLst>
     <p:extLst>
       <p:ext uri="{BB962C8B-B14F-4D97-AF65-F5344CB8AC3E}">
-        <p14:creationId xmlns:p14="http://schemas.microsoft.com/office/powerpoint/2010/main" val="1745339197"/>
+        <p14:creationId xmlns:p14="http://schemas.microsoft.com/office/powerpoint/2010/main" val="677332587"/>
+      </p:ext>
+    </p:extLst>
+  </p:cSld>
+  <p:clrMapOvr>
+    <a:masterClrMapping/>
+  </p:clrMapOvr>
+</p:sld>
+</file>
+
+<file path=ppt/slides/slide27.xml><?xml version="1.0" encoding="utf-8"?>
+<p:sld xmlns:a="http://schemas.openxmlformats.org/drawingml/2006/main" xmlns:r="http://schemas.openxmlformats.org/officeDocument/2006/relationships" xmlns:p="http://schemas.openxmlformats.org/presentationml/2006/main" showMasterSp="0">
+  <p:cSld>
+    <p:bg>
+      <p:bgPr>
+        <a:solidFill>
+          <a:srgbClr val="1A1A1A"/>
+        </a:solidFill>
+        <a:effectLst/>
+      </p:bgPr>
+    </p:bg>
+    <p:spTree>
+      <p:nvGrpSpPr>
+        <p:cNvPr id="1" name=""/>
+        <p:cNvGrpSpPr/>
+        <p:nvPr/>
+      </p:nvGrpSpPr>
+      <p:grpSpPr>
+        <a:xfrm>
+          <a:off x="0" y="0"/>
+          <a:ext cx="0" cy="0"/>
+          <a:chOff x="0" y="0"/>
+          <a:chExt cx="0" cy="0"/>
+        </a:xfrm>
+      </p:grpSpPr>
+      <p:sp>
+        <p:nvSpPr>
+          <p:cNvPr id="2" name="Rectangle 1">
+            <a:extLst>
+              <a:ext uri="{FF2B5EF4-FFF2-40B4-BE49-F238E27FC236}">
+                <a16:creationId xmlns:a16="http://schemas.microsoft.com/office/drawing/2014/main" id="{A4C7C3B7-9925-489C-FA2E-17AB14839818}"/>
+              </a:ext>
+            </a:extLst>
+          </p:cNvPr>
+          <p:cNvSpPr/>
+          <p:nvPr>
+            <p:custDataLst>
+              <p:tags r:id="rId2"/>
+            </p:custDataLst>
+          </p:nvPr>
+        </p:nvSpPr>
+        <p:spPr>
+          <a:xfrm>
+            <a:off x="444693" y="1742703"/>
+            <a:ext cx="2371696" cy="2371696"/>
+          </a:xfrm>
+          <a:prstGeom prst="rect">
+            <a:avLst/>
+          </a:prstGeom>
+          <a:blipFill>
+            <a:blip>
+              <a:extLst>
+                <a:ext uri="{96DAC541-7B7A-43D3-8B79-37D633B846F1}">
+                  <asvg:svgBlip xmlns:asvg="http://schemas.microsoft.com/office/drawing/2016/SVG/main" r:embed="rId7"/>
+                </a:ext>
+              </a:extLst>
+            </a:blip>
+            <a:stretch>
+              <a:fillRect/>
+            </a:stretch>
+          </a:blipFill>
+          <a:ln w="25400" cap="flat" cmpd="sng" algn="ctr">
+            <a:noFill/>
+            <a:prstDash val="solid"/>
+          </a:ln>
+          <a:effectLst/>
+          <a:extLst>
+            <a:ext uri="{91240B29-F687-4F45-9708-019B960494DF}">
+              <a14:hiddenLine xmlns:a14="http://schemas.microsoft.com/office/drawing/2010/main" w="25400" cap="flat" cmpd="sng" algn="ctr">
+                <a:solidFill>
+                  <a:srgbClr val="FFFFFF"/>
+                </a:solidFill>
+                <a:prstDash val="solid"/>
+              </a14:hiddenLine>
+            </a:ext>
+          </a:extLst>
+        </p:spPr>
+        <p:style>
+          <a:lnRef idx="2">
+            <a:schemeClr val="accent1">
+              <a:shade val="15000"/>
+            </a:schemeClr>
+          </a:lnRef>
+          <a:fillRef idx="1">
+            <a:schemeClr val="accent1"/>
+          </a:fillRef>
+          <a:effectRef idx="0">
+            <a:schemeClr val="accent1"/>
+          </a:effectRef>
+          <a:fontRef idx="minor">
+            <a:schemeClr val="lt1"/>
+          </a:fontRef>
+        </p:style>
+        <p:txBody>
+          <a:bodyPr rtlCol="0" anchor="ctr"/>
+          <a:lstStyle/>
+          <a:p>
+            <a:pPr algn="ctr"/>
+            <a:endParaRPr lang="en-US"/>
+          </a:p>
+        </p:txBody>
+      </p:sp>
+      <p:sp>
+        <p:nvSpPr>
+          <p:cNvPr id="3" name="Rectangle 2">
+            <a:extLst>
+              <a:ext uri="{FF2B5EF4-FFF2-40B4-BE49-F238E27FC236}">
+                <a16:creationId xmlns:a16="http://schemas.microsoft.com/office/drawing/2014/main" id="{DBA69604-B260-6A28-7C03-29958FBA4027}"/>
+              </a:ext>
+            </a:extLst>
+          </p:cNvPr>
+          <p:cNvSpPr/>
+          <p:nvPr>
+            <p:custDataLst>
+              <p:tags r:id="rId3"/>
+            </p:custDataLst>
+          </p:nvPr>
+        </p:nvSpPr>
+        <p:spPr>
+          <a:xfrm>
+            <a:off x="3112851" y="1000897"/>
+            <a:ext cx="8486226" cy="3855308"/>
+          </a:xfrm>
+          <a:prstGeom prst="rect">
+            <a:avLst/>
+          </a:prstGeom>
+          <a:noFill/>
+          <a:ln w="25400" cap="flat" cmpd="sng" algn="ctr">
+            <a:noFill/>
+            <a:prstDash val="solid"/>
+          </a:ln>
+          <a:effectLst/>
+          <a:extLst>
+            <a:ext uri="{909E8E84-426E-40DD-AFC4-6F175D3DCCD1}">
+              <a14:hiddenFill xmlns:a14="http://schemas.microsoft.com/office/drawing/2010/main">
+                <a:solidFill>
+                  <a:schemeClr val="accent1"/>
+                </a:solidFill>
+              </a14:hiddenFill>
+            </a:ext>
+            <a:ext uri="{91240B29-F687-4F45-9708-019B960494DF}">
+              <a14:hiddenLine xmlns:a14="http://schemas.microsoft.com/office/drawing/2010/main" w="25400" cap="flat" cmpd="sng" algn="ctr">
+                <a:solidFill>
+                  <a:srgbClr val="FFFFFF"/>
+                </a:solidFill>
+                <a:prstDash val="solid"/>
+              </a14:hiddenLine>
+            </a:ext>
+          </a:extLst>
+        </p:spPr>
+        <p:style>
+          <a:lnRef idx="2">
+            <a:schemeClr val="accent1">
+              <a:shade val="15000"/>
+            </a:schemeClr>
+          </a:lnRef>
+          <a:fillRef idx="1">
+            <a:schemeClr val="accent1"/>
+          </a:fillRef>
+          <a:effectRef idx="0">
+            <a:schemeClr val="accent1"/>
+          </a:effectRef>
+          <a:fontRef idx="minor">
+            <a:schemeClr val="lt1"/>
+          </a:fontRef>
+        </p:style>
+        <p:txBody>
+          <a:bodyPr rtlCol="0" anchor="ctr"/>
+          <a:lstStyle/>
+          <a:p>
+            <a:r>
+              <a:rPr lang="en-US" sz="4000" b="1">
+                <a:solidFill>
+                  <a:srgbClr val="FFFFFF"/>
+                </a:solidFill>
+              </a:rPr>
+              <a:t>What’s a good baseline to use for identifying if a house has roof damage?</a:t>
+            </a:r>
+          </a:p>
+        </p:txBody>
+      </p:sp>
+      <p:sp>
+        <p:nvSpPr>
+          <p:cNvPr id="4" name="Rectangle 3">
+            <a:extLst>
+              <a:ext uri="{FF2B5EF4-FFF2-40B4-BE49-F238E27FC236}">
+                <a16:creationId xmlns:a16="http://schemas.microsoft.com/office/drawing/2014/main" id="{DFFF3D0E-5CC1-DA18-6E74-261903A041FF}"/>
+              </a:ext>
+            </a:extLst>
+          </p:cNvPr>
+          <p:cNvSpPr/>
+          <p:nvPr>
+            <p:custDataLst>
+              <p:tags r:id="rId4"/>
+            </p:custDataLst>
+          </p:nvPr>
+        </p:nvSpPr>
+        <p:spPr>
+          <a:xfrm>
+            <a:off x="0" y="5820032"/>
+            <a:ext cx="12192001" cy="1037968"/>
+          </a:xfrm>
+          <a:prstGeom prst="rect">
+            <a:avLst/>
+          </a:prstGeom>
+          <a:solidFill>
+            <a:srgbClr val="198038"/>
+          </a:solidFill>
+          <a:ln w="25400" cap="flat" cmpd="sng" algn="ctr">
+            <a:noFill/>
+            <a:prstDash val="solid"/>
+          </a:ln>
+          <a:effectLst/>
+          <a:extLst>
+            <a:ext uri="{91240B29-F687-4F45-9708-019B960494DF}">
+              <a14:hiddenLine xmlns:a14="http://schemas.microsoft.com/office/drawing/2010/main" w="25400" cap="flat" cmpd="sng" algn="ctr">
+                <a:solidFill>
+                  <a:schemeClr val="accent1">
+                    <a:shade val="15000"/>
+                  </a:schemeClr>
+                </a:solidFill>
+                <a:prstDash val="solid"/>
+              </a14:hiddenLine>
+            </a:ext>
+          </a:extLst>
+        </p:spPr>
+        <p:style>
+          <a:lnRef idx="2">
+            <a:schemeClr val="accent1">
+              <a:shade val="15000"/>
+            </a:schemeClr>
+          </a:lnRef>
+          <a:fillRef idx="1">
+            <a:schemeClr val="accent1"/>
+          </a:fillRef>
+          <a:effectRef idx="0">
+            <a:schemeClr val="accent1"/>
+          </a:effectRef>
+          <a:fontRef idx="minor">
+            <a:schemeClr val="lt1"/>
+          </a:fontRef>
+        </p:style>
+        <p:txBody>
+          <a:bodyPr lIns="741155" tIns="259492" rIns="1852888" bIns="203886" rtlCol="0" anchor="ctr">
+            <a:normAutofit fontScale="85000" lnSpcReduction="10000"/>
+          </a:bodyPr>
+          <a:lstStyle/>
+          <a:p>
+            <a:r>
+              <a:rPr lang="en-US" sz="2600">
+                <a:solidFill>
+                  <a:srgbClr val="FFFFFF"/>
+                </a:solidFill>
+              </a:rPr>
+              <a:t>The </a:t>
+            </a:r>
+            <a:r>
+              <a:rPr lang="en-US" sz="2600">
+                <a:solidFill>
+                  <a:srgbClr val="FFFFFF"/>
+                </a:solidFill>
+                <a:hlinkClick r:id="rId8">
+                  <a:extLst>
+                    <a:ext uri="{A12FA001-AC4F-418D-AE19-62706E023703}">
+                      <ahyp:hlinkClr xmlns:ahyp="http://schemas.microsoft.com/office/drawing/2018/hyperlinkcolor" val="tx"/>
+                    </a:ext>
+                  </a:extLst>
+                </a:hlinkClick>
+              </a:rPr>
+              <a:t>Slido app</a:t>
+            </a:r>
+            <a:r>
+              <a:rPr lang="en-US" sz="2600">
+                <a:solidFill>
+                  <a:srgbClr val="FFFFFF"/>
+                </a:solidFill>
+              </a:rPr>
+              <a:t> must be installed on every computer you’re presenting from</a:t>
+            </a:r>
+          </a:p>
+        </p:txBody>
+      </p:sp>
+      <p:pic>
+        <p:nvPicPr>
+          <p:cNvPr id="6" name="Graphic 5">
+            <a:extLst>
+              <a:ext uri="{FF2B5EF4-FFF2-40B4-BE49-F238E27FC236}">
+                <a16:creationId xmlns:a16="http://schemas.microsoft.com/office/drawing/2014/main" id="{29C3ACFA-EF7A-AB65-3696-FB92467C7478}"/>
+              </a:ext>
+            </a:extLst>
+          </p:cNvPr>
+          <p:cNvPicPr>
+            <a:picLocks/>
+          </p:cNvPicPr>
+          <p:nvPr/>
+        </p:nvPicPr>
+        <p:blipFill>
+          <a:blip>
+            <a:extLst>
+              <a:ext uri="{96DAC541-7B7A-43D3-8B79-37D633B846F1}">
+                <asvg:svgBlip xmlns:asvg="http://schemas.microsoft.com/office/drawing/2016/SVG/main" r:embed="rId9"/>
+              </a:ext>
+            </a:extLst>
+          </a:blip>
+          <a:stretch>
+            <a:fillRect/>
+          </a:stretch>
+        </p:blipFill>
+        <p:spPr>
+          <a:xfrm>
+            <a:off x="296462" y="6190785"/>
+            <a:ext cx="296462" cy="296462"/>
+          </a:xfrm>
+          <a:prstGeom prst="rect">
+            <a:avLst/>
+          </a:prstGeom>
+        </p:spPr>
+      </p:pic>
+      <p:sp>
+        <p:nvSpPr>
+          <p:cNvPr id="7" name="Trapezoid 6">
+            <a:extLst>
+              <a:ext uri="{FF2B5EF4-FFF2-40B4-BE49-F238E27FC236}">
+                <a16:creationId xmlns:a16="http://schemas.microsoft.com/office/drawing/2014/main" id="{7BF5744F-AF17-7370-6D07-DF4088BF1483}"/>
+              </a:ext>
+            </a:extLst>
+          </p:cNvPr>
+          <p:cNvSpPr/>
+          <p:nvPr>
+            <p:custDataLst>
+              <p:tags r:id="rId5"/>
+            </p:custDataLst>
+          </p:nvPr>
+        </p:nvSpPr>
+        <p:spPr>
+          <a:xfrm rot="2700000">
+            <a:off x="9620371" y="514924"/>
+            <a:ext cx="3335198" cy="778213"/>
+          </a:xfrm>
+          <a:prstGeom prst="trapezoid">
+            <a:avLst>
+              <a:gd name="adj" fmla="val 100000"/>
+            </a:avLst>
+          </a:prstGeom>
+          <a:solidFill>
+            <a:srgbClr val="0A3316"/>
+          </a:solidFill>
+          <a:ln w="25400" cap="flat" cmpd="sng" algn="ctr">
+            <a:noFill/>
+            <a:prstDash val="solid"/>
+          </a:ln>
+          <a:effectLst/>
+          <a:extLst>
+            <a:ext uri="{91240B29-F687-4F45-9708-019B960494DF}">
+              <a14:hiddenLine xmlns:a14="http://schemas.microsoft.com/office/drawing/2010/main" w="25400" cap="flat" cmpd="sng" algn="ctr">
+                <a:solidFill>
+                  <a:schemeClr val="accent1">
+                    <a:shade val="15000"/>
+                  </a:schemeClr>
+                </a:solidFill>
+                <a:prstDash val="solid"/>
+              </a14:hiddenLine>
+            </a:ext>
+          </a:extLst>
+        </p:spPr>
+        <p:style>
+          <a:lnRef idx="2">
+            <a:schemeClr val="accent1">
+              <a:shade val="15000"/>
+            </a:schemeClr>
+          </a:lnRef>
+          <a:fillRef idx="1">
+            <a:schemeClr val="accent1"/>
+          </a:fillRef>
+          <a:effectRef idx="0">
+            <a:schemeClr val="accent1"/>
+          </a:effectRef>
+          <a:fontRef idx="minor">
+            <a:schemeClr val="lt1"/>
+          </a:fontRef>
+        </p:style>
+        <p:txBody>
+          <a:bodyPr tIns="0" bIns="0" rtlCol="0" anchor="t">
+            <a:normAutofit fontScale="70000" lnSpcReduction="20000"/>
+          </a:bodyPr>
+          <a:lstStyle/>
+          <a:p>
+            <a:pPr algn="ctr"/>
+            <a:r>
+              <a:rPr lang="en-US" sz="2600" b="1">
+                <a:solidFill>
+                  <a:srgbClr val="42A65F"/>
+                </a:solidFill>
+              </a:rPr>
+              <a:t>Do not edit
+</a:t>
+            </a:r>
+            <a:r>
+              <a:rPr lang="en-US" sz="2200">
+                <a:solidFill>
+                  <a:srgbClr val="42A65F"/>
+                </a:solidFill>
+                <a:hlinkClick r:id="rId10">
+                  <a:extLst>
+                    <a:ext uri="{A12FA001-AC4F-418D-AE19-62706E023703}">
+                      <ahyp:hlinkClr xmlns:ahyp="http://schemas.microsoft.com/office/drawing/2018/hyperlinkcolor" val="tx"/>
+                    </a:ext>
+                  </a:extLst>
+                </a:hlinkClick>
+              </a:rPr>
+              <a:t>How to change the design</a:t>
+            </a:r>
+            <a:endParaRPr lang="en-US" sz="2200">
+              <a:solidFill>
+                <a:srgbClr val="42A65F"/>
+              </a:solidFill>
+            </a:endParaRPr>
+          </a:p>
+        </p:txBody>
+      </p:sp>
+      <p:pic>
+        <p:nvPicPr>
+          <p:cNvPr id="9" name="Graphic 8">
+            <a:extLst>
+              <a:ext uri="{FF2B5EF4-FFF2-40B4-BE49-F238E27FC236}">
+                <a16:creationId xmlns:a16="http://schemas.microsoft.com/office/drawing/2014/main" id="{519FB25C-9E1F-3CF7-AA06-30BE13231AD8}"/>
+              </a:ext>
+            </a:extLst>
+          </p:cNvPr>
+          <p:cNvPicPr>
+            <a:picLocks/>
+          </p:cNvPicPr>
+          <p:nvPr/>
+        </p:nvPicPr>
+        <p:blipFill>
+          <a:blip>
+            <a:extLst>
+              <a:ext uri="{96DAC541-7B7A-43D3-8B79-37D633B846F1}">
+                <asvg:svgBlip xmlns:asvg="http://schemas.microsoft.com/office/drawing/2016/SVG/main" r:embed="rId11"/>
+              </a:ext>
+            </a:extLst>
+          </a:blip>
+          <a:stretch>
+            <a:fillRect/>
+          </a:stretch>
+        </p:blipFill>
+        <p:spPr>
+          <a:xfrm>
+            <a:off x="10746748" y="6153727"/>
+            <a:ext cx="1111733" cy="370578"/>
+          </a:xfrm>
+          <a:prstGeom prst="rect">
+            <a:avLst/>
+          </a:prstGeom>
+        </p:spPr>
+      </p:pic>
+    </p:spTree>
+    <p:custDataLst>
+      <p:tags r:id="rId1"/>
+    </p:custDataLst>
+    <p:extLst>
+      <p:ext uri="{BB962C8B-B14F-4D97-AF65-F5344CB8AC3E}">
+        <p14:creationId xmlns:p14="http://schemas.microsoft.com/office/powerpoint/2010/main" val="3224592120"/>
       </p:ext>
     </p:extLst>
   </p:cSld>
@@ -10115,647 +11516,19 @@
       </p:par>
     </p:tnLst>
     <p:bldLst>
-      <p:bldP spid="3" grpId="0" animBg="1"/>
+      <p:bldP spid="3" grpId="0"/>
     </p:bldLst>
   </p:timing>
 </p:sld>
 </file>
 
-<file path=ppt/slides/slide26.xml><?xml version="1.0" encoding="utf-8"?>
-<p:sld xmlns:a="http://schemas.openxmlformats.org/drawingml/2006/main" xmlns:r="http://schemas.openxmlformats.org/officeDocument/2006/relationships" xmlns:p="http://schemas.openxmlformats.org/presentationml/2006/main">
-  <p:cSld>
-    <p:spTree>
-      <p:nvGrpSpPr>
-        <p:cNvPr id="1" name=""/>
-        <p:cNvGrpSpPr/>
-        <p:nvPr/>
-      </p:nvGrpSpPr>
-      <p:grpSpPr>
-        <a:xfrm>
-          <a:off x="0" y="0"/>
-          <a:ext cx="0" cy="0"/>
-          <a:chOff x="0" y="0"/>
-          <a:chExt cx="0" cy="0"/>
-        </a:xfrm>
-      </p:grpSpPr>
-      <p:sp>
-        <p:nvSpPr>
-          <p:cNvPr id="2" name="Text Placeholder 1">
-            <a:extLst>
-              <a:ext uri="{FF2B5EF4-FFF2-40B4-BE49-F238E27FC236}">
-                <a16:creationId xmlns:a16="http://schemas.microsoft.com/office/drawing/2014/main" id="{16F0CF04-B42B-C044-ACCB-6C665E5B57C0}"/>
-              </a:ext>
-            </a:extLst>
-          </p:cNvPr>
-          <p:cNvSpPr>
-            <a:spLocks noGrp="1"/>
-          </p:cNvSpPr>
-          <p:nvPr>
-            <p:ph type="body" idx="1"/>
-          </p:nvPr>
-        </p:nvSpPr>
-        <p:spPr/>
-        <p:txBody>
-          <a:bodyPr/>
-          <a:lstStyle/>
-          <a:p>
-            <a:r>
-              <a:rPr lang="en-US" dirty="0"/>
-              <a:t>How much better than baselines does our system need to be in order to deploy?</a:t>
-            </a:r>
-            <a:br>
-              <a:rPr lang="en-US" dirty="0"/>
-            </a:br>
-            <a:endParaRPr lang="en-US" dirty="0"/>
-          </a:p>
-          <a:p>
-            <a:r>
-              <a:rPr lang="en-US" dirty="0"/>
-              <a:t>Important to compare performance against the base rate/prior, but this prior rarely represents a “common sense” baseline</a:t>
-            </a:r>
-            <a:br>
-              <a:rPr lang="en-US" dirty="0"/>
-            </a:br>
-            <a:endParaRPr lang="en-US" dirty="0"/>
-          </a:p>
-          <a:p>
-            <a:r>
-              <a:rPr lang="en-US" dirty="0"/>
-              <a:t>Good baselines should provide an ordering to sort the entities</a:t>
-            </a:r>
-          </a:p>
-          <a:p>
-            <a:pPr lvl="1"/>
-            <a:r>
-              <a:rPr lang="en-US" dirty="0"/>
-              <a:t>Heuristic rules (or shallow decision trees) might reflect current practice, but can yield a small number of unique scores with lots of ties</a:t>
-            </a:r>
-            <a:br>
-              <a:rPr lang="en-US" dirty="0"/>
-            </a:br>
-            <a:endParaRPr lang="en-US" dirty="0"/>
-          </a:p>
-          <a:p>
-            <a:r>
-              <a:rPr lang="en-US" dirty="0"/>
-              <a:t>In many real-world problems, a good baseline can be difficult to beat</a:t>
-            </a:r>
-          </a:p>
-        </p:txBody>
-      </p:sp>
-      <p:sp>
-        <p:nvSpPr>
-          <p:cNvPr id="3" name="Title 2">
-            <a:extLst>
-              <a:ext uri="{FF2B5EF4-FFF2-40B4-BE49-F238E27FC236}">
-                <a16:creationId xmlns:a16="http://schemas.microsoft.com/office/drawing/2014/main" id="{FC049B21-A440-624B-941A-2CE526530E5B}"/>
-              </a:ext>
-            </a:extLst>
-          </p:cNvPr>
-          <p:cNvSpPr>
-            <a:spLocks noGrp="1"/>
-          </p:cNvSpPr>
-          <p:nvPr>
-            <p:ph type="title"/>
-          </p:nvPr>
-        </p:nvSpPr>
-        <p:spPr/>
-        <p:txBody>
-          <a:bodyPr/>
-          <a:lstStyle/>
-          <a:p>
-            <a:r>
-              <a:rPr lang="en-US" dirty="0"/>
-              <a:t>Baseline Considerations</a:t>
-            </a:r>
-          </a:p>
-        </p:txBody>
-      </p:sp>
-    </p:spTree>
-    <p:extLst>
-      <p:ext uri="{BB962C8B-B14F-4D97-AF65-F5344CB8AC3E}">
-        <p14:creationId xmlns:p14="http://schemas.microsoft.com/office/powerpoint/2010/main" val="3480883044"/>
-      </p:ext>
-    </p:extLst>
-  </p:cSld>
-  <p:clrMapOvr>
-    <a:masterClrMapping/>
-  </p:clrMapOvr>
-</p:sld>
-</file>
-
-<file path=ppt/slides/slide27.xml><?xml version="1.0" encoding="utf-8"?>
-<p:sld xmlns:a="http://schemas.openxmlformats.org/drawingml/2006/main" xmlns:r="http://schemas.openxmlformats.org/officeDocument/2006/relationships" xmlns:p="http://schemas.openxmlformats.org/presentationml/2006/main">
-  <p:cSld>
-    <p:spTree>
-      <p:nvGrpSpPr>
-        <p:cNvPr id="1" name=""/>
-        <p:cNvGrpSpPr/>
-        <p:nvPr/>
-      </p:nvGrpSpPr>
-      <p:grpSpPr>
-        <a:xfrm>
-          <a:off x="0" y="0"/>
-          <a:ext cx="0" cy="0"/>
-          <a:chOff x="0" y="0"/>
-          <a:chExt cx="0" cy="0"/>
-        </a:xfrm>
-      </p:grpSpPr>
-      <p:sp>
-        <p:nvSpPr>
-          <p:cNvPr id="2" name="Content Placeholder 1"/>
-          <p:cNvSpPr>
-            <a:spLocks noGrp="1"/>
-          </p:cNvSpPr>
-          <p:nvPr>
-            <p:ph type="body" idx="1"/>
-          </p:nvPr>
-        </p:nvSpPr>
-        <p:spPr/>
-        <p:txBody>
-          <a:bodyPr/>
-          <a:lstStyle/>
-          <a:p>
-            <a:r>
-              <a:rPr lang="en-US" dirty="0"/>
-              <a:t>Coming up this week:</a:t>
-            </a:r>
-          </a:p>
-          <a:p>
-            <a:pPr lvl="1"/>
-            <a:r>
-              <a:rPr lang="en-US" dirty="0"/>
-              <a:t>Wednesday session on python + </a:t>
-            </a:r>
-            <a:r>
-              <a:rPr lang="en-US" dirty="0" err="1"/>
-              <a:t>sql</a:t>
-            </a:r>
-            <a:r>
-              <a:rPr lang="en-US" dirty="0"/>
-              <a:t> (and advanced </a:t>
-            </a:r>
-            <a:r>
-              <a:rPr lang="en-US" dirty="0" err="1"/>
-              <a:t>sql</a:t>
-            </a:r>
-            <a:r>
-              <a:rPr lang="en-US" dirty="0"/>
-              <a:t>)</a:t>
-            </a:r>
-            <a:br>
-              <a:rPr lang="en-US" dirty="0"/>
-            </a:br>
-            <a:endParaRPr lang="en-US" dirty="0"/>
-          </a:p>
-          <a:p>
-            <a:pPr lvl="1"/>
-            <a:r>
-              <a:rPr lang="en-US" dirty="0"/>
-              <a:t>Thursday session on ML pipelines</a:t>
-            </a:r>
-          </a:p>
-          <a:p>
-            <a:pPr lvl="1"/>
-            <a:endParaRPr lang="en-US" dirty="0"/>
-          </a:p>
-          <a:p>
-            <a:r>
-              <a:rPr lang="en-US" dirty="0"/>
-              <a:t>Next week:</a:t>
-            </a:r>
-          </a:p>
-          <a:p>
-            <a:pPr lvl="1"/>
-            <a:r>
-              <a:rPr lang="en-US" dirty="0"/>
-              <a:t>Proposal peer reviews</a:t>
-            </a:r>
-          </a:p>
-          <a:p>
-            <a:pPr marL="114300" indent="0">
-              <a:buNone/>
-            </a:pPr>
-            <a:endParaRPr lang="en-US" dirty="0"/>
-          </a:p>
-        </p:txBody>
-      </p:sp>
-      <p:sp>
-        <p:nvSpPr>
-          <p:cNvPr id="3" name="Title 2"/>
-          <p:cNvSpPr>
-            <a:spLocks noGrp="1"/>
-          </p:cNvSpPr>
-          <p:nvPr>
-            <p:ph type="title"/>
-          </p:nvPr>
-        </p:nvSpPr>
-        <p:spPr>
-          <a:xfrm>
-            <a:off x="0" y="325028"/>
-            <a:ext cx="12192000" cy="1143000"/>
-          </a:xfrm>
-        </p:spPr>
-        <p:txBody>
-          <a:bodyPr/>
-          <a:lstStyle/>
-          <a:p>
-            <a:r>
-              <a:rPr lang="en-US" dirty="0">
-                <a:solidFill>
-                  <a:schemeClr val="bg1"/>
-                </a:solidFill>
-              </a:rPr>
-              <a:t>Things to remember</a:t>
-            </a:r>
-          </a:p>
-        </p:txBody>
-      </p:sp>
-    </p:spTree>
-    <p:extLst>
-      <p:ext uri="{BB962C8B-B14F-4D97-AF65-F5344CB8AC3E}">
-        <p14:creationId xmlns:p14="http://schemas.microsoft.com/office/powerpoint/2010/main" val="3454164829"/>
-      </p:ext>
-    </p:extLst>
-  </p:cSld>
-  <p:clrMapOvr>
-    <a:masterClrMapping/>
-  </p:clrMapOvr>
-</p:sld>
-</file>
-
-<file path=ppt/slides/slide3.xml><?xml version="1.0" encoding="utf-8"?>
-<p:sld xmlns:a="http://schemas.openxmlformats.org/drawingml/2006/main" xmlns:r="http://schemas.openxmlformats.org/officeDocument/2006/relationships" xmlns:p="http://schemas.openxmlformats.org/presentationml/2006/main">
-  <p:cSld>
-    <p:spTree>
-      <p:nvGrpSpPr>
-        <p:cNvPr id="1" name=""/>
-        <p:cNvGrpSpPr/>
-        <p:nvPr/>
-      </p:nvGrpSpPr>
-      <p:grpSpPr>
-        <a:xfrm>
-          <a:off x="0" y="0"/>
-          <a:ext cx="0" cy="0"/>
-          <a:chOff x="0" y="0"/>
-          <a:chExt cx="0" cy="0"/>
-        </a:xfrm>
-      </p:grpSpPr>
-      <p:sp>
-        <p:nvSpPr>
-          <p:cNvPr id="2" name="Text Placeholder 1">
-            <a:extLst>
-              <a:ext uri="{FF2B5EF4-FFF2-40B4-BE49-F238E27FC236}">
-                <a16:creationId xmlns:a16="http://schemas.microsoft.com/office/drawing/2014/main" id="{4F90177E-EDBA-BC41-B606-574933A1A307}"/>
-              </a:ext>
-            </a:extLst>
-          </p:cNvPr>
-          <p:cNvSpPr>
-            <a:spLocks noGrp="1"/>
-          </p:cNvSpPr>
-          <p:nvPr>
-            <p:ph type="body" idx="1"/>
-          </p:nvPr>
-        </p:nvSpPr>
-        <p:spPr/>
-        <p:txBody>
-          <a:bodyPr/>
-          <a:lstStyle/>
-          <a:p>
-            <a:r>
-              <a:rPr lang="en-US" dirty="0"/>
-              <a:t>Scoping defines the goals and approach at a high level, the </a:t>
-            </a:r>
-            <a:r>
-              <a:rPr lang="en-US" b="1" dirty="0">
-                <a:solidFill>
-                  <a:srgbClr val="C00000"/>
-                </a:solidFill>
-              </a:rPr>
-              <a:t>analytical formulation </a:t>
-            </a:r>
-            <a:r>
-              <a:rPr lang="en-US" dirty="0"/>
-              <a:t>maps this scope to an ML problem and analytical approach</a:t>
-            </a:r>
-            <a:br>
-              <a:rPr lang="en-US" dirty="0"/>
-            </a:br>
-            <a:endParaRPr lang="en-US" dirty="0"/>
-          </a:p>
-          <a:p>
-            <a:r>
-              <a:rPr lang="en-US" dirty="0"/>
-              <a:t>Should be as detailed and specific as possible, obvious how to code it up</a:t>
-            </a:r>
-            <a:br>
-              <a:rPr lang="en-US" dirty="0"/>
-            </a:br>
-            <a:endParaRPr lang="en-US" dirty="0"/>
-          </a:p>
-          <a:p>
-            <a:r>
-              <a:rPr lang="en-US" dirty="0"/>
-              <a:t>The analytical formulation should be guided by –– and map back to –– how the system you’re building will actually be deployed and used</a:t>
-            </a:r>
-          </a:p>
-        </p:txBody>
-      </p:sp>
-      <p:sp>
-        <p:nvSpPr>
-          <p:cNvPr id="3" name="Title 2">
-            <a:extLst>
-              <a:ext uri="{FF2B5EF4-FFF2-40B4-BE49-F238E27FC236}">
-                <a16:creationId xmlns:a16="http://schemas.microsoft.com/office/drawing/2014/main" id="{FC4F2F47-A164-2C41-A1CD-CFD1AFCBE708}"/>
-              </a:ext>
-            </a:extLst>
-          </p:cNvPr>
-          <p:cNvSpPr>
-            <a:spLocks noGrp="1"/>
-          </p:cNvSpPr>
-          <p:nvPr>
-            <p:ph type="title"/>
-          </p:nvPr>
-        </p:nvSpPr>
-        <p:spPr/>
-        <p:txBody>
-          <a:bodyPr/>
-          <a:lstStyle/>
-          <a:p>
-            <a:r>
-              <a:rPr lang="en-US" dirty="0"/>
-              <a:t>Turning the project goals/scope into an ML problem</a:t>
-            </a:r>
-          </a:p>
-        </p:txBody>
-      </p:sp>
-    </p:spTree>
-    <p:extLst>
-      <p:ext uri="{BB962C8B-B14F-4D97-AF65-F5344CB8AC3E}">
-        <p14:creationId xmlns:p14="http://schemas.microsoft.com/office/powerpoint/2010/main" val="3562142687"/>
-      </p:ext>
-    </p:extLst>
-  </p:cSld>
-  <p:clrMapOvr>
-    <a:masterClrMapping/>
-  </p:clrMapOvr>
-</p:sld>
-</file>
-
-<file path=ppt/slides/slide4.xml><?xml version="1.0" encoding="utf-8"?>
-<p:sld xmlns:a="http://schemas.openxmlformats.org/drawingml/2006/main" xmlns:r="http://schemas.openxmlformats.org/officeDocument/2006/relationships" xmlns:p="http://schemas.openxmlformats.org/presentationml/2006/main">
-  <p:cSld>
-    <p:spTree>
-      <p:nvGrpSpPr>
-        <p:cNvPr id="1" name=""/>
-        <p:cNvGrpSpPr/>
-        <p:nvPr/>
-      </p:nvGrpSpPr>
-      <p:grpSpPr>
-        <a:xfrm>
-          <a:off x="0" y="0"/>
-          <a:ext cx="0" cy="0"/>
-          <a:chOff x="0" y="0"/>
-          <a:chExt cx="0" cy="0"/>
-        </a:xfrm>
-      </p:grpSpPr>
-      <p:sp>
-        <p:nvSpPr>
-          <p:cNvPr id="3" name="Title 2">
-            <a:extLst>
-              <a:ext uri="{FF2B5EF4-FFF2-40B4-BE49-F238E27FC236}">
-                <a16:creationId xmlns:a16="http://schemas.microsoft.com/office/drawing/2014/main" id="{FC4F2F47-A164-2C41-A1CD-CFD1AFCBE708}"/>
-              </a:ext>
-            </a:extLst>
-          </p:cNvPr>
-          <p:cNvSpPr>
-            <a:spLocks noGrp="1"/>
-          </p:cNvSpPr>
-          <p:nvPr>
-            <p:ph type="title"/>
-          </p:nvPr>
-        </p:nvSpPr>
-        <p:spPr/>
-        <p:txBody>
-          <a:bodyPr/>
-          <a:lstStyle/>
-          <a:p>
-            <a:pPr algn="ctr"/>
-            <a:r>
-              <a:rPr lang="en-US" dirty="0"/>
-              <a:t>CASE STUDY</a:t>
-            </a:r>
-          </a:p>
-        </p:txBody>
-      </p:sp>
-      <p:pic>
-        <p:nvPicPr>
-          <p:cNvPr id="6" name="Picture 5">
-            <a:extLst>
-              <a:ext uri="{FF2B5EF4-FFF2-40B4-BE49-F238E27FC236}">
-                <a16:creationId xmlns:a16="http://schemas.microsoft.com/office/drawing/2014/main" id="{DD7C8A1F-AE56-5146-B94D-D4E3FEFBC845}"/>
-              </a:ext>
-            </a:extLst>
-          </p:cNvPr>
-          <p:cNvPicPr>
-            <a:picLocks noChangeAspect="1"/>
-          </p:cNvPicPr>
-          <p:nvPr/>
-        </p:nvPicPr>
-        <p:blipFill>
-          <a:blip r:embed="rId2"/>
-          <a:stretch>
-            <a:fillRect/>
-          </a:stretch>
-        </p:blipFill>
-        <p:spPr>
-          <a:xfrm>
-            <a:off x="1524000" y="1676572"/>
-            <a:ext cx="9144000" cy="3035300"/>
-          </a:xfrm>
-          <a:prstGeom prst="rect">
-            <a:avLst/>
-          </a:prstGeom>
-        </p:spPr>
-      </p:pic>
-    </p:spTree>
-    <p:extLst>
-      <p:ext uri="{BB962C8B-B14F-4D97-AF65-F5344CB8AC3E}">
-        <p14:creationId xmlns:p14="http://schemas.microsoft.com/office/powerpoint/2010/main" val="2007043753"/>
-      </p:ext>
-    </p:extLst>
-  </p:cSld>
-  <p:clrMapOvr>
-    <a:masterClrMapping/>
-  </p:clrMapOvr>
-</p:sld>
-</file>
-
-<file path=ppt/slides/slide5.xml><?xml version="1.0" encoding="utf-8"?>
-<p:sld xmlns:a="http://schemas.openxmlformats.org/drawingml/2006/main" xmlns:r="http://schemas.openxmlformats.org/officeDocument/2006/relationships" xmlns:p="http://schemas.openxmlformats.org/presentationml/2006/main" show="0">
-  <p:cSld>
-    <p:spTree>
-      <p:nvGrpSpPr>
-        <p:cNvPr id="1" name=""/>
-        <p:cNvGrpSpPr/>
-        <p:nvPr/>
-      </p:nvGrpSpPr>
-      <p:grpSpPr>
-        <a:xfrm>
-          <a:off x="0" y="0"/>
-          <a:ext cx="0" cy="0"/>
-          <a:chOff x="0" y="0"/>
-          <a:chExt cx="0" cy="0"/>
-        </a:xfrm>
-      </p:grpSpPr>
-      <p:sp>
-        <p:nvSpPr>
-          <p:cNvPr id="2" name="Text Placeholder 1">
-            <a:extLst>
-              <a:ext uri="{FF2B5EF4-FFF2-40B4-BE49-F238E27FC236}">
-                <a16:creationId xmlns:a16="http://schemas.microsoft.com/office/drawing/2014/main" id="{CA2F7B32-9E66-8E5C-C019-A4D231FCAECB}"/>
-              </a:ext>
-            </a:extLst>
-          </p:cNvPr>
-          <p:cNvSpPr>
-            <a:spLocks noGrp="1"/>
-          </p:cNvSpPr>
-          <p:nvPr>
-            <p:ph type="body" idx="1"/>
-          </p:nvPr>
-        </p:nvSpPr>
-        <p:spPr/>
-        <p:txBody>
-          <a:bodyPr/>
-          <a:lstStyle/>
-          <a:p>
-            <a:r>
-              <a:rPr lang="en-US" dirty="0"/>
-              <a:t>In the Obermeyer et al. reading, what formulation decision is the focus of the paper?</a:t>
-            </a:r>
-          </a:p>
-        </p:txBody>
-      </p:sp>
-      <p:sp>
-        <p:nvSpPr>
-          <p:cNvPr id="3" name="Title 2">
-            <a:extLst>
-              <a:ext uri="{FF2B5EF4-FFF2-40B4-BE49-F238E27FC236}">
-                <a16:creationId xmlns:a16="http://schemas.microsoft.com/office/drawing/2014/main" id="{000EB0DE-95C0-EFAB-3EBC-E7036AE92059}"/>
-              </a:ext>
-            </a:extLst>
-          </p:cNvPr>
-          <p:cNvSpPr>
-            <a:spLocks noGrp="1"/>
-          </p:cNvSpPr>
-          <p:nvPr>
-            <p:ph type="title"/>
-          </p:nvPr>
-        </p:nvSpPr>
-        <p:spPr/>
-        <p:txBody>
-          <a:bodyPr/>
-          <a:lstStyle/>
-          <a:p>
-            <a:r>
-              <a:rPr lang="en-US" dirty="0"/>
-              <a:t>Formulation Decisions</a:t>
-            </a:r>
-          </a:p>
-        </p:txBody>
-      </p:sp>
-      <p:sp>
-        <p:nvSpPr>
-          <p:cNvPr id="4" name="TextBox 3">
-            <a:extLst>
-              <a:ext uri="{FF2B5EF4-FFF2-40B4-BE49-F238E27FC236}">
-                <a16:creationId xmlns:a16="http://schemas.microsoft.com/office/drawing/2014/main" id="{143541AF-EF0F-D7E7-CE20-EC98E6076CBB}"/>
-              </a:ext>
-            </a:extLst>
-          </p:cNvPr>
-          <p:cNvSpPr txBox="1"/>
-          <p:nvPr/>
-        </p:nvSpPr>
-        <p:spPr>
-          <a:xfrm>
-            <a:off x="2908511" y="2907586"/>
-            <a:ext cx="5841664" cy="2308324"/>
-          </a:xfrm>
-          <a:prstGeom prst="rect">
-            <a:avLst/>
-          </a:prstGeom>
-          <a:noFill/>
-        </p:spPr>
-        <p:txBody>
-          <a:bodyPr wrap="none" rtlCol="0">
-            <a:spAutoFit/>
-          </a:bodyPr>
-          <a:lstStyle/>
-          <a:p>
-            <a:r>
-              <a:rPr lang="en-US" sz="4800" dirty="0" err="1">
-                <a:solidFill>
-                  <a:schemeClr val="dk2"/>
-                </a:solidFill>
-              </a:rPr>
-              <a:t>Sli.do</a:t>
-            </a:r>
-            <a:r>
-              <a:rPr lang="en-US" sz="4800" dirty="0">
-                <a:solidFill>
-                  <a:schemeClr val="dk2"/>
-                </a:solidFill>
-              </a:rPr>
-              <a:t>            #94889</a:t>
-            </a:r>
-          </a:p>
-          <a:p>
-            <a:endParaRPr lang="en-US" sz="4800" dirty="0">
-              <a:solidFill>
-                <a:schemeClr val="dk2"/>
-              </a:solidFill>
-            </a:endParaRPr>
-          </a:p>
-          <a:p>
-            <a:r>
-              <a:rPr lang="en-US" sz="4800" dirty="0" err="1">
-                <a:solidFill>
-                  <a:schemeClr val="dk2"/>
-                </a:solidFill>
-              </a:rPr>
-              <a:t>sli.do</a:t>
-            </a:r>
-            <a:r>
-              <a:rPr lang="en-US" sz="4800" dirty="0">
-                <a:solidFill>
-                  <a:schemeClr val="dk2"/>
-                </a:solidFill>
-              </a:rPr>
-              <a:t>/94889</a:t>
-            </a:r>
-          </a:p>
-        </p:txBody>
-      </p:sp>
-    </p:spTree>
-    <p:extLst>
-      <p:ext uri="{BB962C8B-B14F-4D97-AF65-F5344CB8AC3E}">
-        <p14:creationId xmlns:p14="http://schemas.microsoft.com/office/powerpoint/2010/main" val="401324692"/>
-      </p:ext>
-    </p:extLst>
-  </p:cSld>
-  <p:clrMapOvr>
-    <a:masterClrMapping/>
-  </p:clrMapOvr>
-</p:sld>
-</file>
-
-<file path=ppt/slides/slide6.xml><?xml version="1.0" encoding="utf-8"?>
+<file path=ppt/slides/slide28.xml><?xml version="1.0" encoding="utf-8"?>
 <p:sld xmlns:a="http://schemas.openxmlformats.org/drawingml/2006/main" xmlns:r="http://schemas.openxmlformats.org/officeDocument/2006/relationships" xmlns:p="http://schemas.openxmlformats.org/presentationml/2006/main" showMasterSp="0">
   <p:cSld>
     <p:bg>
       <p:bgPr>
         <a:solidFill>
-          <a:srgbClr val="FFFFFF"/>
+          <a:srgbClr val="1A1A1A"/>
         </a:solidFill>
         <a:effectLst/>
       </p:bgPr>
@@ -10779,7 +11552,7 @@
           <p:cNvPr id="2" name="Rectangle 1">
             <a:extLst>
               <a:ext uri="{FF2B5EF4-FFF2-40B4-BE49-F238E27FC236}">
-                <a16:creationId xmlns:a16="http://schemas.microsoft.com/office/drawing/2014/main" id="{83C0D196-4F6E-1654-0FEB-2D5B9A251945}"/>
+                <a16:creationId xmlns:a16="http://schemas.microsoft.com/office/drawing/2014/main" id="{AAE2561E-60CF-3286-C15B-40F903664999}"/>
               </a:ext>
             </a:extLst>
           </p:cNvPr>
@@ -10799,10 +11572,10 @@
             <a:avLst/>
           </a:prstGeom>
           <a:blipFill>
-            <a:blip r:embed="rId5">
+            <a:blip>
               <a:extLst>
                 <a:ext uri="{96DAC541-7B7A-43D3-8B79-37D633B846F1}">
-                  <asvg:svgBlip xmlns:asvg="http://schemas.microsoft.com/office/drawing/2016/SVG/main" r:embed="rId6"/>
+                  <asvg:svgBlip xmlns:asvg="http://schemas.microsoft.com/office/drawing/2016/SVG/main" r:embed="rId7"/>
                 </a:ext>
               </a:extLst>
             </a:blip>
@@ -10810,76 +11583,19 @@
               <a:fillRect/>
             </a:stretch>
           </a:blipFill>
-          <a:ln>
-            <a:solidFill>
-              <a:srgbClr val="FFFFFF"/>
-            </a:solidFill>
-          </a:ln>
-        </p:spPr>
-        <p:style>
-          <a:lnRef idx="2">
-            <a:schemeClr val="accent1">
-              <a:shade val="15000"/>
-            </a:schemeClr>
-          </a:lnRef>
-          <a:fillRef idx="1">
-            <a:schemeClr val="accent1"/>
-          </a:fillRef>
-          <a:effectRef idx="0">
-            <a:schemeClr val="accent1"/>
-          </a:effectRef>
-          <a:fontRef idx="minor">
-            <a:schemeClr val="lt1"/>
-          </a:fontRef>
-        </p:style>
-        <p:txBody>
-          <a:bodyPr rtlCol="0" anchor="ctr"/>
-          <a:lstStyle/>
-          <a:p>
-            <a:pPr algn="ctr"/>
-            <a:endParaRPr lang="en-US"/>
-          </a:p>
-        </p:txBody>
-      </p:sp>
-      <p:sp>
-        <p:nvSpPr>
-          <p:cNvPr id="3" name="Rectangle 2">
-            <a:extLst>
-              <a:ext uri="{FF2B5EF4-FFF2-40B4-BE49-F238E27FC236}">
-                <a16:creationId xmlns:a16="http://schemas.microsoft.com/office/drawing/2014/main" id="{1BEA676D-66AB-9537-F75F-81EA69F9A0C8}"/>
-              </a:ext>
-            </a:extLst>
-          </p:cNvPr>
-          <p:cNvSpPr/>
-          <p:nvPr>
-            <p:custDataLst>
-              <p:tags r:id="rId3"/>
-            </p:custDataLst>
-          </p:nvPr>
-        </p:nvSpPr>
-        <p:spPr>
-          <a:xfrm>
-            <a:off x="3112851" y="1000897"/>
-            <a:ext cx="8486226" cy="3855308"/>
-          </a:xfrm>
-          <a:prstGeom prst="rect">
-            <a:avLst/>
-          </a:prstGeom>
-          <a:noFill/>
           <a:ln w="25400" cap="flat" cmpd="sng" algn="ctr">
-            <a:solidFill>
-              <a:srgbClr val="FFFFFF"/>
-            </a:solidFill>
+            <a:noFill/>
             <a:prstDash val="solid"/>
           </a:ln>
           <a:effectLst/>
           <a:extLst>
-            <a:ext uri="{909E8E84-426E-40DD-AFC4-6F175D3DCCD1}">
-              <a14:hiddenFill xmlns:a14="http://schemas.microsoft.com/office/drawing/2010/main">
-                <a:solidFill>
-                  <a:schemeClr val="accent1"/>
-                </a:solidFill>
-              </a14:hiddenFill>
+            <a:ext uri="{91240B29-F687-4F45-9708-019B960494DF}">
+              <a14:hiddenLine xmlns:a14="http://schemas.microsoft.com/office/drawing/2010/main" w="25400" cap="flat" cmpd="sng" algn="ctr">
+                <a:solidFill>
+                  <a:srgbClr val="FFFFFF"/>
+                </a:solidFill>
+                <a:prstDash val="solid"/>
+              </a14:hiddenLine>
             </a:ext>
           </a:extLst>
         </p:spPr>
@@ -10903,13 +11619,86 @@
           <a:bodyPr rtlCol="0" anchor="ctr"/>
           <a:lstStyle/>
           <a:p>
-            <a:r>
-              <a:rPr lang="en-US" sz="3800" b="1">
-                <a:solidFill>
-                  <a:srgbClr val="000000"/>
-                </a:solidFill>
-              </a:rPr>
-              <a:t>In the Obermeyer et al. reading, what formulation decision is the focus of the paper?</a:t>
+            <a:pPr algn="ctr"/>
+            <a:endParaRPr lang="en-US"/>
+          </a:p>
+        </p:txBody>
+      </p:sp>
+      <p:sp>
+        <p:nvSpPr>
+          <p:cNvPr id="3" name="Rectangle 2">
+            <a:extLst>
+              <a:ext uri="{FF2B5EF4-FFF2-40B4-BE49-F238E27FC236}">
+                <a16:creationId xmlns:a16="http://schemas.microsoft.com/office/drawing/2014/main" id="{BF373C5E-0C35-4C4C-521D-9C0498666895}"/>
+              </a:ext>
+            </a:extLst>
+          </p:cNvPr>
+          <p:cNvSpPr/>
+          <p:nvPr>
+            <p:custDataLst>
+              <p:tags r:id="rId3"/>
+            </p:custDataLst>
+          </p:nvPr>
+        </p:nvSpPr>
+        <p:spPr>
+          <a:xfrm>
+            <a:off x="3112851" y="1000897"/>
+            <a:ext cx="8486226" cy="3855308"/>
+          </a:xfrm>
+          <a:prstGeom prst="rect">
+            <a:avLst/>
+          </a:prstGeom>
+          <a:noFill/>
+          <a:ln w="25400" cap="flat" cmpd="sng" algn="ctr">
+            <a:noFill/>
+            <a:prstDash val="solid"/>
+          </a:ln>
+          <a:effectLst/>
+          <a:extLst>
+            <a:ext uri="{909E8E84-426E-40DD-AFC4-6F175D3DCCD1}">
+              <a14:hiddenFill xmlns:a14="http://schemas.microsoft.com/office/drawing/2010/main">
+                <a:solidFill>
+                  <a:schemeClr val="accent1"/>
+                </a:solidFill>
+              </a14:hiddenFill>
+            </a:ext>
+            <a:ext uri="{91240B29-F687-4F45-9708-019B960494DF}">
+              <a14:hiddenLine xmlns:a14="http://schemas.microsoft.com/office/drawing/2010/main" w="25400" cap="flat" cmpd="sng" algn="ctr">
+                <a:solidFill>
+                  <a:srgbClr val="FFFFFF"/>
+                </a:solidFill>
+                <a:prstDash val="solid"/>
+              </a14:hiddenLine>
+            </a:ext>
+          </a:extLst>
+        </p:spPr>
+        <p:style>
+          <a:lnRef idx="2">
+            <a:schemeClr val="accent1">
+              <a:shade val="15000"/>
+            </a:schemeClr>
+          </a:lnRef>
+          <a:fillRef idx="1">
+            <a:schemeClr val="accent1"/>
+          </a:fillRef>
+          <a:effectRef idx="0">
+            <a:schemeClr val="accent1"/>
+          </a:effectRef>
+          <a:fontRef idx="minor">
+            <a:schemeClr val="lt1"/>
+          </a:fontRef>
+        </p:style>
+        <p:txBody>
+          <a:bodyPr rtlCol="0" anchor="ctr"/>
+          <a:lstStyle/>
+          <a:p>
+            <a:r>
+              <a:rPr lang="en-US" sz="4000" b="1">
+                <a:solidFill>
+                  <a:srgbClr val="FFFFFF"/>
+                </a:solidFill>
+              </a:rPr>
+              <a:t>Predicting if a person will not get vaccinated for an infectious disease?</a:t>
             </a:r>
           </a:p>
         </p:txBody>
@@ -10919,12 +11708,16 @@
           <p:cNvPr id="4" name="Rectangle 3">
             <a:extLst>
               <a:ext uri="{FF2B5EF4-FFF2-40B4-BE49-F238E27FC236}">
-                <a16:creationId xmlns:a16="http://schemas.microsoft.com/office/drawing/2014/main" id="{3A901A59-A0B5-993C-677B-551090B3C84E}"/>
+                <a16:creationId xmlns:a16="http://schemas.microsoft.com/office/drawing/2014/main" id="{031AE95D-58E2-9E36-431A-344C4FCEE3E5}"/>
               </a:ext>
             </a:extLst>
           </p:cNvPr>
           <p:cNvSpPr/>
-          <p:nvPr/>
+          <p:nvPr>
+            <p:custDataLst>
+              <p:tags r:id="rId4"/>
+            </p:custDataLst>
+          </p:nvPr>
         </p:nvSpPr>
         <p:spPr>
           <a:xfrm>
@@ -10990,7 +11783,7 @@
                 <a:solidFill>
                   <a:srgbClr val="FFFFFF"/>
                 </a:solidFill>
-                <a:hlinkClick r:id="rId7">
+                <a:hlinkClick r:id="rId8">
                   <a:extLst>
                     <a:ext uri="{A12FA001-AC4F-418D-AE19-62706E023703}">
                       <ahyp:hlinkClr xmlns:ahyp="http://schemas.microsoft.com/office/drawing/2018/hyperlinkcolor" val="tx"/>
@@ -11016,7 +11809,7 @@
           <p:cNvPr id="6" name="Graphic 5">
             <a:extLst>
               <a:ext uri="{FF2B5EF4-FFF2-40B4-BE49-F238E27FC236}">
-                <a16:creationId xmlns:a16="http://schemas.microsoft.com/office/drawing/2014/main" id="{188D9015-4652-4A4E-7510-67BFEF8CCA29}"/>
+                <a16:creationId xmlns:a16="http://schemas.microsoft.com/office/drawing/2014/main" id="{E94E8686-0645-A0BD-EC60-C32181FD00EE}"/>
               </a:ext>
             </a:extLst>
           </p:cNvPr>
@@ -11026,7 +11819,7 @@
           <p:nvPr/>
         </p:nvPicPr>
         <p:blipFill>
-          <a:blip r:embed="rId8">
+          <a:blip>
             <a:extLst>
               <a:ext uri="{96DAC541-7B7A-43D3-8B79-37D633B846F1}">
                 <asvg:svgBlip xmlns:asvg="http://schemas.microsoft.com/office/drawing/2016/SVG/main" r:embed="rId9"/>
@@ -11052,12 +11845,16 @@
           <p:cNvPr id="7" name="Trapezoid 6">
             <a:extLst>
               <a:ext uri="{FF2B5EF4-FFF2-40B4-BE49-F238E27FC236}">
-                <a16:creationId xmlns:a16="http://schemas.microsoft.com/office/drawing/2014/main" id="{30EE42DA-4FF9-8746-8D88-52D4612A125C}"/>
+                <a16:creationId xmlns:a16="http://schemas.microsoft.com/office/drawing/2014/main" id="{B1BFE668-23E6-9F61-394D-7D6516E24EFA}"/>
               </a:ext>
             </a:extLst>
           </p:cNvPr>
           <p:cNvSpPr/>
-          <p:nvPr/>
+          <p:nvPr>
+            <p:custDataLst>
+              <p:tags r:id="rId5"/>
+            </p:custDataLst>
+          </p:nvPr>
         </p:nvSpPr>
         <p:spPr>
           <a:xfrm rot="2700000">
@@ -11070,7 +11867,7 @@
             </a:avLst>
           </a:prstGeom>
           <a:solidFill>
-            <a:srgbClr val="EDFAF2"/>
+            <a:srgbClr val="0A3316"/>
           </a:solidFill>
           <a:ln w="25400" cap="flat" cmpd="sng" algn="ctr">
             <a:noFill/>
@@ -11116,7 +11913,7 @@
             <a:r>
               <a:rPr lang="en-US" sz="2600" b="1">
                 <a:solidFill>
-                  <a:srgbClr val="198038"/>
+                  <a:srgbClr val="42A65F"/>
                 </a:solidFill>
               </a:rPr>
               <a:t>Do not edit
@@ -11125,7 +11922,7 @@
             <a:r>
               <a:rPr lang="en-US" sz="2200">
                 <a:solidFill>
-                  <a:srgbClr val="198038"/>
+                  <a:srgbClr val="42A65F"/>
                 </a:solidFill>
                 <a:hlinkClick r:id="rId10">
                   <a:extLst>
@@ -11139,7 +11936,7 @@
             </a:r>
             <a:endParaRPr lang="en-US" sz="2200">
               <a:solidFill>
-                <a:srgbClr val="198038"/>
+                <a:srgbClr val="42A65F"/>
               </a:solidFill>
             </a:endParaRPr>
           </a:p>
@@ -11150,7 +11947,7 @@
           <p:cNvPr id="9" name="Graphic 8">
             <a:extLst>
               <a:ext uri="{FF2B5EF4-FFF2-40B4-BE49-F238E27FC236}">
-                <a16:creationId xmlns:a16="http://schemas.microsoft.com/office/drawing/2014/main" id="{7DB1C380-95DD-02D8-FD24-C9FFFABFC138}"/>
+                <a16:creationId xmlns:a16="http://schemas.microsoft.com/office/drawing/2014/main" id="{2C5C3E13-5496-505A-E3D1-93A35359D7D7}"/>
               </a:ext>
             </a:extLst>
           </p:cNvPr>
@@ -11160,10 +11957,10 @@
           <p:nvPr/>
         </p:nvPicPr>
         <p:blipFill>
-          <a:blip r:embed="rId11">
+          <a:blip>
             <a:extLst>
               <a:ext uri="{96DAC541-7B7A-43D3-8B79-37D633B846F1}">
-                <asvg:svgBlip xmlns:asvg="http://schemas.microsoft.com/office/drawing/2016/SVG/main" r:embed="rId12"/>
+                <asvg:svgBlip xmlns:asvg="http://schemas.microsoft.com/office/drawing/2016/SVG/main" r:embed="rId11"/>
               </a:ext>
             </a:extLst>
           </a:blip>
@@ -11187,7 +11984,7 @@
     </p:custDataLst>
     <p:extLst>
       <p:ext uri="{BB962C8B-B14F-4D97-AF65-F5344CB8AC3E}">
-        <p14:creationId xmlns:p14="http://schemas.microsoft.com/office/powerpoint/2010/main" val="3202293660"/>
+        <p14:creationId xmlns:p14="http://schemas.microsoft.com/office/powerpoint/2010/main" val="3187025222"/>
       </p:ext>
     </p:extLst>
   </p:cSld>
@@ -11268,13 +12065,710 @@
       </p:par>
     </p:tnLst>
     <p:bldLst>
-      <p:bldP spid="3" grpId="0" animBg="1"/>
+      <p:bldP spid="3" grpId="0"/>
     </p:bldLst>
   </p:timing>
 </p:sld>
 </file>
 
-<file path=ppt/slides/slide7.xml><?xml version="1.0" encoding="utf-8"?>
+<file path=ppt/slides/slide29.xml><?xml version="1.0" encoding="utf-8"?>
+<p:sld xmlns:a="http://schemas.openxmlformats.org/drawingml/2006/main" xmlns:r="http://schemas.openxmlformats.org/officeDocument/2006/relationships" xmlns:p="http://schemas.openxmlformats.org/presentationml/2006/main" showMasterSp="0">
+  <p:cSld>
+    <p:bg>
+      <p:bgPr>
+        <a:solidFill>
+          <a:srgbClr val="1A1A1A"/>
+        </a:solidFill>
+        <a:effectLst/>
+      </p:bgPr>
+    </p:bg>
+    <p:spTree>
+      <p:nvGrpSpPr>
+        <p:cNvPr id="1" name=""/>
+        <p:cNvGrpSpPr/>
+        <p:nvPr/>
+      </p:nvGrpSpPr>
+      <p:grpSpPr>
+        <a:xfrm>
+          <a:off x="0" y="0"/>
+          <a:ext cx="0" cy="0"/>
+          <a:chOff x="0" y="0"/>
+          <a:chExt cx="0" cy="0"/>
+        </a:xfrm>
+      </p:grpSpPr>
+      <p:sp>
+        <p:nvSpPr>
+          <p:cNvPr id="2" name="Rectangle 1">
+            <a:extLst>
+              <a:ext uri="{FF2B5EF4-FFF2-40B4-BE49-F238E27FC236}">
+                <a16:creationId xmlns:a16="http://schemas.microsoft.com/office/drawing/2014/main" id="{0F931A24-286F-9819-3A33-391BA5645E96}"/>
+              </a:ext>
+            </a:extLst>
+          </p:cNvPr>
+          <p:cNvSpPr/>
+          <p:nvPr>
+            <p:custDataLst>
+              <p:tags r:id="rId2"/>
+            </p:custDataLst>
+          </p:nvPr>
+        </p:nvSpPr>
+        <p:spPr>
+          <a:xfrm>
+            <a:off x="444693" y="1742703"/>
+            <a:ext cx="2371696" cy="2371696"/>
+          </a:xfrm>
+          <a:prstGeom prst="rect">
+            <a:avLst/>
+          </a:prstGeom>
+          <a:blipFill>
+            <a:blip>
+              <a:extLst>
+                <a:ext uri="{96DAC541-7B7A-43D3-8B79-37D633B846F1}">
+                  <asvg:svgBlip xmlns:asvg="http://schemas.microsoft.com/office/drawing/2016/SVG/main" r:embed="rId7"/>
+                </a:ext>
+              </a:extLst>
+            </a:blip>
+            <a:stretch>
+              <a:fillRect/>
+            </a:stretch>
+          </a:blipFill>
+          <a:ln w="25400" cap="flat" cmpd="sng" algn="ctr">
+            <a:noFill/>
+            <a:prstDash val="solid"/>
+          </a:ln>
+          <a:effectLst/>
+          <a:extLst>
+            <a:ext uri="{91240B29-F687-4F45-9708-019B960494DF}">
+              <a14:hiddenLine xmlns:a14="http://schemas.microsoft.com/office/drawing/2010/main" w="25400" cap="flat" cmpd="sng" algn="ctr">
+                <a:solidFill>
+                  <a:srgbClr val="FFFFFF"/>
+                </a:solidFill>
+                <a:prstDash val="solid"/>
+              </a14:hiddenLine>
+            </a:ext>
+          </a:extLst>
+        </p:spPr>
+        <p:style>
+          <a:lnRef idx="2">
+            <a:schemeClr val="accent1">
+              <a:shade val="15000"/>
+            </a:schemeClr>
+          </a:lnRef>
+          <a:fillRef idx="1">
+            <a:schemeClr val="accent1"/>
+          </a:fillRef>
+          <a:effectRef idx="0">
+            <a:schemeClr val="accent1"/>
+          </a:effectRef>
+          <a:fontRef idx="minor">
+            <a:schemeClr val="lt1"/>
+          </a:fontRef>
+        </p:style>
+        <p:txBody>
+          <a:bodyPr rtlCol="0" anchor="ctr"/>
+          <a:lstStyle/>
+          <a:p>
+            <a:pPr algn="ctr"/>
+            <a:endParaRPr lang="en-US"/>
+          </a:p>
+        </p:txBody>
+      </p:sp>
+      <p:sp>
+        <p:nvSpPr>
+          <p:cNvPr id="3" name="Rectangle 2">
+            <a:extLst>
+              <a:ext uri="{FF2B5EF4-FFF2-40B4-BE49-F238E27FC236}">
+                <a16:creationId xmlns:a16="http://schemas.microsoft.com/office/drawing/2014/main" id="{28ACFD31-1438-9EC9-EE1A-5B74F5A8F507}"/>
+              </a:ext>
+            </a:extLst>
+          </p:cNvPr>
+          <p:cNvSpPr/>
+          <p:nvPr>
+            <p:custDataLst>
+              <p:tags r:id="rId3"/>
+            </p:custDataLst>
+          </p:nvPr>
+        </p:nvSpPr>
+        <p:spPr>
+          <a:xfrm>
+            <a:off x="3112851" y="1000897"/>
+            <a:ext cx="8486226" cy="3855308"/>
+          </a:xfrm>
+          <a:prstGeom prst="rect">
+            <a:avLst/>
+          </a:prstGeom>
+          <a:noFill/>
+          <a:ln w="25400" cap="flat" cmpd="sng" algn="ctr">
+            <a:noFill/>
+            <a:prstDash val="solid"/>
+          </a:ln>
+          <a:effectLst/>
+          <a:extLst>
+            <a:ext uri="{909E8E84-426E-40DD-AFC4-6F175D3DCCD1}">
+              <a14:hiddenFill xmlns:a14="http://schemas.microsoft.com/office/drawing/2010/main">
+                <a:solidFill>
+                  <a:schemeClr val="accent1"/>
+                </a:solidFill>
+              </a14:hiddenFill>
+            </a:ext>
+            <a:ext uri="{91240B29-F687-4F45-9708-019B960494DF}">
+              <a14:hiddenLine xmlns:a14="http://schemas.microsoft.com/office/drawing/2010/main" w="25400" cap="flat" cmpd="sng" algn="ctr">
+                <a:solidFill>
+                  <a:srgbClr val="FFFFFF"/>
+                </a:solidFill>
+                <a:prstDash val="solid"/>
+              </a14:hiddenLine>
+            </a:ext>
+          </a:extLst>
+        </p:spPr>
+        <p:style>
+          <a:lnRef idx="2">
+            <a:schemeClr val="accent1">
+              <a:shade val="15000"/>
+            </a:schemeClr>
+          </a:lnRef>
+          <a:fillRef idx="1">
+            <a:schemeClr val="accent1"/>
+          </a:fillRef>
+          <a:effectRef idx="0">
+            <a:schemeClr val="accent1"/>
+          </a:effectRef>
+          <a:fontRef idx="minor">
+            <a:schemeClr val="lt1"/>
+          </a:fontRef>
+        </p:style>
+        <p:txBody>
+          <a:bodyPr rtlCol="0" anchor="ctr"/>
+          <a:lstStyle/>
+          <a:p>
+            <a:r>
+              <a:rPr lang="en-US" sz="4000" b="1">
+                <a:solidFill>
+                  <a:srgbClr val="FFFFFF"/>
+                </a:solidFill>
+              </a:rPr>
+              <a:t>predicting if a water pipe will break?</a:t>
+            </a:r>
+          </a:p>
+        </p:txBody>
+      </p:sp>
+      <p:sp>
+        <p:nvSpPr>
+          <p:cNvPr id="4" name="Rectangle 3">
+            <a:extLst>
+              <a:ext uri="{FF2B5EF4-FFF2-40B4-BE49-F238E27FC236}">
+                <a16:creationId xmlns:a16="http://schemas.microsoft.com/office/drawing/2014/main" id="{9A969D77-0C73-9257-B539-2989BA866027}"/>
+              </a:ext>
+            </a:extLst>
+          </p:cNvPr>
+          <p:cNvSpPr/>
+          <p:nvPr>
+            <p:custDataLst>
+              <p:tags r:id="rId4"/>
+            </p:custDataLst>
+          </p:nvPr>
+        </p:nvSpPr>
+        <p:spPr>
+          <a:xfrm>
+            <a:off x="0" y="5820032"/>
+            <a:ext cx="12192001" cy="1037968"/>
+          </a:xfrm>
+          <a:prstGeom prst="rect">
+            <a:avLst/>
+          </a:prstGeom>
+          <a:solidFill>
+            <a:srgbClr val="198038"/>
+          </a:solidFill>
+          <a:ln w="25400" cap="flat" cmpd="sng" algn="ctr">
+            <a:noFill/>
+            <a:prstDash val="solid"/>
+          </a:ln>
+          <a:effectLst/>
+          <a:extLst>
+            <a:ext uri="{91240B29-F687-4F45-9708-019B960494DF}">
+              <a14:hiddenLine xmlns:a14="http://schemas.microsoft.com/office/drawing/2010/main" w="25400" cap="flat" cmpd="sng" algn="ctr">
+                <a:solidFill>
+                  <a:schemeClr val="accent1">
+                    <a:shade val="15000"/>
+                  </a:schemeClr>
+                </a:solidFill>
+                <a:prstDash val="solid"/>
+              </a14:hiddenLine>
+            </a:ext>
+          </a:extLst>
+        </p:spPr>
+        <p:style>
+          <a:lnRef idx="2">
+            <a:schemeClr val="accent1">
+              <a:shade val="15000"/>
+            </a:schemeClr>
+          </a:lnRef>
+          <a:fillRef idx="1">
+            <a:schemeClr val="accent1"/>
+          </a:fillRef>
+          <a:effectRef idx="0">
+            <a:schemeClr val="accent1"/>
+          </a:effectRef>
+          <a:fontRef idx="minor">
+            <a:schemeClr val="lt1"/>
+          </a:fontRef>
+        </p:style>
+        <p:txBody>
+          <a:bodyPr lIns="741155" tIns="259492" rIns="1852888" bIns="203886" rtlCol="0" anchor="ctr">
+            <a:normAutofit fontScale="85000" lnSpcReduction="10000"/>
+          </a:bodyPr>
+          <a:lstStyle/>
+          <a:p>
+            <a:r>
+              <a:rPr lang="en-US" sz="2600">
+                <a:solidFill>
+                  <a:srgbClr val="FFFFFF"/>
+                </a:solidFill>
+              </a:rPr>
+              <a:t>The </a:t>
+            </a:r>
+            <a:r>
+              <a:rPr lang="en-US" sz="2600">
+                <a:solidFill>
+                  <a:srgbClr val="FFFFFF"/>
+                </a:solidFill>
+                <a:hlinkClick r:id="rId8">
+                  <a:extLst>
+                    <a:ext uri="{A12FA001-AC4F-418D-AE19-62706E023703}">
+                      <ahyp:hlinkClr xmlns:ahyp="http://schemas.microsoft.com/office/drawing/2018/hyperlinkcolor" val="tx"/>
+                    </a:ext>
+                  </a:extLst>
+                </a:hlinkClick>
+              </a:rPr>
+              <a:t>Slido app</a:t>
+            </a:r>
+            <a:r>
+              <a:rPr lang="en-US" sz="2600">
+                <a:solidFill>
+                  <a:srgbClr val="FFFFFF"/>
+                </a:solidFill>
+              </a:rPr>
+              <a:t> must be installed on every computer you’re presenting from</a:t>
+            </a:r>
+          </a:p>
+        </p:txBody>
+      </p:sp>
+      <p:pic>
+        <p:nvPicPr>
+          <p:cNvPr id="6" name="Graphic 5">
+            <a:extLst>
+              <a:ext uri="{FF2B5EF4-FFF2-40B4-BE49-F238E27FC236}">
+                <a16:creationId xmlns:a16="http://schemas.microsoft.com/office/drawing/2014/main" id="{CD374A95-F858-E706-AEA5-665D07EAEBDB}"/>
+              </a:ext>
+            </a:extLst>
+          </p:cNvPr>
+          <p:cNvPicPr>
+            <a:picLocks/>
+          </p:cNvPicPr>
+          <p:nvPr/>
+        </p:nvPicPr>
+        <p:blipFill>
+          <a:blip>
+            <a:extLst>
+              <a:ext uri="{96DAC541-7B7A-43D3-8B79-37D633B846F1}">
+                <asvg:svgBlip xmlns:asvg="http://schemas.microsoft.com/office/drawing/2016/SVG/main" r:embed="rId9"/>
+              </a:ext>
+            </a:extLst>
+          </a:blip>
+          <a:stretch>
+            <a:fillRect/>
+          </a:stretch>
+        </p:blipFill>
+        <p:spPr>
+          <a:xfrm>
+            <a:off x="296462" y="6190785"/>
+            <a:ext cx="296462" cy="296462"/>
+          </a:xfrm>
+          <a:prstGeom prst="rect">
+            <a:avLst/>
+          </a:prstGeom>
+        </p:spPr>
+      </p:pic>
+      <p:sp>
+        <p:nvSpPr>
+          <p:cNvPr id="7" name="Trapezoid 6">
+            <a:extLst>
+              <a:ext uri="{FF2B5EF4-FFF2-40B4-BE49-F238E27FC236}">
+                <a16:creationId xmlns:a16="http://schemas.microsoft.com/office/drawing/2014/main" id="{9DC28806-8665-FF96-892F-CA721B60B8EB}"/>
+              </a:ext>
+            </a:extLst>
+          </p:cNvPr>
+          <p:cNvSpPr/>
+          <p:nvPr>
+            <p:custDataLst>
+              <p:tags r:id="rId5"/>
+            </p:custDataLst>
+          </p:nvPr>
+        </p:nvSpPr>
+        <p:spPr>
+          <a:xfrm rot="2700000">
+            <a:off x="9620371" y="514924"/>
+            <a:ext cx="3335198" cy="778213"/>
+          </a:xfrm>
+          <a:prstGeom prst="trapezoid">
+            <a:avLst>
+              <a:gd name="adj" fmla="val 100000"/>
+            </a:avLst>
+          </a:prstGeom>
+          <a:solidFill>
+            <a:srgbClr val="0A3316"/>
+          </a:solidFill>
+          <a:ln w="25400" cap="flat" cmpd="sng" algn="ctr">
+            <a:noFill/>
+            <a:prstDash val="solid"/>
+          </a:ln>
+          <a:effectLst/>
+          <a:extLst>
+            <a:ext uri="{91240B29-F687-4F45-9708-019B960494DF}">
+              <a14:hiddenLine xmlns:a14="http://schemas.microsoft.com/office/drawing/2010/main" w="25400" cap="flat" cmpd="sng" algn="ctr">
+                <a:solidFill>
+                  <a:schemeClr val="accent1">
+                    <a:shade val="15000"/>
+                  </a:schemeClr>
+                </a:solidFill>
+                <a:prstDash val="solid"/>
+              </a14:hiddenLine>
+            </a:ext>
+          </a:extLst>
+        </p:spPr>
+        <p:style>
+          <a:lnRef idx="2">
+            <a:schemeClr val="accent1">
+              <a:shade val="15000"/>
+            </a:schemeClr>
+          </a:lnRef>
+          <a:fillRef idx="1">
+            <a:schemeClr val="accent1"/>
+          </a:fillRef>
+          <a:effectRef idx="0">
+            <a:schemeClr val="accent1"/>
+          </a:effectRef>
+          <a:fontRef idx="minor">
+            <a:schemeClr val="lt1"/>
+          </a:fontRef>
+        </p:style>
+        <p:txBody>
+          <a:bodyPr tIns="0" bIns="0" rtlCol="0" anchor="t">
+            <a:normAutofit fontScale="70000" lnSpcReduction="20000"/>
+          </a:bodyPr>
+          <a:lstStyle/>
+          <a:p>
+            <a:pPr algn="ctr"/>
+            <a:r>
+              <a:rPr lang="en-US" sz="2600" b="1">
+                <a:solidFill>
+                  <a:srgbClr val="42A65F"/>
+                </a:solidFill>
+              </a:rPr>
+              <a:t>Do not edit
+</a:t>
+            </a:r>
+            <a:r>
+              <a:rPr lang="en-US" sz="2200">
+                <a:solidFill>
+                  <a:srgbClr val="42A65F"/>
+                </a:solidFill>
+                <a:hlinkClick r:id="rId10">
+                  <a:extLst>
+                    <a:ext uri="{A12FA001-AC4F-418D-AE19-62706E023703}">
+                      <ahyp:hlinkClr xmlns:ahyp="http://schemas.microsoft.com/office/drawing/2018/hyperlinkcolor" val="tx"/>
+                    </a:ext>
+                  </a:extLst>
+                </a:hlinkClick>
+              </a:rPr>
+              <a:t>How to change the design</a:t>
+            </a:r>
+            <a:endParaRPr lang="en-US" sz="2200">
+              <a:solidFill>
+                <a:srgbClr val="42A65F"/>
+              </a:solidFill>
+            </a:endParaRPr>
+          </a:p>
+        </p:txBody>
+      </p:sp>
+      <p:pic>
+        <p:nvPicPr>
+          <p:cNvPr id="9" name="Graphic 8">
+            <a:extLst>
+              <a:ext uri="{FF2B5EF4-FFF2-40B4-BE49-F238E27FC236}">
+                <a16:creationId xmlns:a16="http://schemas.microsoft.com/office/drawing/2014/main" id="{BE362FBD-D960-E71F-86FF-B410318931D5}"/>
+              </a:ext>
+            </a:extLst>
+          </p:cNvPr>
+          <p:cNvPicPr>
+            <a:picLocks/>
+          </p:cNvPicPr>
+          <p:nvPr/>
+        </p:nvPicPr>
+        <p:blipFill>
+          <a:blip>
+            <a:extLst>
+              <a:ext uri="{96DAC541-7B7A-43D3-8B79-37D633B846F1}">
+                <asvg:svgBlip xmlns:asvg="http://schemas.microsoft.com/office/drawing/2016/SVG/main" r:embed="rId11"/>
+              </a:ext>
+            </a:extLst>
+          </a:blip>
+          <a:stretch>
+            <a:fillRect/>
+          </a:stretch>
+        </p:blipFill>
+        <p:spPr>
+          <a:xfrm>
+            <a:off x="10746748" y="6153727"/>
+            <a:ext cx="1111733" cy="370578"/>
+          </a:xfrm>
+          <a:prstGeom prst="rect">
+            <a:avLst/>
+          </a:prstGeom>
+        </p:spPr>
+      </p:pic>
+    </p:spTree>
+    <p:custDataLst>
+      <p:tags r:id="rId1"/>
+    </p:custDataLst>
+    <p:extLst>
+      <p:ext uri="{BB962C8B-B14F-4D97-AF65-F5344CB8AC3E}">
+        <p14:creationId xmlns:p14="http://schemas.microsoft.com/office/powerpoint/2010/main" val="1685381435"/>
+      </p:ext>
+    </p:extLst>
+  </p:cSld>
+  <p:clrMapOvr>
+    <a:masterClrMapping/>
+  </p:clrMapOvr>
+  <p:timing>
+    <p:tnLst>
+      <p:par>
+        <p:cTn id="1" dur="indefinite" restart="never" nodeType="tmRoot">
+          <p:childTnLst>
+            <p:seq concurrent="1" nextAc="seek">
+              <p:cTn id="2" dur="indefinite" nodeType="mainSeq">
+                <p:childTnLst>
+                  <p:par>
+                    <p:cTn id="3" fill="hold">
+                      <p:stCondLst>
+                        <p:cond delay="indefinite"/>
+                      </p:stCondLst>
+                      <p:childTnLst>
+                        <p:par>
+                          <p:cTn id="4" fill="hold">
+                            <p:stCondLst>
+                              <p:cond delay="0"/>
+                            </p:stCondLst>
+                            <p:childTnLst>
+                              <p:par>
+                                <p:cTn id="5" presetID="26" presetClass="emph" presetSubtype="0" fill="hold" grpId="0" nodeType="clickEffect">
+                                  <p:stCondLst>
+                                    <p:cond delay="0"/>
+                                  </p:stCondLst>
+                                  <p:childTnLst>
+                                    <p:animEffect transition="out" filter="fade">
+                                      <p:cBhvr>
+                                        <p:cTn id="6" dur="50" tmFilter="0, 0; .2, .5; .8, .5; 1, 0"/>
+                                        <p:tgtEl>
+                                          <p:spTgt spid="3"/>
+                                        </p:tgtEl>
+                                      </p:cBhvr>
+                                    </p:animEffect>
+                                    <p:animScale>
+                                      <p:cBhvr>
+                                        <p:cTn id="7" dur="25" autoRev="1" fill="hold"/>
+                                        <p:tgtEl>
+                                          <p:spTgt spid="3"/>
+                                        </p:tgtEl>
+                                      </p:cBhvr>
+                                      <p:by x="105000" y="105000"/>
+                                    </p:animScale>
+                                  </p:childTnLst>
+                                </p:cTn>
+                              </p:par>
+                            </p:childTnLst>
+                          </p:cTn>
+                        </p:par>
+                      </p:childTnLst>
+                    </p:cTn>
+                  </p:par>
+                </p:childTnLst>
+              </p:cTn>
+              <p:prevCondLst>
+                <p:cond evt="onPrev" delay="0">
+                  <p:tgtEl>
+                    <p:sldTgt/>
+                  </p:tgtEl>
+                </p:cond>
+              </p:prevCondLst>
+              <p:nextCondLst>
+                <p:cond evt="onNext" delay="0">
+                  <p:tgtEl>
+                    <p:sldTgt/>
+                  </p:tgtEl>
+                </p:cond>
+              </p:nextCondLst>
+            </p:seq>
+          </p:childTnLst>
+        </p:cTn>
+      </p:par>
+    </p:tnLst>
+    <p:bldLst>
+      <p:bldP spid="3" grpId="0"/>
+    </p:bldLst>
+  </p:timing>
+</p:sld>
+</file>
+
+<file path=ppt/slides/slide3.xml><?xml version="1.0" encoding="utf-8"?>
+<p:sld xmlns:a="http://schemas.openxmlformats.org/drawingml/2006/main" xmlns:r="http://schemas.openxmlformats.org/officeDocument/2006/relationships" xmlns:p="http://schemas.openxmlformats.org/presentationml/2006/main">
+  <p:cSld>
+    <p:spTree>
+      <p:nvGrpSpPr>
+        <p:cNvPr id="1" name="Shape 135"/>
+        <p:cNvGrpSpPr/>
+        <p:nvPr/>
+      </p:nvGrpSpPr>
+      <p:grpSpPr>
+        <a:xfrm>
+          <a:off x="0" y="0"/>
+          <a:ext cx="0" cy="0"/>
+          <a:chOff x="0" y="0"/>
+          <a:chExt cx="0" cy="0"/>
+        </a:xfrm>
+      </p:grpSpPr>
+      <p:sp>
+        <p:nvSpPr>
+          <p:cNvPr id="136" name="Google Shape;136;p23"/>
+          <p:cNvSpPr txBox="1">
+            <a:spLocks noGrp="1"/>
+          </p:cNvSpPr>
+          <p:nvPr>
+            <p:ph type="body" idx="1"/>
+          </p:nvPr>
+        </p:nvSpPr>
+        <p:spPr>
+          <a:xfrm>
+            <a:off x="268209" y="1588503"/>
+            <a:ext cx="11666400" cy="4954500"/>
+          </a:xfrm>
+          <a:prstGeom prst="rect">
+            <a:avLst/>
+          </a:prstGeom>
+          <a:noFill/>
+          <a:ln>
+            <a:noFill/>
+          </a:ln>
+        </p:spPr>
+        <p:txBody>
+          <a:bodyPr spcFirstLastPara="1" wrap="square" lIns="91433" tIns="45700" rIns="91433" bIns="45700" anchor="t" anchorCtr="0">
+            <a:noAutofit/>
+          </a:bodyPr>
+          <a:lstStyle/>
+          <a:p>
+            <a:pPr marL="457189" indent="-338658">
+              <a:spcBef>
+                <a:spcPts val="400"/>
+              </a:spcBef>
+              <a:buSzPts val="1400"/>
+            </a:pPr>
+            <a:r>
+              <a:rPr lang="en" dirty="0"/>
+              <a:t>Learn how to go from Scope to an Analytical Formulation: what decisions needs to be made and how?</a:t>
+            </a:r>
+            <a:endParaRPr dirty="0"/>
+          </a:p>
+          <a:p>
+            <a:pPr marL="457189" indent="-220128">
+              <a:spcBef>
+                <a:spcPts val="400"/>
+              </a:spcBef>
+              <a:buSzPts val="1400"/>
+              <a:buNone/>
+            </a:pPr>
+            <a:endParaRPr dirty="0"/>
+          </a:p>
+          <a:p>
+            <a:pPr marL="457189" indent="-338658">
+              <a:spcBef>
+                <a:spcPts val="400"/>
+              </a:spcBef>
+              <a:buSzPts val="1400"/>
+            </a:pPr>
+            <a:r>
+              <a:rPr lang="en" dirty="0"/>
+              <a:t>Learn about effective baselines and how to develop them </a:t>
+            </a:r>
+            <a:r>
+              <a:rPr lang="en" b="1" dirty="0"/>
+              <a:t>before</a:t>
+            </a:r>
+            <a:r>
+              <a:rPr lang="en" dirty="0"/>
+              <a:t> building a complex ML model</a:t>
+            </a:r>
+            <a:endParaRPr dirty="0"/>
+          </a:p>
+          <a:p>
+            <a:pPr marL="457189" indent="0">
+              <a:spcBef>
+                <a:spcPts val="400"/>
+              </a:spcBef>
+              <a:buNone/>
+            </a:pPr>
+            <a:endParaRPr dirty="0"/>
+          </a:p>
+        </p:txBody>
+      </p:sp>
+      <p:sp>
+        <p:nvSpPr>
+          <p:cNvPr id="137" name="Google Shape;137;p23"/>
+          <p:cNvSpPr txBox="1">
+            <a:spLocks noGrp="1"/>
+          </p:cNvSpPr>
+          <p:nvPr>
+            <p:ph type="title"/>
+          </p:nvPr>
+        </p:nvSpPr>
+        <p:spPr>
+          <a:xfrm>
+            <a:off x="130558" y="418467"/>
+            <a:ext cx="11360700" cy="763500"/>
+          </a:xfrm>
+          <a:prstGeom prst="rect">
+            <a:avLst/>
+          </a:prstGeom>
+          <a:noFill/>
+          <a:ln>
+            <a:noFill/>
+          </a:ln>
+        </p:spPr>
+        <p:txBody>
+          <a:bodyPr spcFirstLastPara="1" wrap="square" lIns="121900" tIns="121900" rIns="121900" bIns="121900" anchor="t" anchorCtr="0">
+            <a:noAutofit/>
+          </a:bodyPr>
+          <a:lstStyle/>
+          <a:p>
+            <a:pPr>
+              <a:buSzPts val="2800"/>
+            </a:pPr>
+            <a:r>
+              <a:rPr lang="en"/>
+              <a:t>Plan for today</a:t>
+            </a:r>
+            <a:endParaRPr/>
+          </a:p>
+        </p:txBody>
+      </p:sp>
+    </p:spTree>
+  </p:cSld>
+  <p:clrMapOvr>
+    <a:masterClrMapping/>
+  </p:clrMapOvr>
+</p:sld>
+</file>
+
+<file path=ppt/slides/slide30.xml><?xml version="1.0" encoding="utf-8"?>
 <p:sld xmlns:a="http://schemas.openxmlformats.org/drawingml/2006/main" xmlns:r="http://schemas.openxmlformats.org/officeDocument/2006/relationships" xmlns:p="http://schemas.openxmlformats.org/presentationml/2006/main">
   <p:cSld>
     <p:spTree>
@@ -11293,10 +12787,75 @@
       </p:grpSpPr>
       <p:sp>
         <p:nvSpPr>
+          <p:cNvPr id="2" name="Text Placeholder 1">
+            <a:extLst>
+              <a:ext uri="{FF2B5EF4-FFF2-40B4-BE49-F238E27FC236}">
+                <a16:creationId xmlns:a16="http://schemas.microsoft.com/office/drawing/2014/main" id="{16F0CF04-B42B-C044-ACCB-6C665E5B57C0}"/>
+              </a:ext>
+            </a:extLst>
+          </p:cNvPr>
+          <p:cNvSpPr>
+            <a:spLocks noGrp="1"/>
+          </p:cNvSpPr>
+          <p:nvPr>
+            <p:ph type="body" idx="1"/>
+          </p:nvPr>
+        </p:nvSpPr>
+        <p:spPr/>
+        <p:txBody>
+          <a:bodyPr/>
+          <a:lstStyle/>
+          <a:p>
+            <a:r>
+              <a:rPr lang="en-US" dirty="0"/>
+              <a:t>How much better than baselines does our system need to be in order to deploy?</a:t>
+            </a:r>
+            <a:br>
+              <a:rPr lang="en-US" dirty="0"/>
+            </a:br>
+            <a:endParaRPr lang="en-US" dirty="0"/>
+          </a:p>
+          <a:p>
+            <a:r>
+              <a:rPr lang="en-US" dirty="0"/>
+              <a:t>Important to compare performance against the base rate/prior, but this prior rarely represents a “common sense” baseline</a:t>
+            </a:r>
+            <a:br>
+              <a:rPr lang="en-US" dirty="0"/>
+            </a:br>
+            <a:endParaRPr lang="en-US" dirty="0"/>
+          </a:p>
+          <a:p>
+            <a:r>
+              <a:rPr lang="en-US" dirty="0"/>
+              <a:t>Good baselines should provide an ordering to sort the entities</a:t>
+            </a:r>
+          </a:p>
+          <a:p>
+            <a:pPr lvl="1"/>
+            <a:r>
+              <a:rPr lang="en-US" dirty="0"/>
+              <a:t>Heuristic rules (or shallow decision trees) might reflect current practice, but can yield a small number of unique scores with lots of ties</a:t>
+            </a:r>
+            <a:br>
+              <a:rPr lang="en-US" dirty="0"/>
+            </a:br>
+            <a:endParaRPr lang="en-US" dirty="0"/>
+          </a:p>
+          <a:p>
+            <a:r>
+              <a:rPr lang="en-US" dirty="0"/>
+              <a:t>In many real-world problems, a good baseline can be difficult to beat</a:t>
+            </a:r>
+          </a:p>
+        </p:txBody>
+      </p:sp>
+      <p:sp>
+        <p:nvSpPr>
           <p:cNvPr id="3" name="Title 2">
             <a:extLst>
               <a:ext uri="{FF2B5EF4-FFF2-40B4-BE49-F238E27FC236}">
-                <a16:creationId xmlns:a16="http://schemas.microsoft.com/office/drawing/2014/main" id="{FA5EDE9B-A257-2333-4DB4-CBD380E13236}"/>
+                <a16:creationId xmlns:a16="http://schemas.microsoft.com/office/drawing/2014/main" id="{FC049B21-A440-624B-941A-2CE526530E5B}"/>
               </a:ext>
             </a:extLst>
           </p:cNvPr>
@@ -11314,17 +12873,187 @@
           <a:p>
             <a:r>
               <a:rPr lang="en-US" dirty="0"/>
-              <a:t>Analytical Formulation</a:t>
-            </a:r>
+              <a:t>Baseline Considerations</a:t>
+            </a:r>
+          </a:p>
+        </p:txBody>
+      </p:sp>
+    </p:spTree>
+    <p:extLst>
+      <p:ext uri="{BB962C8B-B14F-4D97-AF65-F5344CB8AC3E}">
+        <p14:creationId xmlns:p14="http://schemas.microsoft.com/office/powerpoint/2010/main" val="3480883044"/>
+      </p:ext>
+    </p:extLst>
+  </p:cSld>
+  <p:clrMapOvr>
+    <a:masterClrMapping/>
+  </p:clrMapOvr>
+</p:sld>
+</file>
+
+<file path=ppt/slides/slide31.xml><?xml version="1.0" encoding="utf-8"?>
+<p:sld xmlns:a="http://schemas.openxmlformats.org/drawingml/2006/main" xmlns:r="http://schemas.openxmlformats.org/officeDocument/2006/relationships" xmlns:p="http://schemas.openxmlformats.org/presentationml/2006/main">
+  <p:cSld>
+    <p:spTree>
+      <p:nvGrpSpPr>
+        <p:cNvPr id="1" name=""/>
+        <p:cNvGrpSpPr/>
+        <p:nvPr/>
+      </p:nvGrpSpPr>
+      <p:grpSpPr>
+        <a:xfrm>
+          <a:off x="0" y="0"/>
+          <a:ext cx="0" cy="0"/>
+          <a:chOff x="0" y="0"/>
+          <a:chExt cx="0" cy="0"/>
+        </a:xfrm>
+      </p:grpSpPr>
+      <p:sp>
+        <p:nvSpPr>
+          <p:cNvPr id="2" name="Content Placeholder 1"/>
+          <p:cNvSpPr>
+            <a:spLocks noGrp="1"/>
+          </p:cNvSpPr>
+          <p:nvPr>
+            <p:ph type="body" idx="1"/>
+          </p:nvPr>
+        </p:nvSpPr>
+        <p:spPr/>
+        <p:txBody>
+          <a:bodyPr/>
+          <a:lstStyle/>
+          <a:p>
+            <a:r>
+              <a:rPr lang="en-US" dirty="0"/>
+              <a:t>Coming up this week:</a:t>
+            </a:r>
+          </a:p>
+          <a:p>
+            <a:pPr lvl="1"/>
+            <a:r>
+              <a:rPr lang="en-US" dirty="0"/>
+              <a:t>Friday session on python + </a:t>
+            </a:r>
+            <a:r>
+              <a:rPr lang="en-US" dirty="0" err="1"/>
+              <a:t>sql</a:t>
+            </a:r>
+            <a:r>
+              <a:rPr lang="en-US" dirty="0"/>
+              <a:t> (and advanced </a:t>
+            </a:r>
+            <a:r>
+              <a:rPr lang="en-US" dirty="0" err="1"/>
+              <a:t>sql</a:t>
+            </a:r>
+            <a:r>
+              <a:rPr lang="en-US" dirty="0"/>
+              <a:t>)</a:t>
+            </a:r>
+            <a:br>
+              <a:rPr lang="en-US" dirty="0"/>
+            </a:br>
+            <a:endParaRPr lang="en-US" dirty="0"/>
+          </a:p>
+          <a:p>
+            <a:pPr lvl="1"/>
+            <a:r>
+              <a:rPr lang="en-US" dirty="0"/>
+              <a:t>Thursday session on ML pipelines</a:t>
+            </a:r>
+          </a:p>
+          <a:p>
+            <a:pPr lvl="1"/>
+            <a:endParaRPr lang="en-US" dirty="0"/>
+          </a:p>
+          <a:p>
+            <a:r>
+              <a:rPr lang="en-US" dirty="0"/>
+              <a:t>Next week:</a:t>
+            </a:r>
+          </a:p>
+          <a:p>
+            <a:pPr lvl="1"/>
+            <a:r>
+              <a:rPr lang="en-US" dirty="0"/>
+              <a:t>Proposal peer reviews</a:t>
+            </a:r>
+          </a:p>
+          <a:p>
+            <a:pPr marL="114300" indent="0">
+              <a:buNone/>
+            </a:pPr>
+            <a:endParaRPr lang="en-US" dirty="0"/>
           </a:p>
         </p:txBody>
       </p:sp>
       <p:sp>
         <p:nvSpPr>
-          <p:cNvPr id="12" name="TextBox 11">
+          <p:cNvPr id="3" name="Title 2"/>
+          <p:cNvSpPr>
+            <a:spLocks noGrp="1"/>
+          </p:cNvSpPr>
+          <p:nvPr>
+            <p:ph type="title"/>
+          </p:nvPr>
+        </p:nvSpPr>
+        <p:spPr>
+          <a:xfrm>
+            <a:off x="0" y="325028"/>
+            <a:ext cx="12192000" cy="1143000"/>
+          </a:xfrm>
+        </p:spPr>
+        <p:txBody>
+          <a:bodyPr/>
+          <a:lstStyle/>
+          <a:p>
+            <a:r>
+              <a:rPr lang="en-US" dirty="0">
+                <a:solidFill>
+                  <a:schemeClr val="bg1"/>
+                </a:solidFill>
+              </a:rPr>
+              <a:t>Things to remember</a:t>
+            </a:r>
+          </a:p>
+        </p:txBody>
+      </p:sp>
+    </p:spTree>
+    <p:extLst>
+      <p:ext uri="{BB962C8B-B14F-4D97-AF65-F5344CB8AC3E}">
+        <p14:creationId xmlns:p14="http://schemas.microsoft.com/office/powerpoint/2010/main" val="3454164829"/>
+      </p:ext>
+    </p:extLst>
+  </p:cSld>
+  <p:clrMapOvr>
+    <a:masterClrMapping/>
+  </p:clrMapOvr>
+</p:sld>
+</file>
+
+<file path=ppt/slides/slide4.xml><?xml version="1.0" encoding="utf-8"?>
+<p:sld xmlns:a="http://schemas.openxmlformats.org/drawingml/2006/main" xmlns:r="http://schemas.openxmlformats.org/officeDocument/2006/relationships" xmlns:p="http://schemas.openxmlformats.org/presentationml/2006/main">
+  <p:cSld>
+    <p:spTree>
+      <p:nvGrpSpPr>
+        <p:cNvPr id="1" name=""/>
+        <p:cNvGrpSpPr/>
+        <p:nvPr/>
+      </p:nvGrpSpPr>
+      <p:grpSpPr>
+        <a:xfrm>
+          <a:off x="0" y="0"/>
+          <a:ext cx="0" cy="0"/>
+          <a:chOff x="0" y="0"/>
+          <a:chExt cx="0" cy="0"/>
+        </a:xfrm>
+      </p:grpSpPr>
+      <p:sp>
+        <p:nvSpPr>
+          <p:cNvPr id="5" name="TextBox 4">
             <a:extLst>
               <a:ext uri="{FF2B5EF4-FFF2-40B4-BE49-F238E27FC236}">
-                <a16:creationId xmlns:a16="http://schemas.microsoft.com/office/drawing/2014/main" id="{92628BEE-B8E7-C511-5764-E82AF6189A5B}"/>
+                <a16:creationId xmlns:a16="http://schemas.microsoft.com/office/drawing/2014/main" id="{0221356B-1A77-1CE3-234E-29049362A1F4}"/>
               </a:ext>
             </a:extLst>
           </p:cNvPr>
@@ -11333,204 +13062,8 @@
         </p:nvSpPr>
         <p:spPr>
           <a:xfrm>
-            <a:off x="161381" y="1607442"/>
-            <a:ext cx="3354513" cy="4832092"/>
-          </a:xfrm>
-          <a:prstGeom prst="rect">
-            <a:avLst/>
-          </a:prstGeom>
-          <a:solidFill>
-            <a:schemeClr val="bg2">
-              <a:lumMod val="20000"/>
-              <a:lumOff val="80000"/>
-            </a:schemeClr>
-          </a:solidFill>
-        </p:spPr>
-        <p:style>
-          <a:lnRef idx="2">
-            <a:schemeClr val="accent3">
-              <a:shade val="50000"/>
-            </a:schemeClr>
-          </a:lnRef>
-          <a:fillRef idx="1">
-            <a:schemeClr val="accent3"/>
-          </a:fillRef>
-          <a:effectRef idx="0">
-            <a:schemeClr val="accent3"/>
-          </a:effectRef>
-          <a:fontRef idx="minor">
-            <a:schemeClr val="lt1"/>
-          </a:fontRef>
-        </p:style>
-        <p:txBody>
-          <a:bodyPr wrap="square">
-            <a:spAutoFit/>
-          </a:bodyPr>
-          <a:lstStyle/>
-          <a:p>
-            <a:pPr rtl="0">
-              <a:spcBef>
-                <a:spcPts val="0"/>
-              </a:spcBef>
-              <a:spcAft>
-                <a:spcPts val="0"/>
-              </a:spcAft>
-            </a:pPr>
-            <a:br>
-              <a:rPr lang="en-US" sz="2000" b="0" dirty="0">
-                <a:effectLst/>
-              </a:rPr>
-            </a:br>
-            <a:r>
-              <a:rPr lang="en-US" sz="2000" b="0" i="0" u="none" strike="noStrike" dirty="0">
-                <a:solidFill>
-                  <a:srgbClr val="FF0000"/>
-                </a:solidFill>
-                <a:effectLst/>
-                <a:latin typeface="Arial" panose="020B0604020202020204" pitchFamily="34" charset="0"/>
-              </a:rPr>
-              <a:t>How often is the recommendation/decision being made?</a:t>
-            </a:r>
-            <a:endParaRPr lang="en-US" sz="2000" b="0" dirty="0">
-              <a:effectLst/>
-            </a:endParaRPr>
-          </a:p>
-          <a:p>
-            <a:pPr rtl="0">
-              <a:spcBef>
-                <a:spcPts val="0"/>
-              </a:spcBef>
-              <a:spcAft>
-                <a:spcPts val="0"/>
-              </a:spcAft>
-            </a:pPr>
-            <a:br>
-              <a:rPr lang="en-US" sz="2000" b="0" dirty="0">
-                <a:effectLst/>
-              </a:rPr>
-            </a:br>
-            <a:r>
-              <a:rPr lang="en-US" sz="2000" b="0" i="0" u="none" strike="noStrike" dirty="0">
-                <a:solidFill>
-                  <a:srgbClr val="0000FF"/>
-                </a:solidFill>
-                <a:effectLst/>
-                <a:latin typeface="Arial" panose="020B0604020202020204" pitchFamily="34" charset="0"/>
-              </a:rPr>
-              <a:t>Who/what is included in the cohort?</a:t>
-            </a:r>
-            <a:endParaRPr lang="en-US" sz="2000" b="0" dirty="0">
-              <a:effectLst/>
-            </a:endParaRPr>
-          </a:p>
-          <a:p>
-            <a:pPr rtl="0">
-              <a:spcBef>
-                <a:spcPts val="0"/>
-              </a:spcBef>
-              <a:spcAft>
-                <a:spcPts val="0"/>
-              </a:spcAft>
-            </a:pPr>
-            <a:br>
-              <a:rPr lang="en-US" sz="2000" b="0" dirty="0">
-                <a:effectLst/>
-              </a:rPr>
-            </a:br>
-            <a:r>
-              <a:rPr lang="en-US" sz="2000" b="0" i="0" u="none" strike="noStrike" dirty="0">
-                <a:solidFill>
-                  <a:srgbClr val="FF00FF"/>
-                </a:solidFill>
-                <a:effectLst/>
-                <a:latin typeface="Arial" panose="020B0604020202020204" pitchFamily="34" charset="0"/>
-              </a:rPr>
-              <a:t>What is the output?</a:t>
-            </a:r>
-            <a:endParaRPr lang="en-US" sz="2000" b="0" dirty="0">
-              <a:effectLst/>
-            </a:endParaRPr>
-          </a:p>
-          <a:p>
-            <a:pPr rtl="0">
-              <a:spcBef>
-                <a:spcPts val="0"/>
-              </a:spcBef>
-              <a:spcAft>
-                <a:spcPts val="0"/>
-              </a:spcAft>
-            </a:pPr>
-            <a:br>
-              <a:rPr lang="en-US" sz="2000" b="0" dirty="0">
-                <a:effectLst/>
-              </a:rPr>
-            </a:br>
-            <a:r>
-              <a:rPr lang="en-US" sz="2000" b="0" i="0" u="none" strike="noStrike" dirty="0">
-                <a:solidFill>
-                  <a:srgbClr val="274E13"/>
-                </a:solidFill>
-                <a:effectLst/>
-                <a:latin typeface="Arial" panose="020B0604020202020204" pitchFamily="34" charset="0"/>
-              </a:rPr>
-              <a:t>What outcome are you predicting/estimating?</a:t>
-            </a:r>
-            <a:endParaRPr lang="en-US" sz="2000" b="0" dirty="0">
-              <a:effectLst/>
-            </a:endParaRPr>
-          </a:p>
-          <a:p>
-            <a:pPr rtl="0">
-              <a:spcBef>
-                <a:spcPts val="0"/>
-              </a:spcBef>
-              <a:spcAft>
-                <a:spcPts val="0"/>
-              </a:spcAft>
-            </a:pPr>
-            <a:br>
-              <a:rPr lang="en-US" sz="2000" b="0" dirty="0">
-                <a:effectLst/>
-              </a:rPr>
-            </a:br>
-            <a:r>
-              <a:rPr lang="en-US" sz="2000" b="0" i="0" u="none" strike="noStrike" dirty="0">
-                <a:solidFill>
-                  <a:srgbClr val="B45F06"/>
-                </a:solidFill>
-                <a:effectLst/>
-                <a:latin typeface="Arial" panose="020B0604020202020204" pitchFamily="34" charset="0"/>
-              </a:rPr>
-              <a:t>For what purpose?</a:t>
-            </a:r>
-            <a:endParaRPr lang="en-US" sz="2000" b="0" dirty="0">
-              <a:effectLst/>
-            </a:endParaRPr>
-          </a:p>
-          <a:p>
-            <a:br>
-              <a:rPr lang="en-US" dirty="0"/>
-            </a:br>
-            <a:endParaRPr lang="en-US" dirty="0"/>
-          </a:p>
-        </p:txBody>
-      </p:sp>
-      <p:sp>
-        <p:nvSpPr>
-          <p:cNvPr id="14" name="TextBox 13">
-            <a:extLst>
-              <a:ext uri="{FF2B5EF4-FFF2-40B4-BE49-F238E27FC236}">
-                <a16:creationId xmlns:a16="http://schemas.microsoft.com/office/drawing/2014/main" id="{4E220471-6DE3-15C3-47EA-D5F277E4C9DD}"/>
-              </a:ext>
-            </a:extLst>
-          </p:cNvPr>
-          <p:cNvSpPr txBox="1"/>
-          <p:nvPr/>
-        </p:nvSpPr>
-        <p:spPr>
-          <a:xfrm>
-            <a:off x="3673012" y="1607442"/>
-            <a:ext cx="8101172" cy="4052391"/>
+            <a:off x="1889760" y="1812072"/>
+            <a:ext cx="9144000" cy="2585323"/>
           </a:xfrm>
           <a:prstGeom prst="rect">
             <a:avLst/>
@@ -11543,141 +13076,17 @@
           </a:bodyPr>
           <a:lstStyle/>
           <a:p>
-            <a:pPr rtl="0">
-              <a:lnSpc>
-                <a:spcPct val="150000"/>
-              </a:lnSpc>
-              <a:spcBef>
-                <a:spcPts val="0"/>
-              </a:spcBef>
-              <a:spcAft>
-                <a:spcPts val="1600"/>
-              </a:spcAft>
-            </a:pPr>
-            <a:r>
-              <a:rPr lang="en-US" sz="2400" b="0" i="0" u="none" strike="noStrike" dirty="0">
-                <a:solidFill>
-                  <a:srgbClr val="FF0000"/>
-                </a:solidFill>
-                <a:effectLst/>
-                <a:latin typeface="Arial" panose="020B0604020202020204" pitchFamily="34" charset="0"/>
-              </a:rPr>
-              <a:t>On the first day of every semester</a:t>
-            </a:r>
-            <a:r>
-              <a:rPr lang="en-US" sz="2400" b="0" i="0" u="none" strike="noStrike" dirty="0">
-                <a:solidFill>
-                  <a:srgbClr val="595959"/>
-                </a:solidFill>
-                <a:effectLst/>
-                <a:latin typeface="Arial" panose="020B0604020202020204" pitchFamily="34" charset="0"/>
-              </a:rPr>
-              <a:t>, for </a:t>
-            </a:r>
-            <a:r>
-              <a:rPr lang="en-US" sz="2400" b="0" i="0" u="none" strike="noStrike" dirty="0">
-                <a:solidFill>
-                  <a:srgbClr val="0000FF"/>
-                </a:solidFill>
-                <a:effectLst/>
-                <a:latin typeface="Arial" panose="020B0604020202020204" pitchFamily="34" charset="0"/>
-              </a:rPr>
-              <a:t>all the students who are currently enrolled in an undergraduate degree program</a:t>
-            </a:r>
-            <a:r>
-              <a:rPr lang="en-US" sz="2400" b="0" i="0" u="none" strike="noStrike" dirty="0">
-                <a:solidFill>
-                  <a:srgbClr val="595959"/>
-                </a:solidFill>
-                <a:effectLst/>
-                <a:latin typeface="Arial" panose="020B0604020202020204" pitchFamily="34" charset="0"/>
-              </a:rPr>
-              <a:t>, can we identify the </a:t>
-            </a:r>
-            <a:r>
-              <a:rPr lang="en-US" sz="2400" dirty="0">
-                <a:solidFill>
-                  <a:srgbClr val="FF00FF"/>
-                </a:solidFill>
-                <a:latin typeface="Arial" panose="020B0604020202020204" pitchFamily="34" charset="0"/>
-              </a:rPr>
-              <a:t>1</a:t>
-            </a:r>
-            <a:r>
-              <a:rPr lang="en-US" sz="2400" b="0" i="0" u="none" strike="noStrike" dirty="0">
-                <a:solidFill>
-                  <a:srgbClr val="FF00FF"/>
-                </a:solidFill>
-                <a:effectLst/>
-                <a:latin typeface="Arial" panose="020B0604020202020204" pitchFamily="34" charset="0"/>
-              </a:rPr>
-              <a:t>00 highest risk students</a:t>
-            </a:r>
-            <a:r>
-              <a:rPr lang="en-US" sz="2400" b="0" i="0" u="none" strike="noStrike" dirty="0">
-                <a:solidFill>
-                  <a:srgbClr val="595959"/>
-                </a:solidFill>
-                <a:effectLst/>
-                <a:latin typeface="Arial" panose="020B0604020202020204" pitchFamily="34" charset="0"/>
-              </a:rPr>
-              <a:t> who are </a:t>
-            </a:r>
-            <a:r>
-              <a:rPr lang="en-US" sz="2400" b="0" i="0" u="none" strike="noStrike" dirty="0">
-                <a:solidFill>
-                  <a:srgbClr val="38761D"/>
-                </a:solidFill>
-                <a:effectLst/>
-                <a:latin typeface="Arial" panose="020B0604020202020204" pitchFamily="34" charset="0"/>
-              </a:rPr>
-              <a:t>likely to </a:t>
-            </a:r>
-            <a:r>
-              <a:rPr lang="en-US" sz="2400" dirty="0">
-                <a:solidFill>
-                  <a:srgbClr val="38761D"/>
-                </a:solidFill>
-                <a:latin typeface="Arial" panose="020B0604020202020204" pitchFamily="34" charset="0"/>
-              </a:rPr>
-              <a:t>not graduate college within 5 years of their college start </a:t>
-            </a:r>
-            <a:r>
-              <a:rPr lang="en-US" sz="2400" b="0" i="0" u="none" strike="noStrike" dirty="0">
-                <a:solidFill>
-                  <a:srgbClr val="B45F06"/>
-                </a:solidFill>
-                <a:effectLst/>
-                <a:latin typeface="Arial" panose="020B0604020202020204" pitchFamily="34" charset="0"/>
-              </a:rPr>
-              <a:t>to prioritize for proactive academic or other interventions</a:t>
-            </a:r>
-            <a:r>
-              <a:rPr lang="en-US" sz="2400" b="0" i="0" u="none" strike="noStrike" dirty="0">
-                <a:solidFill>
-                  <a:srgbClr val="595959"/>
-                </a:solidFill>
-                <a:effectLst/>
-                <a:latin typeface="Arial" panose="020B0604020202020204" pitchFamily="34" charset="0"/>
-              </a:rPr>
-              <a:t>?</a:t>
-            </a:r>
-            <a:endParaRPr lang="en-US" sz="2400" b="0" dirty="0">
-              <a:effectLst/>
-            </a:endParaRPr>
-          </a:p>
-          <a:p>
-            <a:br>
-              <a:rPr lang="en-US" dirty="0"/>
-            </a:br>
-            <a:endParaRPr lang="en-US" dirty="0"/>
+            <a:r>
+              <a:rPr lang="en-US" sz="5400" dirty="0"/>
+              <a:t>The city wants to tell every 311 caller when their issue will be fixed</a:t>
+            </a:r>
           </a:p>
         </p:txBody>
       </p:sp>
     </p:spTree>
     <p:extLst>
       <p:ext uri="{BB962C8B-B14F-4D97-AF65-F5344CB8AC3E}">
-        <p14:creationId xmlns:p14="http://schemas.microsoft.com/office/powerpoint/2010/main" val="2025399898"/>
+        <p14:creationId xmlns:p14="http://schemas.microsoft.com/office/powerpoint/2010/main" val="397751920"/>
       </p:ext>
     </p:extLst>
   </p:cSld>
@@ -11687,7 +13096,525 @@
 </p:sld>
 </file>
 
-<file path=ppt/slides/slide8.xml><?xml version="1.0" encoding="utf-8"?>
+<file path=ppt/slides/slide5.xml><?xml version="1.0" encoding="utf-8"?>
+<p:sld xmlns:a="http://schemas.openxmlformats.org/drawingml/2006/main" xmlns:r="http://schemas.openxmlformats.org/officeDocument/2006/relationships" xmlns:p="http://schemas.openxmlformats.org/presentationml/2006/main">
+  <p:cSld>
+    <p:spTree>
+      <p:nvGrpSpPr>
+        <p:cNvPr id="1" name=""/>
+        <p:cNvGrpSpPr/>
+        <p:nvPr/>
+      </p:nvGrpSpPr>
+      <p:grpSpPr>
+        <a:xfrm>
+          <a:off x="0" y="0"/>
+          <a:ext cx="0" cy="0"/>
+          <a:chOff x="0" y="0"/>
+          <a:chExt cx="0" cy="0"/>
+        </a:xfrm>
+      </p:grpSpPr>
+      <p:sp>
+        <p:nvSpPr>
+          <p:cNvPr id="3" name="TextBox 2">
+            <a:extLst>
+              <a:ext uri="{FF2B5EF4-FFF2-40B4-BE49-F238E27FC236}">
+                <a16:creationId xmlns:a16="http://schemas.microsoft.com/office/drawing/2014/main" id="{2A5574D9-8D6D-E9BF-41BE-F062E168FB39}"/>
+              </a:ext>
+            </a:extLst>
+          </p:cNvPr>
+          <p:cNvSpPr txBox="1"/>
+          <p:nvPr/>
+        </p:nvSpPr>
+        <p:spPr>
+          <a:xfrm>
+            <a:off x="1539240" y="2101632"/>
+            <a:ext cx="10881360" cy="2308324"/>
+          </a:xfrm>
+          <a:prstGeom prst="rect">
+            <a:avLst/>
+          </a:prstGeom>
+          <a:noFill/>
+        </p:spPr>
+        <p:txBody>
+          <a:bodyPr wrap="square">
+            <a:spAutoFit/>
+          </a:bodyPr>
+          <a:lstStyle/>
+          <a:p>
+            <a:r>
+              <a:rPr lang="en-US" sz="7200" dirty="0"/>
+              <a:t>Predict when the 311 issue will be fixed</a:t>
+            </a:r>
+          </a:p>
+        </p:txBody>
+      </p:sp>
+    </p:spTree>
+    <p:extLst>
+      <p:ext uri="{BB962C8B-B14F-4D97-AF65-F5344CB8AC3E}">
+        <p14:creationId xmlns:p14="http://schemas.microsoft.com/office/powerpoint/2010/main" val="511528683"/>
+      </p:ext>
+    </p:extLst>
+  </p:cSld>
+  <p:clrMapOvr>
+    <a:masterClrMapping/>
+  </p:clrMapOvr>
+</p:sld>
+</file>
+
+<file path=ppt/slides/slide6.xml><?xml version="1.0" encoding="utf-8"?>
+<p:sld xmlns:a="http://schemas.openxmlformats.org/drawingml/2006/main" xmlns:r="http://schemas.openxmlformats.org/officeDocument/2006/relationships" xmlns:p="http://schemas.openxmlformats.org/presentationml/2006/main">
+  <p:cSld>
+    <p:spTree>
+      <p:nvGrpSpPr>
+        <p:cNvPr id="1" name="Shape 152"/>
+        <p:cNvGrpSpPr/>
+        <p:nvPr/>
+      </p:nvGrpSpPr>
+      <p:grpSpPr>
+        <a:xfrm>
+          <a:off x="0" y="0"/>
+          <a:ext cx="0" cy="0"/>
+          <a:chOff x="0" y="0"/>
+          <a:chExt cx="0" cy="0"/>
+        </a:xfrm>
+      </p:grpSpPr>
+      <p:sp>
+        <p:nvSpPr>
+          <p:cNvPr id="153" name="Google Shape;153;p26"/>
+          <p:cNvSpPr txBox="1">
+            <a:spLocks noGrp="1"/>
+          </p:cNvSpPr>
+          <p:nvPr>
+            <p:ph type="title"/>
+          </p:nvPr>
+        </p:nvSpPr>
+        <p:spPr>
+          <a:xfrm>
+            <a:off x="415600" y="593367"/>
+            <a:ext cx="11360800" cy="763600"/>
+          </a:xfrm>
+          <a:prstGeom prst="rect">
+            <a:avLst/>
+          </a:prstGeom>
+        </p:spPr>
+        <p:txBody>
+          <a:bodyPr spcFirstLastPara="1" wrap="square" lIns="121900" tIns="121900" rIns="121900" bIns="121900" anchor="t" anchorCtr="0">
+            <a:noAutofit/>
+          </a:bodyPr>
+          <a:lstStyle/>
+          <a:p>
+            <a:r>
+              <a:rPr lang="en"/>
+              <a:t>Decisions</a:t>
+            </a:r>
+            <a:endParaRPr/>
+          </a:p>
+        </p:txBody>
+      </p:sp>
+      <p:sp>
+        <p:nvSpPr>
+          <p:cNvPr id="154" name="Google Shape;154;p26"/>
+          <p:cNvSpPr txBox="1">
+            <a:spLocks noGrp="1"/>
+          </p:cNvSpPr>
+          <p:nvPr>
+            <p:ph type="body" idx="1"/>
+          </p:nvPr>
+        </p:nvSpPr>
+        <p:spPr>
+          <a:xfrm>
+            <a:off x="415600" y="1536633"/>
+            <a:ext cx="11360800" cy="4555200"/>
+          </a:xfrm>
+          <a:prstGeom prst="rect">
+            <a:avLst/>
+          </a:prstGeom>
+        </p:spPr>
+        <p:txBody>
+          <a:bodyPr spcFirstLastPara="1" wrap="square" lIns="121900" tIns="121900" rIns="121900" bIns="121900" anchor="t" anchorCtr="0">
+            <a:noAutofit/>
+          </a:bodyPr>
+          <a:lstStyle/>
+          <a:p>
+            <a:pPr marL="152396" indent="0">
+              <a:buNone/>
+            </a:pPr>
+            <a:r>
+              <a:rPr lang="en-US" b="1" dirty="0"/>
+              <a:t>Predicting what?</a:t>
+            </a:r>
+            <a:r>
+              <a:rPr lang="en-US" dirty="0"/>
+              <a:t> Days until ticket is </a:t>
+            </a:r>
+            <a:r>
+              <a:rPr lang="en-US" b="1" dirty="0"/>
+              <a:t>closed</a:t>
+            </a:r>
+            <a:r>
+              <a:rPr lang="en-US" dirty="0"/>
+              <a:t>. Days until road is repaired.</a:t>
+            </a:r>
+          </a:p>
+          <a:p>
+            <a:pPr marL="152396" indent="0">
+              <a:buNone/>
+            </a:pPr>
+            <a:endParaRPr lang="en-US" dirty="0"/>
+          </a:p>
+          <a:p>
+            <a:pPr marL="152396" indent="0">
+              <a:buNone/>
+            </a:pPr>
+            <a:r>
+              <a:rPr lang="en-US" b="1" dirty="0"/>
+              <a:t>When</a:t>
+            </a:r>
+            <a:r>
+              <a:rPr lang="en-US" dirty="0"/>
+              <a:t>? Days until fix? this week, this month, longer.</a:t>
+            </a:r>
+          </a:p>
+          <a:p>
+            <a:pPr>
+              <a:buAutoNum type="arabicPeriod"/>
+            </a:pPr>
+            <a:endParaRPr lang="en-US" dirty="0"/>
+          </a:p>
+          <a:p>
+            <a:pPr marL="152396" indent="0">
+              <a:buNone/>
+            </a:pPr>
+            <a:r>
+              <a:rPr lang="en-US" b="1" dirty="0"/>
+              <a:t>When?</a:t>
+            </a:r>
+            <a:r>
+              <a:rPr lang="en-US" dirty="0"/>
+              <a:t> At intake (when all you have is a description someone typed). After triage, when a department has claimed it. Or updated daily?</a:t>
+            </a:r>
+          </a:p>
+          <a:p>
+            <a:pPr marL="152396" indent="0">
+              <a:buNone/>
+            </a:pPr>
+            <a:endParaRPr lang="en" dirty="0"/>
+          </a:p>
+          <a:p>
+            <a:pPr marL="152396" indent="0">
+              <a:buNone/>
+            </a:pPr>
+            <a:r>
+              <a:rPr lang="en-US" b="1" dirty="0"/>
+              <a:t>Which action is it informing? </a:t>
+            </a:r>
+            <a:r>
+              <a:rPr lang="en-US" dirty="0"/>
+              <a:t>setting expectations for the caller? prioritizing crews?</a:t>
+            </a:r>
+          </a:p>
+          <a:p>
+            <a:pPr marL="152396" indent="0">
+              <a:buNone/>
+            </a:pPr>
+            <a:endParaRPr lang="en-US" dirty="0"/>
+          </a:p>
+          <a:p>
+            <a:pPr marL="152396" indent="0">
+              <a:buNone/>
+            </a:pPr>
+            <a:r>
+              <a:rPr lang="en-US" b="1" dirty="0"/>
+              <a:t>What errors are more costly?</a:t>
+            </a:r>
+            <a:endParaRPr lang="en" b="1" dirty="0"/>
+          </a:p>
+        </p:txBody>
+      </p:sp>
+    </p:spTree>
+  </p:cSld>
+  <p:clrMapOvr>
+    <a:masterClrMapping/>
+  </p:clrMapOvr>
+  <p:timing>
+    <p:tnLst>
+      <p:par>
+        <p:cTn id="1" dur="indefinite" restart="never" nodeType="tmRoot">
+          <p:childTnLst>
+            <p:seq concurrent="1" nextAc="seek">
+              <p:cTn id="2" dur="indefinite" nodeType="mainSeq">
+                <p:childTnLst>
+                  <p:par>
+                    <p:cTn id="3" fill="hold">
+                      <p:stCondLst>
+                        <p:cond delay="indefinite"/>
+                      </p:stCondLst>
+                      <p:childTnLst>
+                        <p:par>
+                          <p:cTn id="4" fill="hold">
+                            <p:stCondLst>
+                              <p:cond delay="0"/>
+                            </p:stCondLst>
+                            <p:childTnLst>
+                              <p:par>
+                                <p:cTn id="5" presetID="1" presetClass="entr" presetSubtype="0" fill="hold" nodeType="clickEffect">
+                                  <p:stCondLst>
+                                    <p:cond delay="0"/>
+                                  </p:stCondLst>
+                                  <p:childTnLst>
+                                    <p:set>
+                                      <p:cBhvr>
+                                        <p:cTn id="6" dur="1" fill="hold">
+                                          <p:stCondLst>
+                                            <p:cond delay="0"/>
+                                          </p:stCondLst>
+                                        </p:cTn>
+                                        <p:tgtEl>
+                                          <p:spTgt spid="154">
+                                            <p:txEl>
+                                              <p:pRg st="0" end="0"/>
+                                            </p:txEl>
+                                          </p:spTgt>
+                                        </p:tgtEl>
+                                        <p:attrNameLst>
+                                          <p:attrName>style.visibility</p:attrName>
+                                        </p:attrNameLst>
+                                      </p:cBhvr>
+                                      <p:to>
+                                        <p:strVal val="visible"/>
+                                      </p:to>
+                                    </p:set>
+                                  </p:childTnLst>
+                                </p:cTn>
+                              </p:par>
+                            </p:childTnLst>
+                          </p:cTn>
+                        </p:par>
+                      </p:childTnLst>
+                    </p:cTn>
+                  </p:par>
+                  <p:par>
+                    <p:cTn id="7" fill="hold">
+                      <p:stCondLst>
+                        <p:cond delay="indefinite"/>
+                      </p:stCondLst>
+                      <p:childTnLst>
+                        <p:par>
+                          <p:cTn id="8" fill="hold">
+                            <p:stCondLst>
+                              <p:cond delay="0"/>
+                            </p:stCondLst>
+                            <p:childTnLst>
+                              <p:par>
+                                <p:cTn id="9" presetID="1" presetClass="entr" presetSubtype="0" fill="hold" nodeType="clickEffect">
+                                  <p:stCondLst>
+                                    <p:cond delay="0"/>
+                                  </p:stCondLst>
+                                  <p:childTnLst>
+                                    <p:set>
+                                      <p:cBhvr>
+                                        <p:cTn id="10" dur="1" fill="hold">
+                                          <p:stCondLst>
+                                            <p:cond delay="0"/>
+                                          </p:stCondLst>
+                                        </p:cTn>
+                                        <p:tgtEl>
+                                          <p:spTgt spid="154">
+                                            <p:txEl>
+                                              <p:pRg st="2" end="2"/>
+                                            </p:txEl>
+                                          </p:spTgt>
+                                        </p:tgtEl>
+                                        <p:attrNameLst>
+                                          <p:attrName>style.visibility</p:attrName>
+                                        </p:attrNameLst>
+                                      </p:cBhvr>
+                                      <p:to>
+                                        <p:strVal val="visible"/>
+                                      </p:to>
+                                    </p:set>
+                                  </p:childTnLst>
+                                </p:cTn>
+                              </p:par>
+                            </p:childTnLst>
+                          </p:cTn>
+                        </p:par>
+                      </p:childTnLst>
+                    </p:cTn>
+                  </p:par>
+                  <p:par>
+                    <p:cTn id="11" fill="hold">
+                      <p:stCondLst>
+                        <p:cond delay="indefinite"/>
+                      </p:stCondLst>
+                      <p:childTnLst>
+                        <p:par>
+                          <p:cTn id="12" fill="hold">
+                            <p:stCondLst>
+                              <p:cond delay="0"/>
+                            </p:stCondLst>
+                            <p:childTnLst>
+                              <p:par>
+                                <p:cTn id="13" presetID="1" presetClass="entr" presetSubtype="0" fill="hold" nodeType="clickEffect">
+                                  <p:stCondLst>
+                                    <p:cond delay="0"/>
+                                  </p:stCondLst>
+                                  <p:childTnLst>
+                                    <p:set>
+                                      <p:cBhvr>
+                                        <p:cTn id="14" dur="1" fill="hold">
+                                          <p:stCondLst>
+                                            <p:cond delay="0"/>
+                                          </p:stCondLst>
+                                        </p:cTn>
+                                        <p:tgtEl>
+                                          <p:spTgt spid="154">
+                                            <p:txEl>
+                                              <p:pRg st="4" end="4"/>
+                                            </p:txEl>
+                                          </p:spTgt>
+                                        </p:tgtEl>
+                                        <p:attrNameLst>
+                                          <p:attrName>style.visibility</p:attrName>
+                                        </p:attrNameLst>
+                                      </p:cBhvr>
+                                      <p:to>
+                                        <p:strVal val="visible"/>
+                                      </p:to>
+                                    </p:set>
+                                  </p:childTnLst>
+                                </p:cTn>
+                              </p:par>
+                            </p:childTnLst>
+                          </p:cTn>
+                        </p:par>
+                      </p:childTnLst>
+                    </p:cTn>
+                  </p:par>
+                  <p:par>
+                    <p:cTn id="15" fill="hold">
+                      <p:stCondLst>
+                        <p:cond delay="indefinite"/>
+                      </p:stCondLst>
+                      <p:childTnLst>
+                        <p:par>
+                          <p:cTn id="16" fill="hold">
+                            <p:stCondLst>
+                              <p:cond delay="0"/>
+                            </p:stCondLst>
+                            <p:childTnLst>
+                              <p:par>
+                                <p:cTn id="17" presetID="1" presetClass="entr" presetSubtype="0" fill="hold" nodeType="clickEffect">
+                                  <p:stCondLst>
+                                    <p:cond delay="0"/>
+                                  </p:stCondLst>
+                                  <p:childTnLst>
+                                    <p:set>
+                                      <p:cBhvr>
+                                        <p:cTn id="18" dur="1" fill="hold">
+                                          <p:stCondLst>
+                                            <p:cond delay="0"/>
+                                          </p:stCondLst>
+                                        </p:cTn>
+                                        <p:tgtEl>
+                                          <p:spTgt spid="154">
+                                            <p:txEl>
+                                              <p:pRg st="6" end="6"/>
+                                            </p:txEl>
+                                          </p:spTgt>
+                                        </p:tgtEl>
+                                        <p:attrNameLst>
+                                          <p:attrName>style.visibility</p:attrName>
+                                        </p:attrNameLst>
+                                      </p:cBhvr>
+                                      <p:to>
+                                        <p:strVal val="visible"/>
+                                      </p:to>
+                                    </p:set>
+                                  </p:childTnLst>
+                                </p:cTn>
+                              </p:par>
+                            </p:childTnLst>
+                          </p:cTn>
+                        </p:par>
+                      </p:childTnLst>
+                    </p:cTn>
+                  </p:par>
+                  <p:par>
+                    <p:cTn id="19" fill="hold">
+                      <p:stCondLst>
+                        <p:cond delay="indefinite"/>
+                      </p:stCondLst>
+                      <p:childTnLst>
+                        <p:par>
+                          <p:cTn id="20" fill="hold">
+                            <p:stCondLst>
+                              <p:cond delay="0"/>
+                            </p:stCondLst>
+                            <p:childTnLst>
+                              <p:par>
+                                <p:cTn id="21" presetID="1" presetClass="entr" presetSubtype="0" fill="hold" nodeType="clickEffect">
+                                  <p:stCondLst>
+                                    <p:cond delay="0"/>
+                                  </p:stCondLst>
+                                  <p:childTnLst>
+                                    <p:set>
+                                      <p:cBhvr>
+                                        <p:cTn id="22" dur="1" fill="hold">
+                                          <p:stCondLst>
+                                            <p:cond delay="0"/>
+                                          </p:stCondLst>
+                                        </p:cTn>
+                                        <p:tgtEl>
+                                          <p:spTgt spid="154">
+                                            <p:txEl>
+                                              <p:pRg st="8" end="8"/>
+                                            </p:txEl>
+                                          </p:spTgt>
+                                        </p:tgtEl>
+                                        <p:attrNameLst>
+                                          <p:attrName>style.visibility</p:attrName>
+                                        </p:attrNameLst>
+                                      </p:cBhvr>
+                                      <p:to>
+                                        <p:strVal val="visible"/>
+                                      </p:to>
+                                    </p:set>
+                                  </p:childTnLst>
+                                </p:cTn>
+                              </p:par>
+                            </p:childTnLst>
+                          </p:cTn>
+                        </p:par>
+                      </p:childTnLst>
+                    </p:cTn>
+                  </p:par>
+                </p:childTnLst>
+              </p:cTn>
+              <p:prevCondLst>
+                <p:cond evt="onPrev" delay="0">
+                  <p:tgtEl>
+                    <p:sldTgt/>
+                  </p:tgtEl>
+                </p:cond>
+              </p:prevCondLst>
+              <p:nextCondLst>
+                <p:cond evt="onNext" delay="0">
+                  <p:tgtEl>
+                    <p:sldTgt/>
+                  </p:tgtEl>
+                </p:cond>
+              </p:nextCondLst>
+            </p:seq>
+          </p:childTnLst>
+        </p:cTn>
+      </p:par>
+    </p:tnLst>
+  </p:timing>
+</p:sld>
+</file>
+
+<file path=ppt/slides/slide7.xml><?xml version="1.0" encoding="utf-8"?>
 <p:sld xmlns:a="http://schemas.openxmlformats.org/drawingml/2006/main" xmlns:r="http://schemas.openxmlformats.org/officeDocument/2006/relationships" xmlns:p="http://schemas.openxmlformats.org/presentationml/2006/main">
   <p:cSld>
     <p:spTree>
@@ -11727,12 +13654,40 @@
           <a:p>
             <a:r>
               <a:rPr lang="en-US" dirty="0"/>
-              <a:t>What type of analysis are you doing?</a:t>
+              <a:t>Scoping defines the goals and approach at a high level, the </a:t>
+            </a:r>
+            <a:r>
+              <a:rPr lang="en-US" b="1" dirty="0">
+                <a:solidFill>
+                  <a:srgbClr val="C00000"/>
+                </a:solidFill>
+              </a:rPr>
+              <a:t>analytical formulation </a:t>
+            </a:r>
+            <a:r>
+              <a:rPr lang="en-US" dirty="0"/>
+              <a:t>maps this scope to an ML problem and analytical approach</a:t>
             </a:r>
             <a:br>
               <a:rPr lang="en-US" dirty="0"/>
             </a:br>
             <a:endParaRPr lang="en-US" dirty="0"/>
+          </a:p>
+          <a:p>
+            <a:r>
+              <a:rPr lang="en-US" dirty="0"/>
+              <a:t>Should be as detailed and specific as possible, obvious how to code it up</a:t>
+            </a:r>
+            <a:br>
+              <a:rPr lang="en-US" dirty="0"/>
+            </a:br>
+            <a:endParaRPr lang="en-US" dirty="0"/>
+          </a:p>
+          <a:p>
+            <a:r>
+              <a:rPr lang="en-US" dirty="0"/>
+              <a:t>The analytical formulation should be guided by –– and map back to –– how the system you’re building will actually be deployed and used</a:t>
+            </a:r>
           </a:p>
         </p:txBody>
       </p:sp>
@@ -11759,7 +13714,7 @@
           <a:p>
             <a:r>
               <a:rPr lang="en-US" dirty="0"/>
-              <a:t>Decisions we need to make</a:t>
+              <a:t>Turning the project goals/scope into an ML problem</a:t>
             </a:r>
           </a:p>
         </p:txBody>
@@ -11767,7 +13722,7 @@
     </p:spTree>
     <p:extLst>
       <p:ext uri="{BB962C8B-B14F-4D97-AF65-F5344CB8AC3E}">
-        <p14:creationId xmlns:p14="http://schemas.microsoft.com/office/powerpoint/2010/main" val="3163189124"/>
+        <p14:creationId xmlns:p14="http://schemas.microsoft.com/office/powerpoint/2010/main" val="3562142687"/>
       </p:ext>
     </p:extLst>
   </p:cSld>
@@ -11777,7 +13732,7 @@
 </p:sld>
 </file>
 
-<file path=ppt/slides/slide9.xml><?xml version="1.0" encoding="utf-8"?>
+<file path=ppt/slides/slide8.xml><?xml version="1.0" encoding="utf-8"?>
 <p:sld xmlns:a="http://schemas.openxmlformats.org/drawingml/2006/main" xmlns:r="http://schemas.openxmlformats.org/officeDocument/2006/relationships" xmlns:p="http://schemas.openxmlformats.org/presentationml/2006/main">
   <p:cSld>
     <p:spTree>
@@ -11796,74 +13751,10 @@
       </p:grpSpPr>
       <p:sp>
         <p:nvSpPr>
-          <p:cNvPr id="2" name="Text Placeholder 1">
-            <a:extLst>
-              <a:ext uri="{FF2B5EF4-FFF2-40B4-BE49-F238E27FC236}">
-                <a16:creationId xmlns:a16="http://schemas.microsoft.com/office/drawing/2014/main" id="{1BF58D61-D951-4047-914F-96A26849E50A}"/>
-              </a:ext>
-            </a:extLst>
-          </p:cNvPr>
-          <p:cNvSpPr>
-            <a:spLocks noGrp="1"/>
-          </p:cNvSpPr>
-          <p:nvPr>
-            <p:ph type="body" idx="1"/>
-          </p:nvPr>
-        </p:nvSpPr>
-        <p:spPr/>
-        <p:txBody>
-          <a:bodyPr/>
-          <a:lstStyle/>
-          <a:p>
-            <a:r>
-              <a:rPr lang="en-US" dirty="0"/>
-              <a:t>Description</a:t>
-            </a:r>
-          </a:p>
-          <a:p>
-            <a:r>
-              <a:rPr lang="en-US" dirty="0"/>
-              <a:t>Classification</a:t>
-            </a:r>
-          </a:p>
-          <a:p>
-            <a:r>
-              <a:rPr lang="en-US" dirty="0"/>
-              <a:t>Detection</a:t>
-            </a:r>
-          </a:p>
-          <a:p>
-            <a:r>
-              <a:rPr lang="en-US" dirty="0"/>
-              <a:t>Prediction</a:t>
-            </a:r>
-          </a:p>
-          <a:p>
-            <a:r>
-              <a:rPr lang="en-US" dirty="0"/>
-              <a:t>Generation</a:t>
-            </a:r>
-          </a:p>
-          <a:p>
-            <a:r>
-              <a:rPr lang="en-US" dirty="0"/>
-              <a:t>Optimization</a:t>
-            </a:r>
-          </a:p>
-          <a:p>
-            <a:r>
-              <a:rPr lang="en-US" dirty="0"/>
-              <a:t>Causal Inference</a:t>
-            </a:r>
-          </a:p>
-        </p:txBody>
-      </p:sp>
-      <p:sp>
-        <p:nvSpPr>
           <p:cNvPr id="3" name="Title 2">
             <a:extLst>
               <a:ext uri="{FF2B5EF4-FFF2-40B4-BE49-F238E27FC236}">
-                <a16:creationId xmlns:a16="http://schemas.microsoft.com/office/drawing/2014/main" id="{18E00A3A-9C26-1B42-A62C-4DB46B741290}"/>
+                <a16:creationId xmlns:a16="http://schemas.microsoft.com/office/drawing/2014/main" id="{FC4F2F47-A164-2C41-A1CD-CFD1AFCBE708}"/>
               </a:ext>
             </a:extLst>
           </p:cNvPr>
@@ -11879,17 +13770,520 @@
           <a:bodyPr/>
           <a:lstStyle/>
           <a:p>
+            <a:pPr algn="ctr"/>
             <a:r>
               <a:rPr lang="en-US" dirty="0"/>
-              <a:t>Decisions we need to make: analytical approach</a:t>
+              <a:t>CASE STUDY</a:t>
             </a:r>
           </a:p>
         </p:txBody>
       </p:sp>
+      <p:pic>
+        <p:nvPicPr>
+          <p:cNvPr id="6" name="Picture 5">
+            <a:extLst>
+              <a:ext uri="{FF2B5EF4-FFF2-40B4-BE49-F238E27FC236}">
+                <a16:creationId xmlns:a16="http://schemas.microsoft.com/office/drawing/2014/main" id="{DD7C8A1F-AE56-5146-B94D-D4E3FEFBC845}"/>
+              </a:ext>
+            </a:extLst>
+          </p:cNvPr>
+          <p:cNvPicPr>
+            <a:picLocks noChangeAspect="1"/>
+          </p:cNvPicPr>
+          <p:nvPr/>
+        </p:nvPicPr>
+        <p:blipFill>
+          <a:blip r:embed="rId2"/>
+          <a:stretch>
+            <a:fillRect/>
+          </a:stretch>
+        </p:blipFill>
+        <p:spPr>
+          <a:xfrm>
+            <a:off x="1524000" y="1676572"/>
+            <a:ext cx="9144000" cy="3035300"/>
+          </a:xfrm>
+          <a:prstGeom prst="rect">
+            <a:avLst/>
+          </a:prstGeom>
+        </p:spPr>
+      </p:pic>
     </p:spTree>
     <p:extLst>
       <p:ext uri="{BB962C8B-B14F-4D97-AF65-F5344CB8AC3E}">
-        <p14:creationId xmlns:p14="http://schemas.microsoft.com/office/powerpoint/2010/main" val="625908078"/>
+        <p14:creationId xmlns:p14="http://schemas.microsoft.com/office/powerpoint/2010/main" val="2007043753"/>
+      </p:ext>
+    </p:extLst>
+  </p:cSld>
+  <p:clrMapOvr>
+    <a:masterClrMapping/>
+  </p:clrMapOvr>
+</p:sld>
+</file>
+
+<file path=ppt/slides/slide9.xml><?xml version="1.0" encoding="utf-8"?>
+<p:sld xmlns:a="http://schemas.openxmlformats.org/drawingml/2006/main" xmlns:r="http://schemas.openxmlformats.org/officeDocument/2006/relationships" xmlns:p="http://schemas.openxmlformats.org/presentationml/2006/main" showMasterSp="0">
+  <p:cSld>
+    <p:bg>
+      <p:bgPr>
+        <a:solidFill>
+          <a:srgbClr val="1A1A1A"/>
+        </a:solidFill>
+        <a:effectLst/>
+      </p:bgPr>
+    </p:bg>
+    <p:spTree>
+      <p:nvGrpSpPr>
+        <p:cNvPr id="1" name=""/>
+        <p:cNvGrpSpPr/>
+        <p:nvPr/>
+      </p:nvGrpSpPr>
+      <p:grpSpPr>
+        <a:xfrm>
+          <a:off x="0" y="0"/>
+          <a:ext cx="0" cy="0"/>
+          <a:chOff x="0" y="0"/>
+          <a:chExt cx="0" cy="0"/>
+        </a:xfrm>
+      </p:grpSpPr>
+      <p:sp>
+        <p:nvSpPr>
+          <p:cNvPr id="2" name="Rectangle 1">
+            <a:extLst>
+              <a:ext uri="{FF2B5EF4-FFF2-40B4-BE49-F238E27FC236}">
+                <a16:creationId xmlns:a16="http://schemas.microsoft.com/office/drawing/2014/main" id="{D3C245FE-59B2-2CAB-97BE-77DB7CCB21B3}"/>
+              </a:ext>
+            </a:extLst>
+          </p:cNvPr>
+          <p:cNvSpPr/>
+          <p:nvPr>
+            <p:custDataLst>
+              <p:tags r:id="rId2"/>
+            </p:custDataLst>
+          </p:nvPr>
+        </p:nvSpPr>
+        <p:spPr>
+          <a:xfrm>
+            <a:off x="444693" y="1742703"/>
+            <a:ext cx="2371696" cy="2371696"/>
+          </a:xfrm>
+          <a:prstGeom prst="rect">
+            <a:avLst/>
+          </a:prstGeom>
+          <a:blipFill>
+            <a:blip>
+              <a:extLst>
+                <a:ext uri="{96DAC541-7B7A-43D3-8B79-37D633B846F1}">
+                  <asvg:svgBlip xmlns:asvg="http://schemas.microsoft.com/office/drawing/2016/SVG/main" r:embed="rId7"/>
+                </a:ext>
+              </a:extLst>
+            </a:blip>
+            <a:stretch>
+              <a:fillRect/>
+            </a:stretch>
+          </a:blipFill>
+          <a:ln w="25400" cap="flat" cmpd="sng" algn="ctr">
+            <a:noFill/>
+            <a:prstDash val="solid"/>
+          </a:ln>
+          <a:effectLst/>
+          <a:extLst>
+            <a:ext uri="{91240B29-F687-4F45-9708-019B960494DF}">
+              <a14:hiddenLine xmlns:a14="http://schemas.microsoft.com/office/drawing/2010/main" w="25400" cap="flat" cmpd="sng" algn="ctr">
+                <a:solidFill>
+                  <a:srgbClr val="FFFFFF"/>
+                </a:solidFill>
+                <a:prstDash val="solid"/>
+              </a14:hiddenLine>
+            </a:ext>
+          </a:extLst>
+        </p:spPr>
+        <p:style>
+          <a:lnRef idx="2">
+            <a:schemeClr val="accent1">
+              <a:shade val="15000"/>
+            </a:schemeClr>
+          </a:lnRef>
+          <a:fillRef idx="1">
+            <a:schemeClr val="accent1"/>
+          </a:fillRef>
+          <a:effectRef idx="0">
+            <a:schemeClr val="accent1"/>
+          </a:effectRef>
+          <a:fontRef idx="minor">
+            <a:schemeClr val="lt1"/>
+          </a:fontRef>
+        </p:style>
+        <p:txBody>
+          <a:bodyPr rtlCol="0" anchor="ctr"/>
+          <a:lstStyle/>
+          <a:p>
+            <a:pPr algn="ctr"/>
+            <a:endParaRPr lang="en-US"/>
+          </a:p>
+        </p:txBody>
+      </p:sp>
+      <p:sp>
+        <p:nvSpPr>
+          <p:cNvPr id="3" name="Rectangle 2">
+            <a:extLst>
+              <a:ext uri="{FF2B5EF4-FFF2-40B4-BE49-F238E27FC236}">
+                <a16:creationId xmlns:a16="http://schemas.microsoft.com/office/drawing/2014/main" id="{3E060550-EEF7-DB48-D1B7-CBED0BC2475E}"/>
+              </a:ext>
+            </a:extLst>
+          </p:cNvPr>
+          <p:cNvSpPr/>
+          <p:nvPr>
+            <p:custDataLst>
+              <p:tags r:id="rId3"/>
+            </p:custDataLst>
+          </p:nvPr>
+        </p:nvSpPr>
+        <p:spPr>
+          <a:xfrm>
+            <a:off x="3112851" y="1000897"/>
+            <a:ext cx="8486226" cy="3855308"/>
+          </a:xfrm>
+          <a:prstGeom prst="rect">
+            <a:avLst/>
+          </a:prstGeom>
+          <a:noFill/>
+          <a:ln w="25400" cap="flat" cmpd="sng" algn="ctr">
+            <a:noFill/>
+            <a:prstDash val="solid"/>
+          </a:ln>
+          <a:effectLst/>
+          <a:extLst>
+            <a:ext uri="{909E8E84-426E-40DD-AFC4-6F175D3DCCD1}">
+              <a14:hiddenFill xmlns:a14="http://schemas.microsoft.com/office/drawing/2010/main">
+                <a:solidFill>
+                  <a:schemeClr val="accent1"/>
+                </a:solidFill>
+              </a14:hiddenFill>
+            </a:ext>
+            <a:ext uri="{91240B29-F687-4F45-9708-019B960494DF}">
+              <a14:hiddenLine xmlns:a14="http://schemas.microsoft.com/office/drawing/2010/main" w="25400" cap="flat" cmpd="sng" algn="ctr">
+                <a:solidFill>
+                  <a:srgbClr val="FFFFFF"/>
+                </a:solidFill>
+                <a:prstDash val="solid"/>
+              </a14:hiddenLine>
+            </a:ext>
+          </a:extLst>
+        </p:spPr>
+        <p:style>
+          <a:lnRef idx="2">
+            <a:schemeClr val="accent1">
+              <a:shade val="15000"/>
+            </a:schemeClr>
+          </a:lnRef>
+          <a:fillRef idx="1">
+            <a:schemeClr val="accent1"/>
+          </a:fillRef>
+          <a:effectRef idx="0">
+            <a:schemeClr val="accent1"/>
+          </a:effectRef>
+          <a:fontRef idx="minor">
+            <a:schemeClr val="lt1"/>
+          </a:fontRef>
+        </p:style>
+        <p:txBody>
+          <a:bodyPr rtlCol="0" anchor="ctr"/>
+          <a:lstStyle/>
+          <a:p>
+            <a:r>
+              <a:rPr lang="en-US" sz="3800" b="1">
+                <a:solidFill>
+                  <a:srgbClr val="FFFFFF"/>
+                </a:solidFill>
+              </a:rPr>
+              <a:t>In the Obermeyer et al. reading, what formulation decision is the focus of the paper?</a:t>
+            </a:r>
+          </a:p>
+        </p:txBody>
+      </p:sp>
+      <p:sp>
+        <p:nvSpPr>
+          <p:cNvPr id="4" name="Rectangle 3">
+            <a:extLst>
+              <a:ext uri="{FF2B5EF4-FFF2-40B4-BE49-F238E27FC236}">
+                <a16:creationId xmlns:a16="http://schemas.microsoft.com/office/drawing/2014/main" id="{839DDC26-F13D-1CB8-1ED8-B7B72578ACBC}"/>
+              </a:ext>
+            </a:extLst>
+          </p:cNvPr>
+          <p:cNvSpPr/>
+          <p:nvPr>
+            <p:custDataLst>
+              <p:tags r:id="rId4"/>
+            </p:custDataLst>
+          </p:nvPr>
+        </p:nvSpPr>
+        <p:spPr>
+          <a:xfrm>
+            <a:off x="0" y="5820032"/>
+            <a:ext cx="12192001" cy="1037968"/>
+          </a:xfrm>
+          <a:prstGeom prst="rect">
+            <a:avLst/>
+          </a:prstGeom>
+          <a:solidFill>
+            <a:srgbClr val="198038"/>
+          </a:solidFill>
+          <a:ln w="25400" cap="flat" cmpd="sng" algn="ctr">
+            <a:noFill/>
+            <a:prstDash val="solid"/>
+          </a:ln>
+          <a:effectLst/>
+          <a:extLst>
+            <a:ext uri="{91240B29-F687-4F45-9708-019B960494DF}">
+              <a14:hiddenLine xmlns:a14="http://schemas.microsoft.com/office/drawing/2010/main" w="25400" cap="flat" cmpd="sng" algn="ctr">
+                <a:solidFill>
+                  <a:schemeClr val="accent1">
+                    <a:shade val="15000"/>
+                  </a:schemeClr>
+                </a:solidFill>
+                <a:prstDash val="solid"/>
+              </a14:hiddenLine>
+            </a:ext>
+          </a:extLst>
+        </p:spPr>
+        <p:style>
+          <a:lnRef idx="2">
+            <a:schemeClr val="accent1">
+              <a:shade val="15000"/>
+            </a:schemeClr>
+          </a:lnRef>
+          <a:fillRef idx="1">
+            <a:schemeClr val="accent1"/>
+          </a:fillRef>
+          <a:effectRef idx="0">
+            <a:schemeClr val="accent1"/>
+          </a:effectRef>
+          <a:fontRef idx="minor">
+            <a:schemeClr val="lt1"/>
+          </a:fontRef>
+        </p:style>
+        <p:txBody>
+          <a:bodyPr lIns="741155" tIns="259492" rIns="1852888" bIns="203886" rtlCol="0" anchor="ctr">
+            <a:normAutofit fontScale="85000" lnSpcReduction="10000"/>
+          </a:bodyPr>
+          <a:lstStyle/>
+          <a:p>
+            <a:r>
+              <a:rPr lang="en-US" sz="2600">
+                <a:solidFill>
+                  <a:srgbClr val="FFFFFF"/>
+                </a:solidFill>
+              </a:rPr>
+              <a:t>The </a:t>
+            </a:r>
+            <a:r>
+              <a:rPr lang="en-US" sz="2600">
+                <a:solidFill>
+                  <a:srgbClr val="FFFFFF"/>
+                </a:solidFill>
+                <a:hlinkClick r:id="rId8">
+                  <a:extLst>
+                    <a:ext uri="{A12FA001-AC4F-418D-AE19-62706E023703}">
+                      <ahyp:hlinkClr xmlns:ahyp="http://schemas.microsoft.com/office/drawing/2018/hyperlinkcolor" val="tx"/>
+                    </a:ext>
+                  </a:extLst>
+                </a:hlinkClick>
+              </a:rPr>
+              <a:t>Slido app</a:t>
+            </a:r>
+            <a:r>
+              <a:rPr lang="en-US" sz="2600">
+                <a:solidFill>
+                  <a:srgbClr val="FFFFFF"/>
+                </a:solidFill>
+              </a:rPr>
+              <a:t> must be installed on every computer you’re presenting from</a:t>
+            </a:r>
+          </a:p>
+        </p:txBody>
+      </p:sp>
+      <p:pic>
+        <p:nvPicPr>
+          <p:cNvPr id="6" name="Graphic 5">
+            <a:extLst>
+              <a:ext uri="{FF2B5EF4-FFF2-40B4-BE49-F238E27FC236}">
+                <a16:creationId xmlns:a16="http://schemas.microsoft.com/office/drawing/2014/main" id="{E1D9AAD2-80CE-BE89-3F40-F7B35E528E0C}"/>
+              </a:ext>
+            </a:extLst>
+          </p:cNvPr>
+          <p:cNvPicPr>
+            <a:picLocks/>
+          </p:cNvPicPr>
+          <p:nvPr/>
+        </p:nvPicPr>
+        <p:blipFill>
+          <a:blip>
+            <a:extLst>
+              <a:ext uri="{96DAC541-7B7A-43D3-8B79-37D633B846F1}">
+                <asvg:svgBlip xmlns:asvg="http://schemas.microsoft.com/office/drawing/2016/SVG/main" r:embed="rId9"/>
+              </a:ext>
+            </a:extLst>
+          </a:blip>
+          <a:stretch>
+            <a:fillRect/>
+          </a:stretch>
+        </p:blipFill>
+        <p:spPr>
+          <a:xfrm>
+            <a:off x="296462" y="6190785"/>
+            <a:ext cx="296462" cy="296462"/>
+          </a:xfrm>
+          <a:prstGeom prst="rect">
+            <a:avLst/>
+          </a:prstGeom>
+        </p:spPr>
+      </p:pic>
+      <p:sp>
+        <p:nvSpPr>
+          <p:cNvPr id="7" name="Trapezoid 6">
+            <a:extLst>
+              <a:ext uri="{FF2B5EF4-FFF2-40B4-BE49-F238E27FC236}">
+                <a16:creationId xmlns:a16="http://schemas.microsoft.com/office/drawing/2014/main" id="{EF3BDA30-5BE3-8912-3976-A1E9820756BE}"/>
+              </a:ext>
+            </a:extLst>
+          </p:cNvPr>
+          <p:cNvSpPr/>
+          <p:nvPr>
+            <p:custDataLst>
+              <p:tags r:id="rId5"/>
+            </p:custDataLst>
+          </p:nvPr>
+        </p:nvSpPr>
+        <p:spPr>
+          <a:xfrm rot="2700000">
+            <a:off x="9620371" y="514924"/>
+            <a:ext cx="3335198" cy="778213"/>
+          </a:xfrm>
+          <a:prstGeom prst="trapezoid">
+            <a:avLst>
+              <a:gd name="adj" fmla="val 100000"/>
+            </a:avLst>
+          </a:prstGeom>
+          <a:solidFill>
+            <a:srgbClr val="0A3316"/>
+          </a:solidFill>
+          <a:ln w="25400" cap="flat" cmpd="sng" algn="ctr">
+            <a:noFill/>
+            <a:prstDash val="solid"/>
+          </a:ln>
+          <a:effectLst/>
+          <a:extLst>
+            <a:ext uri="{91240B29-F687-4F45-9708-019B960494DF}">
+              <a14:hiddenLine xmlns:a14="http://schemas.microsoft.com/office/drawing/2010/main" w="25400" cap="flat" cmpd="sng" algn="ctr">
+                <a:solidFill>
+                  <a:schemeClr val="accent1">
+                    <a:shade val="15000"/>
+                  </a:schemeClr>
+                </a:solidFill>
+                <a:prstDash val="solid"/>
+              </a14:hiddenLine>
+            </a:ext>
+          </a:extLst>
+        </p:spPr>
+        <p:style>
+          <a:lnRef idx="2">
+            <a:schemeClr val="accent1">
+              <a:shade val="15000"/>
+            </a:schemeClr>
+          </a:lnRef>
+          <a:fillRef idx="1">
+            <a:schemeClr val="accent1"/>
+          </a:fillRef>
+          <a:effectRef idx="0">
+            <a:schemeClr val="accent1"/>
+          </a:effectRef>
+          <a:fontRef idx="minor">
+            <a:schemeClr val="lt1"/>
+          </a:fontRef>
+        </p:style>
+        <p:txBody>
+          <a:bodyPr tIns="0" bIns="0" rtlCol="0" anchor="t">
+            <a:normAutofit fontScale="70000" lnSpcReduction="20000"/>
+          </a:bodyPr>
+          <a:lstStyle/>
+          <a:p>
+            <a:pPr algn="ctr"/>
+            <a:r>
+              <a:rPr lang="en-US" sz="2600" b="1">
+                <a:solidFill>
+                  <a:srgbClr val="42A65F"/>
+                </a:solidFill>
+              </a:rPr>
+              <a:t>Do not edit
+</a:t>
+            </a:r>
+            <a:r>
+              <a:rPr lang="en-US" sz="2200">
+                <a:solidFill>
+                  <a:srgbClr val="42A65F"/>
+                </a:solidFill>
+                <a:hlinkClick r:id="rId10">
+                  <a:extLst>
+                    <a:ext uri="{A12FA001-AC4F-418D-AE19-62706E023703}">
+                      <ahyp:hlinkClr xmlns:ahyp="http://schemas.microsoft.com/office/drawing/2018/hyperlinkcolor" val="tx"/>
+                    </a:ext>
+                  </a:extLst>
+                </a:hlinkClick>
+              </a:rPr>
+              <a:t>How to change the design</a:t>
+            </a:r>
+            <a:endParaRPr lang="en-US" sz="2200">
+              <a:solidFill>
+                <a:srgbClr val="42A65F"/>
+              </a:solidFill>
+            </a:endParaRPr>
+          </a:p>
+        </p:txBody>
+      </p:sp>
+      <p:pic>
+        <p:nvPicPr>
+          <p:cNvPr id="9" name="Graphic 8">
+            <a:extLst>
+              <a:ext uri="{FF2B5EF4-FFF2-40B4-BE49-F238E27FC236}">
+                <a16:creationId xmlns:a16="http://schemas.microsoft.com/office/drawing/2014/main" id="{4D4A9870-558A-EB39-E44C-9449F7C31347}"/>
+              </a:ext>
+            </a:extLst>
+          </p:cNvPr>
+          <p:cNvPicPr>
+            <a:picLocks/>
+          </p:cNvPicPr>
+          <p:nvPr/>
+        </p:nvPicPr>
+        <p:blipFill>
+          <a:blip>
+            <a:extLst>
+              <a:ext uri="{96DAC541-7B7A-43D3-8B79-37D633B846F1}">
+                <asvg:svgBlip xmlns:asvg="http://schemas.microsoft.com/office/drawing/2016/SVG/main" r:embed="rId11"/>
+              </a:ext>
+            </a:extLst>
+          </a:blip>
+          <a:stretch>
+            <a:fillRect/>
+          </a:stretch>
+        </p:blipFill>
+        <p:spPr>
+          <a:xfrm>
+            <a:off x="10746748" y="6153727"/>
+            <a:ext cx="1111733" cy="370578"/>
+          </a:xfrm>
+          <a:prstGeom prst="rect">
+            <a:avLst/>
+          </a:prstGeom>
+        </p:spPr>
+      </p:pic>
+    </p:spTree>
+    <p:custDataLst>
+      <p:tags r:id="rId1"/>
+    </p:custDataLst>
+    <p:extLst>
+      <p:ext uri="{BB962C8B-B14F-4D97-AF65-F5344CB8AC3E}">
+        <p14:creationId xmlns:p14="http://schemas.microsoft.com/office/powerpoint/2010/main" val="2231763048"/>
       </p:ext>
     </p:extLst>
   </p:cSld>
@@ -11903,16 +14297,127 @@
 <p:tagLst xmlns:a="http://schemas.openxmlformats.org/drawingml/2006/main" xmlns:r="http://schemas.openxmlformats.org/officeDocument/2006/relationships" xmlns:p="http://schemas.openxmlformats.org/presentationml/2006/main">
   <p:tag name="SLIDO_APP_VERSION" val="1.5.0.0"/>
   <p:tag name="SLIDO_PRESENTATION_ID" val="42dfb5fc-ac72-45e1-b454-03a491153cc4"/>
-  <p:tag name="SLIDO_EVENT_UUID" val="606d3060-a568-4588-a241-3a97192e31fe"/>
-  <p:tag name="SLIDO_EVENT_SECTION_UUID" val="07e0abdb-b0f8-4b83-94f8-1a04124a2d9c"/>
+  <p:tag name="SLIDO_EVENT_UUID" val="4ee70ca1-e1e6-4271-9fce-4efcf7d701cb"/>
+  <p:tag name="SLIDO_EVENT_SECTION_UUID" val="4e6b9f65-e842-4d53-9e0b-c4f65d721159"/>
+</p:tagLst>
+</file>
+
+<file path=ppt/tags/tag10.xml><?xml version="1.0" encoding="utf-8"?>
+<p:tagLst xmlns:a="http://schemas.openxmlformats.org/drawingml/2006/main" xmlns:r="http://schemas.openxmlformats.org/officeDocument/2006/relationships" xmlns:p="http://schemas.openxmlformats.org/presentationml/2006/main">
+  <p:tag name="SLIDO_ELEMENT" val="footer"/>
+</p:tagLst>
+</file>
+
+<file path=ppt/tags/tag11.xml><?xml version="1.0" encoding="utf-8"?>
+<p:tagLst xmlns:a="http://schemas.openxmlformats.org/drawingml/2006/main" xmlns:r="http://schemas.openxmlformats.org/officeDocument/2006/relationships" xmlns:p="http://schemas.openxmlformats.org/presentationml/2006/main">
+  <p:tag name="SLIDO_ELEMENT" val="corner"/>
+</p:tagLst>
+</file>
+
+<file path=ppt/tags/tag12.xml><?xml version="1.0" encoding="utf-8"?>
+<p:tagLst xmlns:a="http://schemas.openxmlformats.org/drawingml/2006/main" xmlns:r="http://schemas.openxmlformats.org/officeDocument/2006/relationships" xmlns:p="http://schemas.openxmlformats.org/presentationml/2006/main">
+  <p:tag name="SLIDO_TYPE" val="SlidoPoll"/>
+  <p:tag name="SLIDO_POLL_UUID" val="b12709b4-cc07-4554-a8d3-1e32d56343e2"/>
+  <p:tag name="SLIDO_TIMELINE" val="W3sic2hvd1Jlc3VsdHMiOmZhbHNlLCJwb2xsUXVlc3Rpb25VdWlkIjoiYTZkMzEwNDgtMzQ3ZS00YzY2LWI5MTctZWFiNDdjMmI2MDc2In0seyJzaG93UmVzdWx0cyI6dHJ1ZSwicG9sbFF1ZXN0aW9uVXVpZCI6ImE2ZDMxMDQ4LTM0N2UtNGM2Ni1iOTE3LWVhYjQ3YzJiNjA3NiJ9XQ=="/>
+</p:tagLst>
+</file>
+
+<file path=ppt/tags/tag13.xml><?xml version="1.0" encoding="utf-8"?>
+<p:tagLst xmlns:a="http://schemas.openxmlformats.org/drawingml/2006/main" xmlns:r="http://schemas.openxmlformats.org/officeDocument/2006/relationships" xmlns:p="http://schemas.openxmlformats.org/presentationml/2006/main">
+  <p:tag name="SLIDO_ELEMENT" val="interaction_image"/>
+  <p:tag name="INTERACTION_TYPE" val="OpenText"/>
+</p:tagLst>
+</file>
+
+<file path=ppt/tags/tag14.xml><?xml version="1.0" encoding="utf-8"?>
+<p:tagLst xmlns:a="http://schemas.openxmlformats.org/drawingml/2006/main" xmlns:r="http://schemas.openxmlformats.org/officeDocument/2006/relationships" xmlns:p="http://schemas.openxmlformats.org/presentationml/2006/main">
+  <p:tag name="SLIDO_ELEMENT" val="title"/>
+</p:tagLst>
+</file>
+
+<file path=ppt/tags/tag15.xml><?xml version="1.0" encoding="utf-8"?>
+<p:tagLst xmlns:a="http://schemas.openxmlformats.org/drawingml/2006/main" xmlns:r="http://schemas.openxmlformats.org/officeDocument/2006/relationships" xmlns:p="http://schemas.openxmlformats.org/presentationml/2006/main">
+  <p:tag name="SLIDO_ELEMENT" val="footer"/>
+</p:tagLst>
+</file>
+
+<file path=ppt/tags/tag16.xml><?xml version="1.0" encoding="utf-8"?>
+<p:tagLst xmlns:a="http://schemas.openxmlformats.org/drawingml/2006/main" xmlns:r="http://schemas.openxmlformats.org/officeDocument/2006/relationships" xmlns:p="http://schemas.openxmlformats.org/presentationml/2006/main">
+  <p:tag name="SLIDO_ELEMENT" val="corner"/>
+</p:tagLst>
+</file>
+
+<file path=ppt/tags/tag17.xml><?xml version="1.0" encoding="utf-8"?>
+<p:tagLst xmlns:a="http://schemas.openxmlformats.org/drawingml/2006/main" xmlns:r="http://schemas.openxmlformats.org/officeDocument/2006/relationships" xmlns:p="http://schemas.openxmlformats.org/presentationml/2006/main">
+  <p:tag name="SLIDO_TYPE" val="SlidoPoll"/>
+  <p:tag name="SLIDO_POLL_UUID" val="0bb803e4-a421-4b26-968b-b2772787a386"/>
+  <p:tag name="SLIDO_TIMELINE" val="W3sicG9sbFF1ZXN0aW9uVXVpZCI6IjZkNmFiNWJjLTViNGItNGUxNC1iNGEwLWQ0YzBkYjI2YjJlYiIsInNob3dSZXN1bHRzIjpmYWxzZX0seyJwb2xsUXVlc3Rpb25VdWlkIjoiNmQ2YWI1YmMtNWI0Yi00ZTE0LWI0YTAtZDRjMGRiMjZiMmViIiwic2hvd1Jlc3VsdHMiOnRydWV9XQ=="/>
+</p:tagLst>
+</file>
+
+<file path=ppt/tags/tag18.xml><?xml version="1.0" encoding="utf-8"?>
+<p:tagLst xmlns:a="http://schemas.openxmlformats.org/drawingml/2006/main" xmlns:r="http://schemas.openxmlformats.org/officeDocument/2006/relationships" xmlns:p="http://schemas.openxmlformats.org/presentationml/2006/main">
+  <p:tag name="SLIDO_ELEMENT" val="interaction_image"/>
+  <p:tag name="INTERACTION_TYPE" val="OpenText"/>
+</p:tagLst>
+</file>
+
+<file path=ppt/tags/tag19.xml><?xml version="1.0" encoding="utf-8"?>
+<p:tagLst xmlns:a="http://schemas.openxmlformats.org/drawingml/2006/main" xmlns:r="http://schemas.openxmlformats.org/officeDocument/2006/relationships" xmlns:p="http://schemas.openxmlformats.org/presentationml/2006/main">
+  <p:tag name="SLIDO_ELEMENT" val="title"/>
 </p:tagLst>
 </file>
 
 <file path=ppt/tags/tag2.xml><?xml version="1.0" encoding="utf-8"?>
 <p:tagLst xmlns:a="http://schemas.openxmlformats.org/drawingml/2006/main" xmlns:r="http://schemas.openxmlformats.org/officeDocument/2006/relationships" xmlns:p="http://schemas.openxmlformats.org/presentationml/2006/main">
   <p:tag name="SLIDO_TYPE" val="SlidoPoll"/>
-  <p:tag name="SLIDO_POLL_UUID" val="b75de85b-a297-4d64-bfe6-9216da9f4c00"/>
-  <p:tag name="SLIDO_TIMELINE" val="W3sic2hvd1Jlc3VsdHMiOmZhbHNlLCJwb2xsUXVlc3Rpb25VdWlkIjoiOTZjMTA1YjEtZjNiMi00MTMwLWJjMjctYWQ0NjUxY2Q2OGJhIn0seyJzaG93UmVzdWx0cyI6dHJ1ZSwicG9sbFF1ZXN0aW9uVXVpZCI6Ijk2YzEwNWIxLWYzYjItNDEzMC1iYzI3LWFkNDY1MWNkNjhiYSJ9XQ=="/>
+  <p:tag name="SLIDO_POLL_UUID" val="fb1097e3-e94d-4b1f-99a1-ce3b57fc6827"/>
+  <p:tag name="SLIDO_TIMELINE" val="W3sicG9sbFF1ZXN0aW9uVXVpZCI6IjEyY2NlMGZhLTM0NWQtNGNjYS05M2U4LTU2NjFmNzI4NjE5MyIsInNob3dSZXN1bHRzIjp0cnVlfV0="/>
+</p:tagLst>
+</file>
+
+<file path=ppt/tags/tag20.xml><?xml version="1.0" encoding="utf-8"?>
+<p:tagLst xmlns:a="http://schemas.openxmlformats.org/drawingml/2006/main" xmlns:r="http://schemas.openxmlformats.org/officeDocument/2006/relationships" xmlns:p="http://schemas.openxmlformats.org/presentationml/2006/main">
+  <p:tag name="SLIDO_ELEMENT" val="footer"/>
+</p:tagLst>
+</file>
+
+<file path=ppt/tags/tag21.xml><?xml version="1.0" encoding="utf-8"?>
+<p:tagLst xmlns:a="http://schemas.openxmlformats.org/drawingml/2006/main" xmlns:r="http://schemas.openxmlformats.org/officeDocument/2006/relationships" xmlns:p="http://schemas.openxmlformats.org/presentationml/2006/main">
+  <p:tag name="SLIDO_ELEMENT" val="corner"/>
+</p:tagLst>
+</file>
+
+<file path=ppt/tags/tag22.xml><?xml version="1.0" encoding="utf-8"?>
+<p:tagLst xmlns:a="http://schemas.openxmlformats.org/drawingml/2006/main" xmlns:r="http://schemas.openxmlformats.org/officeDocument/2006/relationships" xmlns:p="http://schemas.openxmlformats.org/presentationml/2006/main">
+  <p:tag name="SLIDO_TYPE" val="SlidoPoll"/>
+  <p:tag name="SLIDO_POLL_UUID" val="f0d82933-efaa-45a9-8b36-0a807f5848cc"/>
+  <p:tag name="SLIDO_TIMELINE" val="W3sicG9sbFF1ZXN0aW9uVXVpZCI6IjJmZDk0MWRlLWJjNDYtNDVmOC1iYTE5LTIyNDVkZTdmZGEzMiIsInNob3dSZXN1bHRzIjpmYWxzZX0seyJwb2xsUXVlc3Rpb25VdWlkIjoiMmZkOTQxZGUtYmM0Ni00NWY4LWJhMTktMjI0NWRlN2ZkYTMyIiwic2hvd1Jlc3VsdHMiOnRydWV9XQ=="/>
+</p:tagLst>
+</file>
+
+<file path=ppt/tags/tag23.xml><?xml version="1.0" encoding="utf-8"?>
+<p:tagLst xmlns:a="http://schemas.openxmlformats.org/drawingml/2006/main" xmlns:r="http://schemas.openxmlformats.org/officeDocument/2006/relationships" xmlns:p="http://schemas.openxmlformats.org/presentationml/2006/main">
+  <p:tag name="SLIDO_ELEMENT" val="interaction_image"/>
+  <p:tag name="INTERACTION_TYPE" val="OpenText"/>
+</p:tagLst>
+</file>
+
+<file path=ppt/tags/tag24.xml><?xml version="1.0" encoding="utf-8"?>
+<p:tagLst xmlns:a="http://schemas.openxmlformats.org/drawingml/2006/main" xmlns:r="http://schemas.openxmlformats.org/officeDocument/2006/relationships" xmlns:p="http://schemas.openxmlformats.org/presentationml/2006/main">
+  <p:tag name="SLIDO_ELEMENT" val="title"/>
+</p:tagLst>
+</file>
+
+<file path=ppt/tags/tag25.xml><?xml version="1.0" encoding="utf-8"?>
+<p:tagLst xmlns:a="http://schemas.openxmlformats.org/drawingml/2006/main" xmlns:r="http://schemas.openxmlformats.org/officeDocument/2006/relationships" xmlns:p="http://schemas.openxmlformats.org/presentationml/2006/main">
+  <p:tag name="SLIDO_ELEMENT" val="footer"/>
+</p:tagLst>
+</file>
+
+<file path=ppt/tags/tag26.xml><?xml version="1.0" encoding="utf-8"?>
+<p:tagLst xmlns:a="http://schemas.openxmlformats.org/drawingml/2006/main" xmlns:r="http://schemas.openxmlformats.org/officeDocument/2006/relationships" xmlns:p="http://schemas.openxmlformats.org/presentationml/2006/main">
+  <p:tag name="SLIDO_ELEMENT" val="corner"/>
 </p:tagLst>
 </file>
 
@@ -11931,20 +14436,32 @@
 
 <file path=ppt/tags/tag5.xml><?xml version="1.0" encoding="utf-8"?>
 <p:tagLst xmlns:a="http://schemas.openxmlformats.org/drawingml/2006/main" xmlns:r="http://schemas.openxmlformats.org/officeDocument/2006/relationships" xmlns:p="http://schemas.openxmlformats.org/presentationml/2006/main">
-  <p:tag name="SLIDO_TYPE" val="SlidoPoll"/>
-  <p:tag name="SLIDO_POLL_UUID" val="46c8ba16-fca0-43fd-b1cb-5f39e34564df"/>
-  <p:tag name="SLIDO_TIMELINE" val="W3sicG9sbFF1ZXN0aW9uVXVpZCI6IjY4N2VhNDkxLWE2OWYtNDE5Yy1iNWNmLTJlNmI0ZTZjMWE5ZiIsInNob3dSZXN1bHRzIjpmYWxzZX0seyJwb2xsUXVlc3Rpb25VdWlkIjoiNjg3ZWE0OTEtYTY5Zi00MTljLWI1Y2YtMmU2YjRlNmMxYTlmIiwic2hvd1Jlc3VsdHMiOnRydWV9XQ=="/>
+  <p:tag name="SLIDO_ELEMENT" val="footer"/>
 </p:tagLst>
 </file>
 
 <file path=ppt/tags/tag6.xml><?xml version="1.0" encoding="utf-8"?>
+<p:tagLst xmlns:a="http://schemas.openxmlformats.org/drawingml/2006/main" xmlns:r="http://schemas.openxmlformats.org/officeDocument/2006/relationships" xmlns:p="http://schemas.openxmlformats.org/presentationml/2006/main">
+  <p:tag name="SLIDO_ELEMENT" val="corner"/>
+</p:tagLst>
+</file>
+
+<file path=ppt/tags/tag7.xml><?xml version="1.0" encoding="utf-8"?>
+<p:tagLst xmlns:a="http://schemas.openxmlformats.org/drawingml/2006/main" xmlns:r="http://schemas.openxmlformats.org/officeDocument/2006/relationships" xmlns:p="http://schemas.openxmlformats.org/presentationml/2006/main">
+  <p:tag name="SLIDO_TYPE" val="SlidoPoll"/>
+  <p:tag name="SLIDO_POLL_UUID" val="a4e39b57-9e5a-44f2-99c4-8985046d2d25"/>
+  <p:tag name="SLIDO_TIMELINE" val="W3sic2hvd1Jlc3VsdHMiOnRydWUsInBvbGxRdWVzdGlvblV1aWQiOiJlOWMxODQ5ZC1kODQ5LTQ3ZWYtOWRiMC1kNTIzNmM4YWFlMGYifV0="/>
+</p:tagLst>
+</file>
+
+<file path=ppt/tags/tag8.xml><?xml version="1.0" encoding="utf-8"?>
 <p:tagLst xmlns:a="http://schemas.openxmlformats.org/drawingml/2006/main" xmlns:r="http://schemas.openxmlformats.org/officeDocument/2006/relationships" xmlns:p="http://schemas.openxmlformats.org/presentationml/2006/main">
   <p:tag name="SLIDO_ELEMENT" val="interaction_image"/>
   <p:tag name="INTERACTION_TYPE" val="OpenText"/>
 </p:tagLst>
 </file>
 
-<file path=ppt/tags/tag7.xml><?xml version="1.0" encoding="utf-8"?>
+<file path=ppt/tags/tag9.xml><?xml version="1.0" encoding="utf-8"?>
 <p:tagLst xmlns:a="http://schemas.openxmlformats.org/drawingml/2006/main" xmlns:r="http://schemas.openxmlformats.org/officeDocument/2006/relationships" xmlns:p="http://schemas.openxmlformats.org/presentationml/2006/main">
   <p:tag name="SLIDO_ELEMENT" val="title"/>
 </p:tagLst>

--- a/Lectures/07-formulation-and-baselines.pptx
+++ b/Lectures/07-formulation-and-baselines.pptx
@@ -5,7 +5,7 @@
     <p:sldMasterId id="2147483648" r:id="rId1"/>
   </p:sldMasterIdLst>
   <p:notesMasterIdLst>
-    <p:notesMasterId r:id="rId33"/>
+    <p:notesMasterId r:id="rId35"/>
   </p:notesMasterIdLst>
   <p:sldIdLst>
     <p:sldId id="256" r:id="rId2"/>
@@ -31,19 +31,21 @@
     <p:sldId id="273" r:id="rId22"/>
     <p:sldId id="277" r:id="rId23"/>
     <p:sldId id="285" r:id="rId24"/>
-    <p:sldId id="427" r:id="rId25"/>
-    <p:sldId id="432" r:id="rId26"/>
-    <p:sldId id="453" r:id="rId27"/>
-    <p:sldId id="454" r:id="rId28"/>
-    <p:sldId id="455" r:id="rId29"/>
-    <p:sldId id="456" r:id="rId30"/>
-    <p:sldId id="431" r:id="rId31"/>
-    <p:sldId id="449" r:id="rId32"/>
+    <p:sldId id="457" r:id="rId25"/>
+    <p:sldId id="458" r:id="rId26"/>
+    <p:sldId id="427" r:id="rId27"/>
+    <p:sldId id="432" r:id="rId28"/>
+    <p:sldId id="453" r:id="rId29"/>
+    <p:sldId id="454" r:id="rId30"/>
+    <p:sldId id="455" r:id="rId31"/>
+    <p:sldId id="456" r:id="rId32"/>
+    <p:sldId id="431" r:id="rId33"/>
+    <p:sldId id="449" r:id="rId34"/>
   </p:sldIdLst>
   <p:sldSz cx="12192000" cy="6858000"/>
   <p:notesSz cx="6858000" cy="9144000"/>
   <p:custDataLst>
-    <p:tags r:id="rId34"/>
+    <p:tags r:id="rId36"/>
   </p:custDataLst>
   <p:defaultTextStyle>
     <a:defPPr marR="0" lvl="0" algn="l" rtl="0">
@@ -279,7 +281,7 @@
       <p15:sldGuideLst xmlns:p15="http://schemas.microsoft.com/office/powerpoint/2012/main"/>
     </p:ext>
     <p:ext uri="http://customooxmlschemas.google.com/">
-      <go:slidesCustomData xmlns="" xmlns:mc="http://schemas.openxmlformats.org/markup-compatibility/2006" xmlns:mv="urn:schemas-microsoft-com:mac:vml" xmlns:c="http://schemas.openxmlformats.org/drawingml/2006/chart" xmlns:dgm="http://schemas.openxmlformats.org/drawingml/2006/diagram" xmlns:o="urn:schemas-microsoft-com:office:office" xmlns:v="urn:schemas-microsoft-com:vml" xmlns:pvml="urn:schemas-microsoft-com:office:powerpoint" xmlns:com="http://schemas.openxmlformats.org/drawingml/2006/compatibility" xmlns:p14="http://schemas.microsoft.com/office/powerpoint/2010/main" xmlns:p15="http://schemas.microsoft.com/office/powerpoint/2012/main" xmlns:go="http://customooxmlschemas.google.com/" r:id="rId35" roundtripDataSignature="AMtx7mjFyVUGRZWio+dc9dxzYsimUxNJbg=="/>
+      <go:slidesCustomData xmlns:go="http://customooxmlschemas.google.com/" xmlns:p15="http://schemas.microsoft.com/office/powerpoint/2012/main" xmlns:p14="http://schemas.microsoft.com/office/powerpoint/2010/main" xmlns:com="http://schemas.openxmlformats.org/drawingml/2006/compatibility" xmlns:pvml="urn:schemas-microsoft-com:office:powerpoint" xmlns:v="urn:schemas-microsoft-com:vml" xmlns:o="urn:schemas-microsoft-com:office:office" xmlns:dgm="http://schemas.openxmlformats.org/drawingml/2006/diagram" xmlns:c="http://schemas.openxmlformats.org/drawingml/2006/chart" xmlns:mv="urn:schemas-microsoft-com:mac:vml" xmlns:mc="http://schemas.openxmlformats.org/markup-compatibility/2006" xmlns="" r:id="rId37" roundtripDataSignature="AMtx7mjFyVUGRZWio+dc9dxzYsimUxNJbg=="/>
     </p:ext>
   </p:extLst>
 </p:presentation>
@@ -10275,6 +10277,558 @@
           <p:cNvPr id="2" name="Text Placeholder 1">
             <a:extLst>
               <a:ext uri="{FF2B5EF4-FFF2-40B4-BE49-F238E27FC236}">
+                <a16:creationId xmlns:a16="http://schemas.microsoft.com/office/drawing/2014/main" id="{78F0506D-BEF7-FBB0-7005-B22A55D81544}"/>
+              </a:ext>
+            </a:extLst>
+          </p:cNvPr>
+          <p:cNvSpPr>
+            <a:spLocks noGrp="1"/>
+          </p:cNvSpPr>
+          <p:nvPr>
+            <p:ph type="body" idx="1"/>
+          </p:nvPr>
+        </p:nvSpPr>
+        <p:spPr/>
+        <p:txBody>
+          <a:bodyPr/>
+          <a:lstStyle/>
+          <a:p>
+            <a:endParaRPr lang="en-US"/>
+          </a:p>
+        </p:txBody>
+      </p:sp>
+      <p:sp>
+        <p:nvSpPr>
+          <p:cNvPr id="3" name="Title 2">
+            <a:extLst>
+              <a:ext uri="{FF2B5EF4-FFF2-40B4-BE49-F238E27FC236}">
+                <a16:creationId xmlns:a16="http://schemas.microsoft.com/office/drawing/2014/main" id="{D6DE705D-E660-AE66-E566-D28A7F103430}"/>
+              </a:ext>
+            </a:extLst>
+          </p:cNvPr>
+          <p:cNvSpPr>
+            <a:spLocks noGrp="1"/>
+          </p:cNvSpPr>
+          <p:nvPr>
+            <p:ph type="title"/>
+          </p:nvPr>
+        </p:nvSpPr>
+        <p:spPr/>
+        <p:txBody>
+          <a:bodyPr/>
+          <a:lstStyle/>
+          <a:p>
+            <a:endParaRPr lang="en-US"/>
+          </a:p>
+        </p:txBody>
+      </p:sp>
+    </p:spTree>
+    <p:extLst>
+      <p:ext uri="{BB962C8B-B14F-4D97-AF65-F5344CB8AC3E}">
+        <p14:creationId xmlns:p14="http://schemas.microsoft.com/office/powerpoint/2010/main" val="1849212225"/>
+      </p:ext>
+    </p:extLst>
+  </p:cSld>
+  <p:clrMapOvr>
+    <a:masterClrMapping/>
+  </p:clrMapOvr>
+</p:sld>
+</file>
+
+<file path=ppt/slides/slide25.xml><?xml version="1.0" encoding="utf-8"?>
+<p:sld xmlns:a="http://schemas.openxmlformats.org/drawingml/2006/main" xmlns:r="http://schemas.openxmlformats.org/officeDocument/2006/relationships" xmlns:p="http://schemas.openxmlformats.org/presentationml/2006/main" showMasterSp="0">
+  <p:cSld>
+    <p:bg>
+      <p:bgPr>
+        <a:solidFill>
+          <a:srgbClr val="1A1A1A"/>
+        </a:solidFill>
+        <a:effectLst/>
+      </p:bgPr>
+    </p:bg>
+    <p:spTree>
+      <p:nvGrpSpPr>
+        <p:cNvPr id="1" name=""/>
+        <p:cNvGrpSpPr/>
+        <p:nvPr/>
+      </p:nvGrpSpPr>
+      <p:grpSpPr>
+        <a:xfrm>
+          <a:off x="0" y="0"/>
+          <a:ext cx="0" cy="0"/>
+          <a:chOff x="0" y="0"/>
+          <a:chExt cx="0" cy="0"/>
+        </a:xfrm>
+      </p:grpSpPr>
+      <p:sp>
+        <p:nvSpPr>
+          <p:cNvPr id="2" name="Rectangle 1">
+            <a:extLst>
+              <a:ext uri="{FF2B5EF4-FFF2-40B4-BE49-F238E27FC236}">
+                <a16:creationId xmlns:a16="http://schemas.microsoft.com/office/drawing/2014/main" id="{EADB1650-1627-B0D6-9E65-22E03E7B49A3}"/>
+              </a:ext>
+            </a:extLst>
+          </p:cNvPr>
+          <p:cNvSpPr/>
+          <p:nvPr>
+            <p:custDataLst>
+              <p:tags r:id="rId2"/>
+            </p:custDataLst>
+          </p:nvPr>
+        </p:nvSpPr>
+        <p:spPr>
+          <a:xfrm>
+            <a:off x="444693" y="1742703"/>
+            <a:ext cx="2371696" cy="2371696"/>
+          </a:xfrm>
+          <a:prstGeom prst="rect">
+            <a:avLst/>
+          </a:prstGeom>
+          <a:blipFill>
+            <a:blip>
+              <a:extLst>
+                <a:ext uri="{96DAC541-7B7A-43D3-8B79-37D633B846F1}">
+                  <asvg:svgBlip xmlns:asvg="http://schemas.microsoft.com/office/drawing/2016/SVG/main" r:embed="rId7"/>
+                </a:ext>
+              </a:extLst>
+            </a:blip>
+            <a:stretch>
+              <a:fillRect/>
+            </a:stretch>
+          </a:blipFill>
+          <a:ln w="25400" cap="flat" cmpd="sng" algn="ctr">
+            <a:noFill/>
+            <a:prstDash val="solid"/>
+          </a:ln>
+          <a:effectLst/>
+          <a:extLst>
+            <a:ext uri="{91240B29-F687-4F45-9708-019B960494DF}">
+              <a14:hiddenLine xmlns:a14="http://schemas.microsoft.com/office/drawing/2010/main" w="25400" cap="flat" cmpd="sng" algn="ctr">
+                <a:solidFill>
+                  <a:srgbClr val="FFFFFF"/>
+                </a:solidFill>
+                <a:prstDash val="solid"/>
+              </a14:hiddenLine>
+            </a:ext>
+          </a:extLst>
+        </p:spPr>
+        <p:style>
+          <a:lnRef idx="2">
+            <a:schemeClr val="accent1">
+              <a:shade val="15000"/>
+            </a:schemeClr>
+          </a:lnRef>
+          <a:fillRef idx="1">
+            <a:schemeClr val="accent1"/>
+          </a:fillRef>
+          <a:effectRef idx="0">
+            <a:schemeClr val="accent1"/>
+          </a:effectRef>
+          <a:fontRef idx="minor">
+            <a:schemeClr val="lt1"/>
+          </a:fontRef>
+        </p:style>
+        <p:txBody>
+          <a:bodyPr rtlCol="0" anchor="ctr"/>
+          <a:lstStyle/>
+          <a:p>
+            <a:pPr algn="ctr"/>
+            <a:endParaRPr lang="en-US"/>
+          </a:p>
+        </p:txBody>
+      </p:sp>
+      <p:sp>
+        <p:nvSpPr>
+          <p:cNvPr id="3" name="Rectangle 2">
+            <a:extLst>
+              <a:ext uri="{FF2B5EF4-FFF2-40B4-BE49-F238E27FC236}">
+                <a16:creationId xmlns:a16="http://schemas.microsoft.com/office/drawing/2014/main" id="{4A50EE6C-19C3-4909-6FF4-C55893F56796}"/>
+              </a:ext>
+            </a:extLst>
+          </p:cNvPr>
+          <p:cNvSpPr/>
+          <p:nvPr>
+            <p:custDataLst>
+              <p:tags r:id="rId3"/>
+            </p:custDataLst>
+          </p:nvPr>
+        </p:nvSpPr>
+        <p:spPr>
+          <a:xfrm>
+            <a:off x="3112851" y="1000897"/>
+            <a:ext cx="8486226" cy="3855308"/>
+          </a:xfrm>
+          <a:prstGeom prst="rect">
+            <a:avLst/>
+          </a:prstGeom>
+          <a:noFill/>
+          <a:ln w="25400" cap="flat" cmpd="sng" algn="ctr">
+            <a:noFill/>
+            <a:prstDash val="solid"/>
+          </a:ln>
+          <a:effectLst/>
+          <a:extLst>
+            <a:ext uri="{909E8E84-426E-40DD-AFC4-6F175D3DCCD1}">
+              <a14:hiddenFill xmlns:a14="http://schemas.microsoft.com/office/drawing/2010/main">
+                <a:solidFill>
+                  <a:schemeClr val="accent1"/>
+                </a:solidFill>
+              </a14:hiddenFill>
+            </a:ext>
+            <a:ext uri="{91240B29-F687-4F45-9708-019B960494DF}">
+              <a14:hiddenLine xmlns:a14="http://schemas.microsoft.com/office/drawing/2010/main" w="25400" cap="flat" cmpd="sng" algn="ctr">
+                <a:solidFill>
+                  <a:srgbClr val="FFFFFF"/>
+                </a:solidFill>
+                <a:prstDash val="solid"/>
+              </a14:hiddenLine>
+            </a:ext>
+          </a:extLst>
+        </p:spPr>
+        <p:style>
+          <a:lnRef idx="2">
+            <a:schemeClr val="accent1">
+              <a:shade val="15000"/>
+            </a:schemeClr>
+          </a:lnRef>
+          <a:fillRef idx="1">
+            <a:schemeClr val="accent1"/>
+          </a:fillRef>
+          <a:effectRef idx="0">
+            <a:schemeClr val="accent1"/>
+          </a:effectRef>
+          <a:fontRef idx="minor">
+            <a:schemeClr val="lt1"/>
+          </a:fontRef>
+        </p:style>
+        <p:txBody>
+          <a:bodyPr rtlCol="0" anchor="ctr"/>
+          <a:lstStyle/>
+          <a:p>
+            <a:r>
+              <a:rPr lang="en-US" sz="4000" b="1">
+                <a:solidFill>
+                  <a:srgbClr val="FFFFFF"/>
+                </a:solidFill>
+              </a:rPr>
+              <a:t>How’s teamwork going?</a:t>
+            </a:r>
+          </a:p>
+        </p:txBody>
+      </p:sp>
+      <p:sp>
+        <p:nvSpPr>
+          <p:cNvPr id="4" name="Rectangle 3">
+            <a:extLst>
+              <a:ext uri="{FF2B5EF4-FFF2-40B4-BE49-F238E27FC236}">
+                <a16:creationId xmlns:a16="http://schemas.microsoft.com/office/drawing/2014/main" id="{9AB53B75-7E91-337F-0DF5-1242733818CD}"/>
+              </a:ext>
+            </a:extLst>
+          </p:cNvPr>
+          <p:cNvSpPr/>
+          <p:nvPr>
+            <p:custDataLst>
+              <p:tags r:id="rId4"/>
+            </p:custDataLst>
+          </p:nvPr>
+        </p:nvSpPr>
+        <p:spPr>
+          <a:xfrm>
+            <a:off x="0" y="5820032"/>
+            <a:ext cx="12192001" cy="1037968"/>
+          </a:xfrm>
+          <a:prstGeom prst="rect">
+            <a:avLst/>
+          </a:prstGeom>
+          <a:solidFill>
+            <a:srgbClr val="198038"/>
+          </a:solidFill>
+          <a:ln w="25400" cap="flat" cmpd="sng" algn="ctr">
+            <a:noFill/>
+            <a:prstDash val="solid"/>
+          </a:ln>
+          <a:effectLst/>
+          <a:extLst>
+            <a:ext uri="{91240B29-F687-4F45-9708-019B960494DF}">
+              <a14:hiddenLine xmlns:a14="http://schemas.microsoft.com/office/drawing/2010/main" w="25400" cap="flat" cmpd="sng" algn="ctr">
+                <a:solidFill>
+                  <a:schemeClr val="accent1">
+                    <a:shade val="15000"/>
+                  </a:schemeClr>
+                </a:solidFill>
+                <a:prstDash val="solid"/>
+              </a14:hiddenLine>
+            </a:ext>
+          </a:extLst>
+        </p:spPr>
+        <p:style>
+          <a:lnRef idx="2">
+            <a:schemeClr val="accent1">
+              <a:shade val="15000"/>
+            </a:schemeClr>
+          </a:lnRef>
+          <a:fillRef idx="1">
+            <a:schemeClr val="accent1"/>
+          </a:fillRef>
+          <a:effectRef idx="0">
+            <a:schemeClr val="accent1"/>
+          </a:effectRef>
+          <a:fontRef idx="minor">
+            <a:schemeClr val="lt1"/>
+          </a:fontRef>
+        </p:style>
+        <p:txBody>
+          <a:bodyPr lIns="741155" tIns="259492" rIns="1852888" bIns="203886" rtlCol="0" anchor="ctr">
+            <a:normAutofit fontScale="85000" lnSpcReduction="10000"/>
+          </a:bodyPr>
+          <a:lstStyle/>
+          <a:p>
+            <a:r>
+              <a:rPr lang="en-US" sz="2600">
+                <a:solidFill>
+                  <a:srgbClr val="FFFFFF"/>
+                </a:solidFill>
+              </a:rPr>
+              <a:t>The </a:t>
+            </a:r>
+            <a:r>
+              <a:rPr lang="en-US" sz="2600">
+                <a:solidFill>
+                  <a:srgbClr val="FFFFFF"/>
+                </a:solidFill>
+                <a:hlinkClick r:id="rId8">
+                  <a:extLst>
+                    <a:ext uri="{A12FA001-AC4F-418D-AE19-62706E023703}">
+                      <ahyp:hlinkClr xmlns:ahyp="http://schemas.microsoft.com/office/drawing/2018/hyperlinkcolor" val="tx"/>
+                    </a:ext>
+                  </a:extLst>
+                </a:hlinkClick>
+              </a:rPr>
+              <a:t>Slido app</a:t>
+            </a:r>
+            <a:r>
+              <a:rPr lang="en-US" sz="2600">
+                <a:solidFill>
+                  <a:srgbClr val="FFFFFF"/>
+                </a:solidFill>
+              </a:rPr>
+              <a:t> must be installed on every computer you’re presenting from</a:t>
+            </a:r>
+          </a:p>
+        </p:txBody>
+      </p:sp>
+      <p:pic>
+        <p:nvPicPr>
+          <p:cNvPr id="6" name="Graphic 5">
+            <a:extLst>
+              <a:ext uri="{FF2B5EF4-FFF2-40B4-BE49-F238E27FC236}">
+                <a16:creationId xmlns:a16="http://schemas.microsoft.com/office/drawing/2014/main" id="{05CD12A5-41AA-FE9B-BF8F-DA3074F7A795}"/>
+              </a:ext>
+            </a:extLst>
+          </p:cNvPr>
+          <p:cNvPicPr>
+            <a:picLocks/>
+          </p:cNvPicPr>
+          <p:nvPr/>
+        </p:nvPicPr>
+        <p:blipFill>
+          <a:blip>
+            <a:extLst>
+              <a:ext uri="{96DAC541-7B7A-43D3-8B79-37D633B846F1}">
+                <asvg:svgBlip xmlns:asvg="http://schemas.microsoft.com/office/drawing/2016/SVG/main" r:embed="rId9"/>
+              </a:ext>
+            </a:extLst>
+          </a:blip>
+          <a:stretch>
+            <a:fillRect/>
+          </a:stretch>
+        </p:blipFill>
+        <p:spPr>
+          <a:xfrm>
+            <a:off x="296462" y="6190785"/>
+            <a:ext cx="296462" cy="296462"/>
+          </a:xfrm>
+          <a:prstGeom prst="rect">
+            <a:avLst/>
+          </a:prstGeom>
+        </p:spPr>
+      </p:pic>
+      <p:sp>
+        <p:nvSpPr>
+          <p:cNvPr id="7" name="Trapezoid 6">
+            <a:extLst>
+              <a:ext uri="{FF2B5EF4-FFF2-40B4-BE49-F238E27FC236}">
+                <a16:creationId xmlns:a16="http://schemas.microsoft.com/office/drawing/2014/main" id="{FDAC58F6-D75E-7149-AC20-CB77284DD4EF}"/>
+              </a:ext>
+            </a:extLst>
+          </p:cNvPr>
+          <p:cNvSpPr/>
+          <p:nvPr>
+            <p:custDataLst>
+              <p:tags r:id="rId5"/>
+            </p:custDataLst>
+          </p:nvPr>
+        </p:nvSpPr>
+        <p:spPr>
+          <a:xfrm rot="2700000">
+            <a:off x="9620371" y="514924"/>
+            <a:ext cx="3335198" cy="778213"/>
+          </a:xfrm>
+          <a:prstGeom prst="trapezoid">
+            <a:avLst>
+              <a:gd name="adj" fmla="val 100000"/>
+            </a:avLst>
+          </a:prstGeom>
+          <a:solidFill>
+            <a:srgbClr val="0A3316"/>
+          </a:solidFill>
+          <a:ln w="25400" cap="flat" cmpd="sng" algn="ctr">
+            <a:noFill/>
+            <a:prstDash val="solid"/>
+          </a:ln>
+          <a:effectLst/>
+          <a:extLst>
+            <a:ext uri="{91240B29-F687-4F45-9708-019B960494DF}">
+              <a14:hiddenLine xmlns:a14="http://schemas.microsoft.com/office/drawing/2010/main" w="25400" cap="flat" cmpd="sng" algn="ctr">
+                <a:solidFill>
+                  <a:schemeClr val="accent1">
+                    <a:shade val="15000"/>
+                  </a:schemeClr>
+                </a:solidFill>
+                <a:prstDash val="solid"/>
+              </a14:hiddenLine>
+            </a:ext>
+          </a:extLst>
+        </p:spPr>
+        <p:style>
+          <a:lnRef idx="2">
+            <a:schemeClr val="accent1">
+              <a:shade val="15000"/>
+            </a:schemeClr>
+          </a:lnRef>
+          <a:fillRef idx="1">
+            <a:schemeClr val="accent1"/>
+          </a:fillRef>
+          <a:effectRef idx="0">
+            <a:schemeClr val="accent1"/>
+          </a:effectRef>
+          <a:fontRef idx="minor">
+            <a:schemeClr val="lt1"/>
+          </a:fontRef>
+        </p:style>
+        <p:txBody>
+          <a:bodyPr tIns="0" bIns="0" rtlCol="0" anchor="t">
+            <a:normAutofit fontScale="70000" lnSpcReduction="20000"/>
+          </a:bodyPr>
+          <a:lstStyle/>
+          <a:p>
+            <a:pPr algn="ctr"/>
+            <a:r>
+              <a:rPr lang="en-US" sz="2600" b="1">
+                <a:solidFill>
+                  <a:srgbClr val="42A65F"/>
+                </a:solidFill>
+              </a:rPr>
+              <a:t>Do not edit
+</a:t>
+            </a:r>
+            <a:r>
+              <a:rPr lang="en-US" sz="2200">
+                <a:solidFill>
+                  <a:srgbClr val="42A65F"/>
+                </a:solidFill>
+                <a:hlinkClick r:id="rId10">
+                  <a:extLst>
+                    <a:ext uri="{A12FA001-AC4F-418D-AE19-62706E023703}">
+                      <ahyp:hlinkClr xmlns:ahyp="http://schemas.microsoft.com/office/drawing/2018/hyperlinkcolor" val="tx"/>
+                    </a:ext>
+                  </a:extLst>
+                </a:hlinkClick>
+              </a:rPr>
+              <a:t>How to change the design</a:t>
+            </a:r>
+            <a:endParaRPr lang="en-US" sz="2200">
+              <a:solidFill>
+                <a:srgbClr val="42A65F"/>
+              </a:solidFill>
+            </a:endParaRPr>
+          </a:p>
+        </p:txBody>
+      </p:sp>
+      <p:pic>
+        <p:nvPicPr>
+          <p:cNvPr id="9" name="Graphic 8">
+            <a:extLst>
+              <a:ext uri="{FF2B5EF4-FFF2-40B4-BE49-F238E27FC236}">
+                <a16:creationId xmlns:a16="http://schemas.microsoft.com/office/drawing/2014/main" id="{56463B27-70AD-419A-DE9F-44755B0DAE98}"/>
+              </a:ext>
+            </a:extLst>
+          </p:cNvPr>
+          <p:cNvPicPr>
+            <a:picLocks/>
+          </p:cNvPicPr>
+          <p:nvPr/>
+        </p:nvPicPr>
+        <p:blipFill>
+          <a:blip>
+            <a:extLst>
+              <a:ext uri="{96DAC541-7B7A-43D3-8B79-37D633B846F1}">
+                <asvg:svgBlip xmlns:asvg="http://schemas.microsoft.com/office/drawing/2016/SVG/main" r:embed="rId11"/>
+              </a:ext>
+            </a:extLst>
+          </a:blip>
+          <a:stretch>
+            <a:fillRect/>
+          </a:stretch>
+        </p:blipFill>
+        <p:spPr>
+          <a:xfrm>
+            <a:off x="10746748" y="6153727"/>
+            <a:ext cx="1111733" cy="370578"/>
+          </a:xfrm>
+          <a:prstGeom prst="rect">
+            <a:avLst/>
+          </a:prstGeom>
+        </p:spPr>
+      </p:pic>
+    </p:spTree>
+    <p:custDataLst>
+      <p:tags r:id="rId1"/>
+    </p:custDataLst>
+    <p:extLst>
+      <p:ext uri="{BB962C8B-B14F-4D97-AF65-F5344CB8AC3E}">
+        <p14:creationId xmlns:p14="http://schemas.microsoft.com/office/powerpoint/2010/main" val="1424972218"/>
+      </p:ext>
+    </p:extLst>
+  </p:cSld>
+  <p:clrMapOvr>
+    <a:masterClrMapping/>
+  </p:clrMapOvr>
+</p:sld>
+</file>
+
+<file path=ppt/slides/slide26.xml><?xml version="1.0" encoding="utf-8"?>
+<p:sld xmlns:a="http://schemas.openxmlformats.org/drawingml/2006/main" xmlns:r="http://schemas.openxmlformats.org/officeDocument/2006/relationships" xmlns:p="http://schemas.openxmlformats.org/presentationml/2006/main">
+  <p:cSld>
+    <p:spTree>
+      <p:nvGrpSpPr>
+        <p:cNvPr id="1" name=""/>
+        <p:cNvGrpSpPr/>
+        <p:nvPr/>
+      </p:nvGrpSpPr>
+      <p:grpSpPr>
+        <a:xfrm>
+          <a:off x="0" y="0"/>
+          <a:ext cx="0" cy="0"/>
+          <a:chOff x="0" y="0"/>
+          <a:chExt cx="0" cy="0"/>
+        </a:xfrm>
+      </p:grpSpPr>
+      <p:sp>
+        <p:nvSpPr>
+          <p:cNvPr id="2" name="Text Placeholder 1">
+            <a:extLst>
+              <a:ext uri="{FF2B5EF4-FFF2-40B4-BE49-F238E27FC236}">
                 <a16:creationId xmlns:a16="http://schemas.microsoft.com/office/drawing/2014/main" id="{16F0CF04-B42B-C044-ACCB-6C665E5B57C0}"/>
               </a:ext>
             </a:extLst>
@@ -10356,7 +10910,7 @@
 </p:sld>
 </file>
 
-<file path=ppt/slides/slide25.xml><?xml version="1.0" encoding="utf-8"?>
+<file path=ppt/slides/slide27.xml><?xml version="1.0" encoding="utf-8"?>
 <p:sld xmlns:a="http://schemas.openxmlformats.org/drawingml/2006/main" xmlns:r="http://schemas.openxmlformats.org/officeDocument/2006/relationships" xmlns:p="http://schemas.openxmlformats.org/presentationml/2006/main">
   <p:cSld>
     <p:spTree>
@@ -10501,7 +11055,7 @@
 </p:sld>
 </file>
 
-<file path=ppt/slides/slide26.xml><?xml version="1.0" encoding="utf-8"?>
+<file path=ppt/slides/slide28.xml><?xml version="1.0" encoding="utf-8"?>
 <p:sld xmlns:a="http://schemas.openxmlformats.org/drawingml/2006/main" xmlns:r="http://schemas.openxmlformats.org/officeDocument/2006/relationships" xmlns:p="http://schemas.openxmlformats.org/presentationml/2006/main" showMasterSp="0">
   <p:cSld>
     <p:bg>
@@ -10973,7 +11527,7 @@
 </p:sld>
 </file>
 
-<file path=ppt/slides/slide27.xml><?xml version="1.0" encoding="utf-8"?>
+<file path=ppt/slides/slide29.xml><?xml version="1.0" encoding="utf-8"?>
 <p:sld xmlns:a="http://schemas.openxmlformats.org/drawingml/2006/main" xmlns:r="http://schemas.openxmlformats.org/officeDocument/2006/relationships" xmlns:p="http://schemas.openxmlformats.org/presentationml/2006/main" showMasterSp="0">
   <p:cSld>
     <p:bg>
@@ -11522,7 +12076,155 @@
 </p:sld>
 </file>
 
-<file path=ppt/slides/slide28.xml><?xml version="1.0" encoding="utf-8"?>
+<file path=ppt/slides/slide3.xml><?xml version="1.0" encoding="utf-8"?>
+<p:sld xmlns:a="http://schemas.openxmlformats.org/drawingml/2006/main" xmlns:r="http://schemas.openxmlformats.org/officeDocument/2006/relationships" xmlns:p="http://schemas.openxmlformats.org/presentationml/2006/main">
+  <p:cSld>
+    <p:spTree>
+      <p:nvGrpSpPr>
+        <p:cNvPr id="1" name="Shape 135"/>
+        <p:cNvGrpSpPr/>
+        <p:nvPr/>
+      </p:nvGrpSpPr>
+      <p:grpSpPr>
+        <a:xfrm>
+          <a:off x="0" y="0"/>
+          <a:ext cx="0" cy="0"/>
+          <a:chOff x="0" y="0"/>
+          <a:chExt cx="0" cy="0"/>
+        </a:xfrm>
+      </p:grpSpPr>
+      <p:sp>
+        <p:nvSpPr>
+          <p:cNvPr id="136" name="Google Shape;136;p23"/>
+          <p:cNvSpPr txBox="1">
+            <a:spLocks noGrp="1"/>
+          </p:cNvSpPr>
+          <p:nvPr>
+            <p:ph type="body" idx="1"/>
+          </p:nvPr>
+        </p:nvSpPr>
+        <p:spPr>
+          <a:xfrm>
+            <a:off x="268209" y="1588503"/>
+            <a:ext cx="11666400" cy="4954500"/>
+          </a:xfrm>
+          <a:prstGeom prst="rect">
+            <a:avLst/>
+          </a:prstGeom>
+          <a:noFill/>
+          <a:ln>
+            <a:noFill/>
+          </a:ln>
+        </p:spPr>
+        <p:txBody>
+          <a:bodyPr spcFirstLastPara="1" wrap="square" lIns="91433" tIns="45700" rIns="91433" bIns="45700" anchor="t" anchorCtr="0">
+            <a:noAutofit/>
+          </a:bodyPr>
+          <a:lstStyle/>
+          <a:p>
+            <a:pPr marL="457189" indent="-338658">
+              <a:spcBef>
+                <a:spcPts val="400"/>
+              </a:spcBef>
+              <a:buSzPts val="1400"/>
+            </a:pPr>
+            <a:r>
+              <a:rPr lang="en" dirty="0"/>
+              <a:t>Learn how to go from Scope to an Analytical Formulation: what decisions needs to be made and how?</a:t>
+            </a:r>
+            <a:endParaRPr dirty="0"/>
+          </a:p>
+          <a:p>
+            <a:pPr marL="457189" indent="-220128">
+              <a:spcBef>
+                <a:spcPts val="400"/>
+              </a:spcBef>
+              <a:buSzPts val="1400"/>
+              <a:buNone/>
+            </a:pPr>
+            <a:endParaRPr dirty="0"/>
+          </a:p>
+          <a:p>
+            <a:pPr marL="457189" indent="-338658">
+              <a:spcBef>
+                <a:spcPts val="400"/>
+              </a:spcBef>
+              <a:buSzPts val="1400"/>
+            </a:pPr>
+            <a:r>
+              <a:rPr lang="en" dirty="0"/>
+              <a:t>Learn about effective baselines and how to develop them </a:t>
+            </a:r>
+            <a:r>
+              <a:rPr lang="en" b="1" dirty="0"/>
+              <a:t>before</a:t>
+            </a:r>
+            <a:r>
+              <a:rPr lang="en" dirty="0"/>
+              <a:t> building a complex ML model</a:t>
+            </a:r>
+            <a:endParaRPr dirty="0"/>
+          </a:p>
+          <a:p>
+            <a:pPr marL="457189" indent="0">
+              <a:spcBef>
+                <a:spcPts val="400"/>
+              </a:spcBef>
+              <a:buNone/>
+            </a:pPr>
+            <a:endParaRPr dirty="0"/>
+          </a:p>
+        </p:txBody>
+      </p:sp>
+      <p:sp>
+        <p:nvSpPr>
+          <p:cNvPr id="137" name="Google Shape;137;p23"/>
+          <p:cNvSpPr txBox="1">
+            <a:spLocks noGrp="1"/>
+          </p:cNvSpPr>
+          <p:nvPr>
+            <p:ph type="title"/>
+          </p:nvPr>
+        </p:nvSpPr>
+        <p:spPr>
+          <a:xfrm>
+            <a:off x="130558" y="418467"/>
+            <a:ext cx="11360700" cy="763500"/>
+          </a:xfrm>
+          <a:prstGeom prst="rect">
+            <a:avLst/>
+          </a:prstGeom>
+          <a:noFill/>
+          <a:ln>
+            <a:noFill/>
+          </a:ln>
+        </p:spPr>
+        <p:txBody>
+          <a:bodyPr spcFirstLastPara="1" wrap="square" lIns="121900" tIns="121900" rIns="121900" bIns="121900" anchor="t" anchorCtr="0">
+            <a:noAutofit/>
+          </a:bodyPr>
+          <a:lstStyle/>
+          <a:p>
+            <a:pPr>
+              <a:buSzPts val="2800"/>
+            </a:pPr>
+            <a:r>
+              <a:rPr lang="en"/>
+              <a:t>Plan for today</a:t>
+            </a:r>
+            <a:endParaRPr/>
+          </a:p>
+        </p:txBody>
+      </p:sp>
+    </p:spTree>
+  </p:cSld>
+  <p:clrMapOvr>
+    <a:masterClrMapping/>
+  </p:clrMapOvr>
+</p:sld>
+</file>
+
+<file path=ppt/slides/slide30.xml><?xml version="1.0" encoding="utf-8"?>
 <p:sld xmlns:a="http://schemas.openxmlformats.org/drawingml/2006/main" xmlns:r="http://schemas.openxmlformats.org/officeDocument/2006/relationships" xmlns:p="http://schemas.openxmlformats.org/presentationml/2006/main" showMasterSp="0">
   <p:cSld>
     <p:bg>
@@ -12071,7 +12773,7 @@
 </p:sld>
 </file>
 
-<file path=ppt/slides/slide29.xml><?xml version="1.0" encoding="utf-8"?>
+<file path=ppt/slides/slide31.xml><?xml version="1.0" encoding="utf-8"?>
 <p:sld xmlns:a="http://schemas.openxmlformats.org/drawingml/2006/main" xmlns:r="http://schemas.openxmlformats.org/officeDocument/2006/relationships" xmlns:p="http://schemas.openxmlformats.org/presentationml/2006/main" showMasterSp="0">
   <p:cSld>
     <p:bg>
@@ -12620,155 +13322,7 @@
 </p:sld>
 </file>
 
-<file path=ppt/slides/slide3.xml><?xml version="1.0" encoding="utf-8"?>
-<p:sld xmlns:a="http://schemas.openxmlformats.org/drawingml/2006/main" xmlns:r="http://schemas.openxmlformats.org/officeDocument/2006/relationships" xmlns:p="http://schemas.openxmlformats.org/presentationml/2006/main">
-  <p:cSld>
-    <p:spTree>
-      <p:nvGrpSpPr>
-        <p:cNvPr id="1" name="Shape 135"/>
-        <p:cNvGrpSpPr/>
-        <p:nvPr/>
-      </p:nvGrpSpPr>
-      <p:grpSpPr>
-        <a:xfrm>
-          <a:off x="0" y="0"/>
-          <a:ext cx="0" cy="0"/>
-          <a:chOff x="0" y="0"/>
-          <a:chExt cx="0" cy="0"/>
-        </a:xfrm>
-      </p:grpSpPr>
-      <p:sp>
-        <p:nvSpPr>
-          <p:cNvPr id="136" name="Google Shape;136;p23"/>
-          <p:cNvSpPr txBox="1">
-            <a:spLocks noGrp="1"/>
-          </p:cNvSpPr>
-          <p:nvPr>
-            <p:ph type="body" idx="1"/>
-          </p:nvPr>
-        </p:nvSpPr>
-        <p:spPr>
-          <a:xfrm>
-            <a:off x="268209" y="1588503"/>
-            <a:ext cx="11666400" cy="4954500"/>
-          </a:xfrm>
-          <a:prstGeom prst="rect">
-            <a:avLst/>
-          </a:prstGeom>
-          <a:noFill/>
-          <a:ln>
-            <a:noFill/>
-          </a:ln>
-        </p:spPr>
-        <p:txBody>
-          <a:bodyPr spcFirstLastPara="1" wrap="square" lIns="91433" tIns="45700" rIns="91433" bIns="45700" anchor="t" anchorCtr="0">
-            <a:noAutofit/>
-          </a:bodyPr>
-          <a:lstStyle/>
-          <a:p>
-            <a:pPr marL="457189" indent="-338658">
-              <a:spcBef>
-                <a:spcPts val="400"/>
-              </a:spcBef>
-              <a:buSzPts val="1400"/>
-            </a:pPr>
-            <a:r>
-              <a:rPr lang="en" dirty="0"/>
-              <a:t>Learn how to go from Scope to an Analytical Formulation: what decisions needs to be made and how?</a:t>
-            </a:r>
-            <a:endParaRPr dirty="0"/>
-          </a:p>
-          <a:p>
-            <a:pPr marL="457189" indent="-220128">
-              <a:spcBef>
-                <a:spcPts val="400"/>
-              </a:spcBef>
-              <a:buSzPts val="1400"/>
-              <a:buNone/>
-            </a:pPr>
-            <a:endParaRPr dirty="0"/>
-          </a:p>
-          <a:p>
-            <a:pPr marL="457189" indent="-338658">
-              <a:spcBef>
-                <a:spcPts val="400"/>
-              </a:spcBef>
-              <a:buSzPts val="1400"/>
-            </a:pPr>
-            <a:r>
-              <a:rPr lang="en" dirty="0"/>
-              <a:t>Learn about effective baselines and how to develop them </a:t>
-            </a:r>
-            <a:r>
-              <a:rPr lang="en" b="1" dirty="0"/>
-              <a:t>before</a:t>
-            </a:r>
-            <a:r>
-              <a:rPr lang="en" dirty="0"/>
-              <a:t> building a complex ML model</a:t>
-            </a:r>
-            <a:endParaRPr dirty="0"/>
-          </a:p>
-          <a:p>
-            <a:pPr marL="457189" indent="0">
-              <a:spcBef>
-                <a:spcPts val="400"/>
-              </a:spcBef>
-              <a:buNone/>
-            </a:pPr>
-            <a:endParaRPr dirty="0"/>
-          </a:p>
-        </p:txBody>
-      </p:sp>
-      <p:sp>
-        <p:nvSpPr>
-          <p:cNvPr id="137" name="Google Shape;137;p23"/>
-          <p:cNvSpPr txBox="1">
-            <a:spLocks noGrp="1"/>
-          </p:cNvSpPr>
-          <p:nvPr>
-            <p:ph type="title"/>
-          </p:nvPr>
-        </p:nvSpPr>
-        <p:spPr>
-          <a:xfrm>
-            <a:off x="130558" y="418467"/>
-            <a:ext cx="11360700" cy="763500"/>
-          </a:xfrm>
-          <a:prstGeom prst="rect">
-            <a:avLst/>
-          </a:prstGeom>
-          <a:noFill/>
-          <a:ln>
-            <a:noFill/>
-          </a:ln>
-        </p:spPr>
-        <p:txBody>
-          <a:bodyPr spcFirstLastPara="1" wrap="square" lIns="121900" tIns="121900" rIns="121900" bIns="121900" anchor="t" anchorCtr="0">
-            <a:noAutofit/>
-          </a:bodyPr>
-          <a:lstStyle/>
-          <a:p>
-            <a:pPr>
-              <a:buSzPts val="2800"/>
-            </a:pPr>
-            <a:r>
-              <a:rPr lang="en"/>
-              <a:t>Plan for today</a:t>
-            </a:r>
-            <a:endParaRPr/>
-          </a:p>
-        </p:txBody>
-      </p:sp>
-    </p:spTree>
-  </p:cSld>
-  <p:clrMapOvr>
-    <a:masterClrMapping/>
-  </p:clrMapOvr>
-</p:sld>
-</file>
-
-<file path=ppt/slides/slide30.xml><?xml version="1.0" encoding="utf-8"?>
+<file path=ppt/slides/slide32.xml><?xml version="1.0" encoding="utf-8"?>
 <p:sld xmlns:a="http://schemas.openxmlformats.org/drawingml/2006/main" xmlns:r="http://schemas.openxmlformats.org/officeDocument/2006/relationships" xmlns:p="http://schemas.openxmlformats.org/presentationml/2006/main">
   <p:cSld>
     <p:spTree>
@@ -12891,7 +13445,7 @@
 </p:sld>
 </file>
 
-<file path=ppt/slides/slide31.xml><?xml version="1.0" encoding="utf-8"?>
+<file path=ppt/slides/slide33.xml><?xml version="1.0" encoding="utf-8"?>
 <p:sld xmlns:a="http://schemas.openxmlformats.org/drawingml/2006/main" xmlns:r="http://schemas.openxmlformats.org/officeDocument/2006/relationships" xmlns:p="http://schemas.openxmlformats.org/presentationml/2006/main">
   <p:cSld>
     <p:spTree>
@@ -14317,8 +14871,8 @@
 <file path=ppt/tags/tag12.xml><?xml version="1.0" encoding="utf-8"?>
 <p:tagLst xmlns:a="http://schemas.openxmlformats.org/drawingml/2006/main" xmlns:r="http://schemas.openxmlformats.org/officeDocument/2006/relationships" xmlns:p="http://schemas.openxmlformats.org/presentationml/2006/main">
   <p:tag name="SLIDO_TYPE" val="SlidoPoll"/>
-  <p:tag name="SLIDO_POLL_UUID" val="b12709b4-cc07-4554-a8d3-1e32d56343e2"/>
-  <p:tag name="SLIDO_TIMELINE" val="W3sic2hvd1Jlc3VsdHMiOmZhbHNlLCJwb2xsUXVlc3Rpb25VdWlkIjoiYTZkMzEwNDgtMzQ3ZS00YzY2LWI5MTctZWFiNDdjMmI2MDc2In0seyJzaG93UmVzdWx0cyI6dHJ1ZSwicG9sbFF1ZXN0aW9uVXVpZCI6ImE2ZDMxMDQ4LTM0N2UtNGM2Ni1iOTE3LWVhYjQ3YzJiNjA3NiJ9XQ=="/>
+  <p:tag name="SLIDO_POLL_UUID" val="a4e39b57-9e5a-44f2-99c4-8985046d2d25"/>
+  <p:tag name="SLIDO_TIMELINE" val="W3sic2hvd1Jlc3VsdHMiOnRydWUsInBvbGxRdWVzdGlvblV1aWQiOiJlOWMxODQ5ZC1kODQ5LTQ3ZWYtOWRiMC1kNTIzNmM4YWFlMGYifV0="/>
 </p:tagLst>
 </file>
 
@@ -14350,8 +14904,8 @@
 <file path=ppt/tags/tag17.xml><?xml version="1.0" encoding="utf-8"?>
 <p:tagLst xmlns:a="http://schemas.openxmlformats.org/drawingml/2006/main" xmlns:r="http://schemas.openxmlformats.org/officeDocument/2006/relationships" xmlns:p="http://schemas.openxmlformats.org/presentationml/2006/main">
   <p:tag name="SLIDO_TYPE" val="SlidoPoll"/>
-  <p:tag name="SLIDO_POLL_UUID" val="0bb803e4-a421-4b26-968b-b2772787a386"/>
-  <p:tag name="SLIDO_TIMELINE" val="W3sicG9sbFF1ZXN0aW9uVXVpZCI6IjZkNmFiNWJjLTViNGItNGUxNC1iNGEwLWQ0YzBkYjI2YjJlYiIsInNob3dSZXN1bHRzIjpmYWxzZX0seyJwb2xsUXVlc3Rpb25VdWlkIjoiNmQ2YWI1YmMtNWI0Yi00ZTE0LWI0YTAtZDRjMGRiMjZiMmViIiwic2hvd1Jlc3VsdHMiOnRydWV9XQ=="/>
+  <p:tag name="SLIDO_POLL_UUID" val="b12709b4-cc07-4554-a8d3-1e32d56343e2"/>
+  <p:tag name="SLIDO_TIMELINE" val="W3sic2hvd1Jlc3VsdHMiOmZhbHNlLCJwb2xsUXVlc3Rpb25VdWlkIjoiYTZkMzEwNDgtMzQ3ZS00YzY2LWI5MTctZWFiNDdjMmI2MDc2In0seyJzaG93UmVzdWx0cyI6dHJ1ZSwicG9sbFF1ZXN0aW9uVXVpZCI6ImE2ZDMxMDQ4LTM0N2UtNGM2Ni1iOTE3LWVhYjQ3YzJiNjA3NiJ9XQ=="/>
 </p:tagLst>
 </file>
 
@@ -14391,8 +14945,8 @@
 <file path=ppt/tags/tag22.xml><?xml version="1.0" encoding="utf-8"?>
 <p:tagLst xmlns:a="http://schemas.openxmlformats.org/drawingml/2006/main" xmlns:r="http://schemas.openxmlformats.org/officeDocument/2006/relationships" xmlns:p="http://schemas.openxmlformats.org/presentationml/2006/main">
   <p:tag name="SLIDO_TYPE" val="SlidoPoll"/>
-  <p:tag name="SLIDO_POLL_UUID" val="f0d82933-efaa-45a9-8b36-0a807f5848cc"/>
-  <p:tag name="SLIDO_TIMELINE" val="W3sicG9sbFF1ZXN0aW9uVXVpZCI6IjJmZDk0MWRlLWJjNDYtNDVmOC1iYTE5LTIyNDVkZTdmZGEzMiIsInNob3dSZXN1bHRzIjpmYWxzZX0seyJwb2xsUXVlc3Rpb25VdWlkIjoiMmZkOTQxZGUtYmM0Ni00NWY4LWJhMTktMjI0NWRlN2ZkYTMyIiwic2hvd1Jlc3VsdHMiOnRydWV9XQ=="/>
+  <p:tag name="SLIDO_POLL_UUID" val="0bb803e4-a421-4b26-968b-b2772787a386"/>
+  <p:tag name="SLIDO_TIMELINE" val="W3sicG9sbFF1ZXN0aW9uVXVpZCI6IjZkNmFiNWJjLTViNGItNGUxNC1iNGEwLWQ0YzBkYjI2YjJlYiIsInNob3dSZXN1bHRzIjpmYWxzZX0seyJwb2xsUXVlc3Rpb25VdWlkIjoiNmQ2YWI1YmMtNWI0Yi00ZTE0LWI0YTAtZDRjMGRiMjZiMmViIiwic2hvd1Jlc3VsdHMiOnRydWV9XQ=="/>
 </p:tagLst>
 </file>
 
@@ -14421,10 +14975,43 @@
 </p:tagLst>
 </file>
 
+<file path=ppt/tags/tag27.xml><?xml version="1.0" encoding="utf-8"?>
+<p:tagLst xmlns:a="http://schemas.openxmlformats.org/drawingml/2006/main" xmlns:r="http://schemas.openxmlformats.org/officeDocument/2006/relationships" xmlns:p="http://schemas.openxmlformats.org/presentationml/2006/main">
+  <p:tag name="SLIDO_TYPE" val="SlidoPoll"/>
+  <p:tag name="SLIDO_POLL_UUID" val="f0d82933-efaa-45a9-8b36-0a807f5848cc"/>
+  <p:tag name="SLIDO_TIMELINE" val="W3sicG9sbFF1ZXN0aW9uVXVpZCI6IjJmZDk0MWRlLWJjNDYtNDVmOC1iYTE5LTIyNDVkZTdmZGEzMiIsInNob3dSZXN1bHRzIjpmYWxzZX0seyJwb2xsUXVlc3Rpb25VdWlkIjoiMmZkOTQxZGUtYmM0Ni00NWY4LWJhMTktMjI0NWRlN2ZkYTMyIiwic2hvd1Jlc3VsdHMiOnRydWV9XQ=="/>
+</p:tagLst>
+</file>
+
+<file path=ppt/tags/tag28.xml><?xml version="1.0" encoding="utf-8"?>
+<p:tagLst xmlns:a="http://schemas.openxmlformats.org/drawingml/2006/main" xmlns:r="http://schemas.openxmlformats.org/officeDocument/2006/relationships" xmlns:p="http://schemas.openxmlformats.org/presentationml/2006/main">
+  <p:tag name="SLIDO_ELEMENT" val="interaction_image"/>
+  <p:tag name="INTERACTION_TYPE" val="OpenText"/>
+</p:tagLst>
+</file>
+
+<file path=ppt/tags/tag29.xml><?xml version="1.0" encoding="utf-8"?>
+<p:tagLst xmlns:a="http://schemas.openxmlformats.org/drawingml/2006/main" xmlns:r="http://schemas.openxmlformats.org/officeDocument/2006/relationships" xmlns:p="http://schemas.openxmlformats.org/presentationml/2006/main">
+  <p:tag name="SLIDO_ELEMENT" val="title"/>
+</p:tagLst>
+</file>
+
 <file path=ppt/tags/tag3.xml><?xml version="1.0" encoding="utf-8"?>
 <p:tagLst xmlns:a="http://schemas.openxmlformats.org/drawingml/2006/main" xmlns:r="http://schemas.openxmlformats.org/officeDocument/2006/relationships" xmlns:p="http://schemas.openxmlformats.org/presentationml/2006/main">
   <p:tag name="SLIDO_ELEMENT" val="interaction_image"/>
   <p:tag name="INTERACTION_TYPE" val="OpenText"/>
+</p:tagLst>
+</file>
+
+<file path=ppt/tags/tag30.xml><?xml version="1.0" encoding="utf-8"?>
+<p:tagLst xmlns:a="http://schemas.openxmlformats.org/drawingml/2006/main" xmlns:r="http://schemas.openxmlformats.org/officeDocument/2006/relationships" xmlns:p="http://schemas.openxmlformats.org/presentationml/2006/main">
+  <p:tag name="SLIDO_ELEMENT" val="footer"/>
+</p:tagLst>
+</file>
+
+<file path=ppt/tags/tag31.xml><?xml version="1.0" encoding="utf-8"?>
+<p:tagLst xmlns:a="http://schemas.openxmlformats.org/drawingml/2006/main" xmlns:r="http://schemas.openxmlformats.org/officeDocument/2006/relationships" xmlns:p="http://schemas.openxmlformats.org/presentationml/2006/main">
+  <p:tag name="SLIDO_ELEMENT" val="corner"/>
 </p:tagLst>
 </file>
 
@@ -14449,15 +15036,15 @@
 <file path=ppt/tags/tag7.xml><?xml version="1.0" encoding="utf-8"?>
 <p:tagLst xmlns:a="http://schemas.openxmlformats.org/drawingml/2006/main" xmlns:r="http://schemas.openxmlformats.org/officeDocument/2006/relationships" xmlns:p="http://schemas.openxmlformats.org/presentationml/2006/main">
   <p:tag name="SLIDO_TYPE" val="SlidoPoll"/>
-  <p:tag name="SLIDO_POLL_UUID" val="a4e39b57-9e5a-44f2-99c4-8985046d2d25"/>
-  <p:tag name="SLIDO_TIMELINE" val="W3sic2hvd1Jlc3VsdHMiOnRydWUsInBvbGxRdWVzdGlvblV1aWQiOiJlOWMxODQ5ZC1kODQ5LTQ3ZWYtOWRiMC1kNTIzNmM4YWFlMGYifV0="/>
+  <p:tag name="SLIDO_POLL_UUID" val="f72beded-f2bf-4279-8bde-1645edd39e06"/>
+  <p:tag name="SLIDO_TIMELINE" val="W3sic2hvd1Jlc3VsdHMiOnRydWUsInBvbGxRdWVzdGlvblV1aWQiOiIxMmNjMzU5ZS1hOGY4LTQ5ZjAtOGYxMi1mODE0MzU2YWIyODYifV0="/>
 </p:tagLst>
 </file>
 
 <file path=ppt/tags/tag8.xml><?xml version="1.0" encoding="utf-8"?>
 <p:tagLst xmlns:a="http://schemas.openxmlformats.org/drawingml/2006/main" xmlns:r="http://schemas.openxmlformats.org/officeDocument/2006/relationships" xmlns:p="http://schemas.openxmlformats.org/presentationml/2006/main">
   <p:tag name="SLIDO_ELEMENT" val="interaction_image"/>
-  <p:tag name="INTERACTION_TYPE" val="OpenText"/>
+  <p:tag name="INTERACTION_TYPE" val="MultipleChoice"/>
 </p:tagLst>
 </file>
 
